--- a/docs/Content-Suite - Sustentacion.pptx
+++ b/docs/Content-Suite - Sustentacion.pptx
@@ -5,14 +5,14 @@
     <p:sldMasterId id="2147483648" r:id="rId1"/>
   </p:sldMasterIdLst>
   <p:sldIdLst>
-    <p:sldId id="256" r:id="rId7"/>
-    <p:sldId id="257" r:id="rId8"/>
-    <p:sldId id="258" r:id="rId9"/>
-    <p:sldId id="259" r:id="rId10"/>
-    <p:sldId id="260" r:id="rId11"/>
-    <p:sldId id="261" r:id="rId12"/>
+    <p:sldId id="256" r:id="rId2"/>
+    <p:sldId id="257" r:id="rId3"/>
+    <p:sldId id="258" r:id="rId4"/>
+    <p:sldId id="259" r:id="rId5"/>
+    <p:sldId id="260" r:id="rId6"/>
+    <p:sldId id="261" r:id="rId7"/>
   </p:sldIdLst>
-  <p:sldSz cx="12191695" cy="6858000" type="screen4x3"/>
+  <p:sldSz cx="12192000" cy="6858000"/>
   <p:notesSz cx="6858000" cy="9144000"/>
   <p:defaultTextStyle>
     <a:defPPr>
@@ -109,6 +109,22 @@
       </a:defRPr>
     </a:lvl9pPr>
   </p:defaultTextStyle>
+  <p:extLst>
+    <p:ext uri="{EFAFB233-063F-42B5-8137-9DF3F51BA10A}">
+      <p15:sldGuideLst xmlns:p15="http://schemas.microsoft.com/office/powerpoint/2012/main">
+        <p15:guide id="1" orient="horz" pos="2160">
+          <p15:clr>
+            <a:srgbClr val="A4A3A4"/>
+          </p15:clr>
+        </p15:guide>
+        <p15:guide id="2" pos="2880">
+          <p15:clr>
+            <a:srgbClr val="A4A3A4"/>
+          </p15:clr>
+        </p15:guide>
+      </p15:sldGuideLst>
+    </p:ext>
+  </p:extLst>
 </p:presentation>
 </file>
 
@@ -150,10 +166,9 @@
           <a:lstStyle/>
           <a:p>
             <a:r>
-              <a:rPr lang="en-US" smtClean="0"/>
+              <a:rPr lang="en-US"/>
               <a:t>Click to edit Master title style</a:t>
             </a:r>
-            <a:endParaRPr lang="en-US"/>
           </a:p>
         </p:txBody>
       </p:sp>
@@ -269,10 +284,9 @@
           </a:lstStyle>
           <a:p>
             <a:r>
-              <a:rPr lang="en-US" smtClean="0"/>
+              <a:rPr lang="en-US"/>
               <a:t>Click to edit Master subtitle style</a:t>
             </a:r>
-            <a:endParaRPr lang="en-US"/>
           </a:p>
         </p:txBody>
       </p:sp>
@@ -293,7 +307,7 @@
           <a:p>
             <a:fld id="{5BCAD085-E8A6-8845-BD4E-CB4CCA059FC4}" type="datetimeFigureOut">
               <a:rPr lang="en-US" smtClean="0"/>
-              <a:t>1/27/13</a:t>
+              <a:t>8/20/2026</a:t>
             </a:fld>
             <a:endParaRPr lang="en-US"/>
           </a:p>
@@ -335,7 +349,7 @@
           <a:p>
             <a:fld id="{C1FF6DA9-008F-8B48-92A6-B652298478BF}" type="slidenum">
               <a:rPr lang="en-US" smtClean="0"/>
-              <a:t>‹#›</a:t>
+              <a:t>‹Nº›</a:t>
             </a:fld>
             <a:endParaRPr lang="en-US"/>
           </a:p>
@@ -387,10 +401,9 @@
           <a:lstStyle/>
           <a:p>
             <a:r>
-              <a:rPr lang="en-US" smtClean="0"/>
+              <a:rPr lang="en-US"/>
               <a:t>Click to edit Master title style</a:t>
             </a:r>
-            <a:endParaRPr lang="en-US"/>
           </a:p>
         </p:txBody>
       </p:sp>
@@ -411,38 +424,37 @@
           <a:p>
             <a:pPr lvl="0"/>
             <a:r>
-              <a:rPr lang="en-US" smtClean="0"/>
+              <a:rPr lang="en-US"/>
               <a:t>Click to edit Master text styles</a:t>
             </a:r>
           </a:p>
           <a:p>
             <a:pPr lvl="1"/>
             <a:r>
-              <a:rPr lang="en-US" smtClean="0"/>
+              <a:rPr lang="en-US"/>
               <a:t>Second level</a:t>
             </a:r>
           </a:p>
           <a:p>
             <a:pPr lvl="2"/>
             <a:r>
-              <a:rPr lang="en-US" smtClean="0"/>
+              <a:rPr lang="en-US"/>
               <a:t>Third level</a:t>
             </a:r>
           </a:p>
           <a:p>
             <a:pPr lvl="3"/>
             <a:r>
-              <a:rPr lang="en-US" smtClean="0"/>
+              <a:rPr lang="en-US"/>
               <a:t>Fourth level</a:t>
             </a:r>
           </a:p>
           <a:p>
             <a:pPr lvl="4"/>
             <a:r>
-              <a:rPr lang="en-US" smtClean="0"/>
+              <a:rPr lang="en-US"/>
               <a:t>Fifth level</a:t>
             </a:r>
-            <a:endParaRPr lang="en-US"/>
           </a:p>
         </p:txBody>
       </p:sp>
@@ -463,7 +475,7 @@
           <a:p>
             <a:fld id="{5BCAD085-E8A6-8845-BD4E-CB4CCA059FC4}" type="datetimeFigureOut">
               <a:rPr lang="en-US" smtClean="0"/>
-              <a:t>1/27/13</a:t>
+              <a:t>8/20/2026</a:t>
             </a:fld>
             <a:endParaRPr lang="en-US"/>
           </a:p>
@@ -505,7 +517,7 @@
           <a:p>
             <a:fld id="{C1FF6DA9-008F-8B48-92A6-B652298478BF}" type="slidenum">
               <a:rPr lang="en-US" smtClean="0"/>
-              <a:t>‹#›</a:t>
+              <a:t>‹Nº›</a:t>
             </a:fld>
             <a:endParaRPr lang="en-US"/>
           </a:p>
@@ -562,10 +574,9 @@
           <a:lstStyle/>
           <a:p>
             <a:r>
-              <a:rPr lang="en-US" smtClean="0"/>
+              <a:rPr lang="en-US"/>
               <a:t>Click to edit Master title style</a:t>
             </a:r>
-            <a:endParaRPr lang="en-US"/>
           </a:p>
         </p:txBody>
       </p:sp>
@@ -591,38 +602,37 @@
           <a:p>
             <a:pPr lvl="0"/>
             <a:r>
-              <a:rPr lang="en-US" smtClean="0"/>
+              <a:rPr lang="en-US"/>
               <a:t>Click to edit Master text styles</a:t>
             </a:r>
           </a:p>
           <a:p>
             <a:pPr lvl="1"/>
             <a:r>
-              <a:rPr lang="en-US" smtClean="0"/>
+              <a:rPr lang="en-US"/>
               <a:t>Second level</a:t>
             </a:r>
           </a:p>
           <a:p>
             <a:pPr lvl="2"/>
             <a:r>
-              <a:rPr lang="en-US" smtClean="0"/>
+              <a:rPr lang="en-US"/>
               <a:t>Third level</a:t>
             </a:r>
           </a:p>
           <a:p>
             <a:pPr lvl="3"/>
             <a:r>
-              <a:rPr lang="en-US" smtClean="0"/>
+              <a:rPr lang="en-US"/>
               <a:t>Fourth level</a:t>
             </a:r>
           </a:p>
           <a:p>
             <a:pPr lvl="4"/>
             <a:r>
-              <a:rPr lang="en-US" smtClean="0"/>
+              <a:rPr lang="en-US"/>
               <a:t>Fifth level</a:t>
             </a:r>
-            <a:endParaRPr lang="en-US"/>
           </a:p>
         </p:txBody>
       </p:sp>
@@ -643,7 +653,7 @@
           <a:p>
             <a:fld id="{5BCAD085-E8A6-8845-BD4E-CB4CCA059FC4}" type="datetimeFigureOut">
               <a:rPr lang="en-US" smtClean="0"/>
-              <a:t>1/27/13</a:t>
+              <a:t>8/20/2026</a:t>
             </a:fld>
             <a:endParaRPr lang="en-US"/>
           </a:p>
@@ -685,7 +695,7 @@
           <a:p>
             <a:fld id="{C1FF6DA9-008F-8B48-92A6-B652298478BF}" type="slidenum">
               <a:rPr lang="en-US" smtClean="0"/>
-              <a:t>‹#›</a:t>
+              <a:t>‹Nº›</a:t>
             </a:fld>
             <a:endParaRPr lang="en-US"/>
           </a:p>
@@ -737,10 +747,9 @@
           <a:lstStyle/>
           <a:p>
             <a:r>
-              <a:rPr lang="en-US" smtClean="0"/>
+              <a:rPr lang="en-US"/>
               <a:t>Click to edit Master title style</a:t>
             </a:r>
-            <a:endParaRPr lang="en-US"/>
           </a:p>
         </p:txBody>
       </p:sp>
@@ -761,38 +770,37 @@
           <a:p>
             <a:pPr lvl="0"/>
             <a:r>
-              <a:rPr lang="en-US" smtClean="0"/>
+              <a:rPr lang="en-US"/>
               <a:t>Click to edit Master text styles</a:t>
             </a:r>
           </a:p>
           <a:p>
             <a:pPr lvl="1"/>
             <a:r>
-              <a:rPr lang="en-US" smtClean="0"/>
+              <a:rPr lang="en-US"/>
               <a:t>Second level</a:t>
             </a:r>
           </a:p>
           <a:p>
             <a:pPr lvl="2"/>
             <a:r>
-              <a:rPr lang="en-US" smtClean="0"/>
+              <a:rPr lang="en-US"/>
               <a:t>Third level</a:t>
             </a:r>
           </a:p>
           <a:p>
             <a:pPr lvl="3"/>
             <a:r>
-              <a:rPr lang="en-US" smtClean="0"/>
+              <a:rPr lang="en-US"/>
               <a:t>Fourth level</a:t>
             </a:r>
           </a:p>
           <a:p>
             <a:pPr lvl="4"/>
             <a:r>
-              <a:rPr lang="en-US" smtClean="0"/>
+              <a:rPr lang="en-US"/>
               <a:t>Fifth level</a:t>
             </a:r>
-            <a:endParaRPr lang="en-US"/>
           </a:p>
         </p:txBody>
       </p:sp>
@@ -813,7 +821,7 @@
           <a:p>
             <a:fld id="{5BCAD085-E8A6-8845-BD4E-CB4CCA059FC4}" type="datetimeFigureOut">
               <a:rPr lang="en-US" smtClean="0"/>
-              <a:t>1/27/13</a:t>
+              <a:t>8/20/2026</a:t>
             </a:fld>
             <a:endParaRPr lang="en-US"/>
           </a:p>
@@ -855,7 +863,7 @@
           <a:p>
             <a:fld id="{C1FF6DA9-008F-8B48-92A6-B652298478BF}" type="slidenum">
               <a:rPr lang="en-US" smtClean="0"/>
-              <a:t>‹#›</a:t>
+              <a:t>‹Nº›</a:t>
             </a:fld>
             <a:endParaRPr lang="en-US"/>
           </a:p>
@@ -916,10 +924,9 @@
           </a:lstStyle>
           <a:p>
             <a:r>
-              <a:rPr lang="en-US" smtClean="0"/>
+              <a:rPr lang="en-US"/>
               <a:t>Click to edit Master title style</a:t>
             </a:r>
-            <a:endParaRPr lang="en-US"/>
           </a:p>
         </p:txBody>
       </p:sp>
@@ -1036,7 +1043,7 @@
           <a:p>
             <a:pPr lvl="0"/>
             <a:r>
-              <a:rPr lang="en-US" smtClean="0"/>
+              <a:rPr lang="en-US"/>
               <a:t>Click to edit Master text styles</a:t>
             </a:r>
           </a:p>
@@ -1059,7 +1066,7 @@
           <a:p>
             <a:fld id="{5BCAD085-E8A6-8845-BD4E-CB4CCA059FC4}" type="datetimeFigureOut">
               <a:rPr lang="en-US" smtClean="0"/>
-              <a:t>1/27/13</a:t>
+              <a:t>8/20/2026</a:t>
             </a:fld>
             <a:endParaRPr lang="en-US"/>
           </a:p>
@@ -1101,7 +1108,7 @@
           <a:p>
             <a:fld id="{C1FF6DA9-008F-8B48-92A6-B652298478BF}" type="slidenum">
               <a:rPr lang="en-US" smtClean="0"/>
-              <a:t>‹#›</a:t>
+              <a:t>‹Nº›</a:t>
             </a:fld>
             <a:endParaRPr lang="en-US"/>
           </a:p>
@@ -1153,10 +1160,9 @@
           <a:lstStyle/>
           <a:p>
             <a:r>
-              <a:rPr lang="en-US" smtClean="0"/>
+              <a:rPr lang="en-US"/>
               <a:t>Click to edit Master title style</a:t>
             </a:r>
-            <a:endParaRPr lang="en-US"/>
           </a:p>
         </p:txBody>
       </p:sp>
@@ -1210,38 +1216,37 @@
           <a:p>
             <a:pPr lvl="0"/>
             <a:r>
-              <a:rPr lang="en-US" smtClean="0"/>
+              <a:rPr lang="en-US"/>
               <a:t>Click to edit Master text styles</a:t>
             </a:r>
           </a:p>
           <a:p>
             <a:pPr lvl="1"/>
             <a:r>
-              <a:rPr lang="en-US" smtClean="0"/>
+              <a:rPr lang="en-US"/>
               <a:t>Second level</a:t>
             </a:r>
           </a:p>
           <a:p>
             <a:pPr lvl="2"/>
             <a:r>
-              <a:rPr lang="en-US" smtClean="0"/>
+              <a:rPr lang="en-US"/>
               <a:t>Third level</a:t>
             </a:r>
           </a:p>
           <a:p>
             <a:pPr lvl="3"/>
             <a:r>
-              <a:rPr lang="en-US" smtClean="0"/>
+              <a:rPr lang="en-US"/>
               <a:t>Fourth level</a:t>
             </a:r>
           </a:p>
           <a:p>
             <a:pPr lvl="4"/>
             <a:r>
-              <a:rPr lang="en-US" smtClean="0"/>
+              <a:rPr lang="en-US"/>
               <a:t>Fifth level</a:t>
             </a:r>
-            <a:endParaRPr lang="en-US"/>
           </a:p>
         </p:txBody>
       </p:sp>
@@ -1295,38 +1300,37 @@
           <a:p>
             <a:pPr lvl="0"/>
             <a:r>
-              <a:rPr lang="en-US" smtClean="0"/>
+              <a:rPr lang="en-US"/>
               <a:t>Click to edit Master text styles</a:t>
             </a:r>
           </a:p>
           <a:p>
             <a:pPr lvl="1"/>
             <a:r>
-              <a:rPr lang="en-US" smtClean="0"/>
+              <a:rPr lang="en-US"/>
               <a:t>Second level</a:t>
             </a:r>
           </a:p>
           <a:p>
             <a:pPr lvl="2"/>
             <a:r>
-              <a:rPr lang="en-US" smtClean="0"/>
+              <a:rPr lang="en-US"/>
               <a:t>Third level</a:t>
             </a:r>
           </a:p>
           <a:p>
             <a:pPr lvl="3"/>
             <a:r>
-              <a:rPr lang="en-US" smtClean="0"/>
+              <a:rPr lang="en-US"/>
               <a:t>Fourth level</a:t>
             </a:r>
           </a:p>
           <a:p>
             <a:pPr lvl="4"/>
             <a:r>
-              <a:rPr lang="en-US" smtClean="0"/>
+              <a:rPr lang="en-US"/>
               <a:t>Fifth level</a:t>
             </a:r>
-            <a:endParaRPr lang="en-US"/>
           </a:p>
         </p:txBody>
       </p:sp>
@@ -1347,7 +1351,7 @@
           <a:p>
             <a:fld id="{5BCAD085-E8A6-8845-BD4E-CB4CCA059FC4}" type="datetimeFigureOut">
               <a:rPr lang="en-US" smtClean="0"/>
-              <a:t>1/27/13</a:t>
+              <a:t>8/20/2026</a:t>
             </a:fld>
             <a:endParaRPr lang="en-US"/>
           </a:p>
@@ -1389,7 +1393,7 @@
           <a:p>
             <a:fld id="{C1FF6DA9-008F-8B48-92A6-B652298478BF}" type="slidenum">
               <a:rPr lang="en-US" smtClean="0"/>
-              <a:t>‹#›</a:t>
+              <a:t>‹Nº›</a:t>
             </a:fld>
             <a:endParaRPr lang="en-US"/>
           </a:p>
@@ -1445,10 +1449,9 @@
           </a:lstStyle>
           <a:p>
             <a:r>
-              <a:rPr lang="en-US" smtClean="0"/>
+              <a:rPr lang="en-US"/>
               <a:t>Click to edit Master title style</a:t>
             </a:r>
-            <a:endParaRPr lang="en-US"/>
           </a:p>
         </p:txBody>
       </p:sp>
@@ -1511,7 +1514,7 @@
           <a:p>
             <a:pPr lvl="0"/>
             <a:r>
-              <a:rPr lang="en-US" smtClean="0"/>
+              <a:rPr lang="en-US"/>
               <a:t>Click to edit Master text styles</a:t>
             </a:r>
           </a:p>
@@ -1567,38 +1570,37 @@
           <a:p>
             <a:pPr lvl="0"/>
             <a:r>
-              <a:rPr lang="en-US" smtClean="0"/>
+              <a:rPr lang="en-US"/>
               <a:t>Click to edit Master text styles</a:t>
             </a:r>
           </a:p>
           <a:p>
             <a:pPr lvl="1"/>
             <a:r>
-              <a:rPr lang="en-US" smtClean="0"/>
+              <a:rPr lang="en-US"/>
               <a:t>Second level</a:t>
             </a:r>
           </a:p>
           <a:p>
             <a:pPr lvl="2"/>
             <a:r>
-              <a:rPr lang="en-US" smtClean="0"/>
+              <a:rPr lang="en-US"/>
               <a:t>Third level</a:t>
             </a:r>
           </a:p>
           <a:p>
             <a:pPr lvl="3"/>
             <a:r>
-              <a:rPr lang="en-US" smtClean="0"/>
+              <a:rPr lang="en-US"/>
               <a:t>Fourth level</a:t>
             </a:r>
           </a:p>
           <a:p>
             <a:pPr lvl="4"/>
             <a:r>
-              <a:rPr lang="en-US" smtClean="0"/>
+              <a:rPr lang="en-US"/>
               <a:t>Fifth level</a:t>
             </a:r>
-            <a:endParaRPr lang="en-US"/>
           </a:p>
         </p:txBody>
       </p:sp>
@@ -1661,7 +1663,7 @@
           <a:p>
             <a:pPr lvl="0"/>
             <a:r>
-              <a:rPr lang="en-US" smtClean="0"/>
+              <a:rPr lang="en-US"/>
               <a:t>Click to edit Master text styles</a:t>
             </a:r>
           </a:p>
@@ -1717,38 +1719,37 @@
           <a:p>
             <a:pPr lvl="0"/>
             <a:r>
-              <a:rPr lang="en-US" smtClean="0"/>
+              <a:rPr lang="en-US"/>
               <a:t>Click to edit Master text styles</a:t>
             </a:r>
           </a:p>
           <a:p>
             <a:pPr lvl="1"/>
             <a:r>
-              <a:rPr lang="en-US" smtClean="0"/>
+              <a:rPr lang="en-US"/>
               <a:t>Second level</a:t>
             </a:r>
           </a:p>
           <a:p>
             <a:pPr lvl="2"/>
             <a:r>
-              <a:rPr lang="en-US" smtClean="0"/>
+              <a:rPr lang="en-US"/>
               <a:t>Third level</a:t>
             </a:r>
           </a:p>
           <a:p>
             <a:pPr lvl="3"/>
             <a:r>
-              <a:rPr lang="en-US" smtClean="0"/>
+              <a:rPr lang="en-US"/>
               <a:t>Fourth level</a:t>
             </a:r>
           </a:p>
           <a:p>
             <a:pPr lvl="4"/>
             <a:r>
-              <a:rPr lang="en-US" smtClean="0"/>
+              <a:rPr lang="en-US"/>
               <a:t>Fifth level</a:t>
             </a:r>
-            <a:endParaRPr lang="en-US"/>
           </a:p>
         </p:txBody>
       </p:sp>
@@ -1769,7 +1770,7 @@
           <a:p>
             <a:fld id="{5BCAD085-E8A6-8845-BD4E-CB4CCA059FC4}" type="datetimeFigureOut">
               <a:rPr lang="en-US" smtClean="0"/>
-              <a:t>1/27/13</a:t>
+              <a:t>8/20/2026</a:t>
             </a:fld>
             <a:endParaRPr lang="en-US"/>
           </a:p>
@@ -1811,7 +1812,7 @@
           <a:p>
             <a:fld id="{C1FF6DA9-008F-8B48-92A6-B652298478BF}" type="slidenum">
               <a:rPr lang="en-US" smtClean="0"/>
-              <a:t>‹#›</a:t>
+              <a:t>‹Nº›</a:t>
             </a:fld>
             <a:endParaRPr lang="en-US"/>
           </a:p>
@@ -1863,10 +1864,9 @@
           <a:lstStyle/>
           <a:p>
             <a:r>
-              <a:rPr lang="en-US" smtClean="0"/>
+              <a:rPr lang="en-US"/>
               <a:t>Click to edit Master title style</a:t>
             </a:r>
-            <a:endParaRPr lang="en-US"/>
           </a:p>
         </p:txBody>
       </p:sp>
@@ -1887,7 +1887,7 @@
           <a:p>
             <a:fld id="{5BCAD085-E8A6-8845-BD4E-CB4CCA059FC4}" type="datetimeFigureOut">
               <a:rPr lang="en-US" smtClean="0"/>
-              <a:t>1/27/13</a:t>
+              <a:t>8/20/2026</a:t>
             </a:fld>
             <a:endParaRPr lang="en-US"/>
           </a:p>
@@ -1929,7 +1929,7 @@
           <a:p>
             <a:fld id="{C1FF6DA9-008F-8B48-92A6-B652298478BF}" type="slidenum">
               <a:rPr lang="en-US" smtClean="0"/>
-              <a:t>‹#›</a:t>
+              <a:t>‹Nº›</a:t>
             </a:fld>
             <a:endParaRPr lang="en-US"/>
           </a:p>
@@ -1982,7 +1982,7 @@
           <a:p>
             <a:fld id="{5BCAD085-E8A6-8845-BD4E-CB4CCA059FC4}" type="datetimeFigureOut">
               <a:rPr lang="en-US" smtClean="0"/>
-              <a:t>1/27/13</a:t>
+              <a:t>8/20/2026</a:t>
             </a:fld>
             <a:endParaRPr lang="en-US"/>
           </a:p>
@@ -2024,7 +2024,7 @@
           <a:p>
             <a:fld id="{C1FF6DA9-008F-8B48-92A6-B652298478BF}" type="slidenum">
               <a:rPr lang="en-US" smtClean="0"/>
-              <a:t>‹#›</a:t>
+              <a:t>‹Nº›</a:t>
             </a:fld>
             <a:endParaRPr lang="en-US"/>
           </a:p>
@@ -2085,10 +2085,9 @@
           </a:lstStyle>
           <a:p>
             <a:r>
-              <a:rPr lang="en-US" smtClean="0"/>
+              <a:rPr lang="en-US"/>
               <a:t>Click to edit Master title style</a:t>
             </a:r>
-            <a:endParaRPr lang="en-US"/>
           </a:p>
         </p:txBody>
       </p:sp>
@@ -2142,38 +2141,37 @@
           <a:p>
             <a:pPr lvl="0"/>
             <a:r>
-              <a:rPr lang="en-US" smtClean="0"/>
+              <a:rPr lang="en-US"/>
               <a:t>Click to edit Master text styles</a:t>
             </a:r>
           </a:p>
           <a:p>
             <a:pPr lvl="1"/>
             <a:r>
-              <a:rPr lang="en-US" smtClean="0"/>
+              <a:rPr lang="en-US"/>
               <a:t>Second level</a:t>
             </a:r>
           </a:p>
           <a:p>
             <a:pPr lvl="2"/>
             <a:r>
-              <a:rPr lang="en-US" smtClean="0"/>
+              <a:rPr lang="en-US"/>
               <a:t>Third level</a:t>
             </a:r>
           </a:p>
           <a:p>
             <a:pPr lvl="3"/>
             <a:r>
-              <a:rPr lang="en-US" smtClean="0"/>
+              <a:rPr lang="en-US"/>
               <a:t>Fourth level</a:t>
             </a:r>
           </a:p>
           <a:p>
             <a:pPr lvl="4"/>
             <a:r>
-              <a:rPr lang="en-US" smtClean="0"/>
+              <a:rPr lang="en-US"/>
               <a:t>Fifth level</a:t>
             </a:r>
-            <a:endParaRPr lang="en-US"/>
           </a:p>
         </p:txBody>
       </p:sp>
@@ -2236,7 +2234,7 @@
           <a:p>
             <a:pPr lvl="0"/>
             <a:r>
-              <a:rPr lang="en-US" smtClean="0"/>
+              <a:rPr lang="en-US"/>
               <a:t>Click to edit Master text styles</a:t>
             </a:r>
           </a:p>
@@ -2259,7 +2257,7 @@
           <a:p>
             <a:fld id="{5BCAD085-E8A6-8845-BD4E-CB4CCA059FC4}" type="datetimeFigureOut">
               <a:rPr lang="en-US" smtClean="0"/>
-              <a:t>1/27/13</a:t>
+              <a:t>8/20/2026</a:t>
             </a:fld>
             <a:endParaRPr lang="en-US"/>
           </a:p>
@@ -2301,7 +2299,7 @@
           <a:p>
             <a:fld id="{C1FF6DA9-008F-8B48-92A6-B652298478BF}" type="slidenum">
               <a:rPr lang="en-US" smtClean="0"/>
-              <a:t>‹#›</a:t>
+              <a:t>‹Nº›</a:t>
             </a:fld>
             <a:endParaRPr lang="en-US"/>
           </a:p>
@@ -2362,10 +2360,9 @@
           </a:lstStyle>
           <a:p>
             <a:r>
-              <a:rPr lang="en-US" smtClean="0"/>
+              <a:rPr lang="en-US"/>
               <a:t>Click to edit Master title style</a:t>
             </a:r>
-            <a:endParaRPr lang="en-US"/>
           </a:p>
         </p:txBody>
       </p:sp>
@@ -2489,7 +2486,7 @@
           <a:p>
             <a:pPr lvl="0"/>
             <a:r>
-              <a:rPr lang="en-US" smtClean="0"/>
+              <a:rPr lang="en-US"/>
               <a:t>Click to edit Master text styles</a:t>
             </a:r>
           </a:p>
@@ -2512,7 +2509,7 @@
           <a:p>
             <a:fld id="{5BCAD085-E8A6-8845-BD4E-CB4CCA059FC4}" type="datetimeFigureOut">
               <a:rPr lang="en-US" smtClean="0"/>
-              <a:t>1/27/13</a:t>
+              <a:t>8/20/2026</a:t>
             </a:fld>
             <a:endParaRPr lang="en-US"/>
           </a:p>
@@ -2554,7 +2551,7 @@
           <a:p>
             <a:fld id="{C1FF6DA9-008F-8B48-92A6-B652298478BF}" type="slidenum">
               <a:rPr lang="en-US" smtClean="0"/>
-              <a:t>‹#›</a:t>
+              <a:t>‹Nº›</a:t>
             </a:fld>
             <a:endParaRPr lang="en-US"/>
           </a:p>
@@ -2621,10 +2618,9 @@
           <a:lstStyle/>
           <a:p>
             <a:r>
-              <a:rPr lang="en-US" smtClean="0"/>
+              <a:rPr lang="en-US"/>
               <a:t>Click to edit Master title style</a:t>
             </a:r>
-            <a:endParaRPr lang="en-US"/>
           </a:p>
         </p:txBody>
       </p:sp>
@@ -2655,38 +2651,37 @@
           <a:p>
             <a:pPr lvl="0"/>
             <a:r>
-              <a:rPr lang="en-US" smtClean="0"/>
+              <a:rPr lang="en-US"/>
               <a:t>Click to edit Master text styles</a:t>
             </a:r>
           </a:p>
           <a:p>
             <a:pPr lvl="1"/>
             <a:r>
-              <a:rPr lang="en-US" smtClean="0"/>
+              <a:rPr lang="en-US"/>
               <a:t>Second level</a:t>
             </a:r>
           </a:p>
           <a:p>
             <a:pPr lvl="2"/>
             <a:r>
-              <a:rPr lang="en-US" smtClean="0"/>
+              <a:rPr lang="en-US"/>
               <a:t>Third level</a:t>
             </a:r>
           </a:p>
           <a:p>
             <a:pPr lvl="3"/>
             <a:r>
-              <a:rPr lang="en-US" smtClean="0"/>
+              <a:rPr lang="en-US"/>
               <a:t>Fourth level</a:t>
             </a:r>
           </a:p>
           <a:p>
             <a:pPr lvl="4"/>
             <a:r>
-              <a:rPr lang="en-US" smtClean="0"/>
+              <a:rPr lang="en-US"/>
               <a:t>Fifth level</a:t>
             </a:r>
-            <a:endParaRPr lang="en-US"/>
           </a:p>
         </p:txBody>
       </p:sp>
@@ -2725,7 +2720,7 @@
           <a:p>
             <a:fld id="{5BCAD085-E8A6-8845-BD4E-CB4CCA059FC4}" type="datetimeFigureOut">
               <a:rPr lang="en-US" smtClean="0"/>
-              <a:t>1/27/13</a:t>
+              <a:t>8/20/2026</a:t>
             </a:fld>
             <a:endParaRPr lang="en-US"/>
           </a:p>
@@ -2803,7 +2798,7 @@
           <a:p>
             <a:fld id="{C1FF6DA9-008F-8B48-92A6-B652298478BF}" type="slidenum">
               <a:rPr lang="en-US" smtClean="0"/>
-              <a:t>‹#›</a:t>
+              <a:t>‹Nº›</a:t>
             </a:fld>
             <a:endParaRPr lang="en-US"/>
           </a:p>
@@ -3084,7 +3079,7 @@
 </file>
 
 <file path=ppt/slides/slide1.xml><?xml version="1.0" encoding="utf-8"?>
-<p:sld xmlns:a="http://schemas.openxmlformats.org/drawingml/2006/main" xmlns:p="http://schemas.openxmlformats.org/presentationml/2006/main" xmlns:r="http://schemas.openxmlformats.org/officeDocument/2006/relationships">
+<p:sld xmlns:a="http://schemas.openxmlformats.org/drawingml/2006/main" xmlns:r="http://schemas.openxmlformats.org/officeDocument/2006/relationships" xmlns:p="http://schemas.openxmlformats.org/presentationml/2006/main">
   <p:cSld>
     <p:bg>
       <p:bgPr>
@@ -3100,7 +3095,14 @@
         <p:cNvGrpSpPr/>
         <p:nvPr/>
       </p:nvGrpSpPr>
-      <p:grpSpPr/>
+      <p:grpSpPr>
+        <a:xfrm>
+          <a:off x="0" y="0"/>
+          <a:ext cx="0" cy="0"/>
+          <a:chOff x="0" y="0"/>
+          <a:chExt cx="0" cy="0"/>
+        </a:xfrm>
+      </p:grpSpPr>
       <p:sp>
         <p:nvSpPr>
           <p:cNvPr id="2" name="Rectangle 1"/>
@@ -3142,6 +3144,7 @@
           <a:lstStyle/>
           <a:p>
             <a:pPr algn="ctr"/>
+            <a:endParaRPr/>
           </a:p>
         </p:txBody>
       </p:sp>
@@ -3162,7 +3165,7 @@
           <a:noFill/>
         </p:spPr>
         <p:txBody>
-          <a:bodyPr wrap="square" anchor="t" lIns="0" rIns="0" tIns="0" bIns="0">
+          <a:bodyPr wrap="square" lIns="0" tIns="0" rIns="0" bIns="0" anchor="t">
             <a:spAutoFit/>
           </a:bodyPr>
           <a:lstStyle/>
@@ -3225,6 +3228,7 @@
           <a:lstStyle/>
           <a:p>
             <a:pPr algn="ctr"/>
+            <a:endParaRPr/>
           </a:p>
         </p:txBody>
       </p:sp>
@@ -3269,6 +3273,7 @@
           <a:lstStyle/>
           <a:p>
             <a:pPr algn="ctr"/>
+            <a:endParaRPr/>
           </a:p>
         </p:txBody>
       </p:sp>
@@ -3313,6 +3318,7 @@
           <a:lstStyle/>
           <a:p>
             <a:pPr algn="ctr"/>
+            <a:endParaRPr/>
           </a:p>
         </p:txBody>
       </p:sp>
@@ -3357,6 +3363,7 @@
           <a:lstStyle/>
           <a:p>
             <a:pPr algn="ctr"/>
+            <a:endParaRPr/>
           </a:p>
         </p:txBody>
       </p:sp>
@@ -3401,6 +3408,7 @@
           <a:lstStyle/>
           <a:p>
             <a:pPr algn="ctr"/>
+            <a:endParaRPr/>
           </a:p>
         </p:txBody>
       </p:sp>
@@ -3445,6 +3453,7 @@
           <a:lstStyle/>
           <a:p>
             <a:pPr algn="ctr"/>
+            <a:endParaRPr/>
           </a:p>
         </p:txBody>
       </p:sp>
@@ -3489,6 +3498,7 @@
           <a:lstStyle/>
           <a:p>
             <a:pPr algn="ctr"/>
+            <a:endParaRPr/>
           </a:p>
         </p:txBody>
       </p:sp>
@@ -3533,6 +3543,7 @@
           <a:lstStyle/>
           <a:p>
             <a:pPr algn="ctr"/>
+            <a:endParaRPr/>
           </a:p>
         </p:txBody>
       </p:sp>
@@ -3577,6 +3588,7 @@
           <a:lstStyle/>
           <a:p>
             <a:pPr algn="ctr"/>
+            <a:endParaRPr/>
           </a:p>
         </p:txBody>
       </p:sp>
@@ -3621,6 +3633,7 @@
           <a:lstStyle/>
           <a:p>
             <a:pPr algn="ctr"/>
+            <a:endParaRPr/>
           </a:p>
         </p:txBody>
       </p:sp>
@@ -3665,6 +3678,7 @@
           <a:lstStyle/>
           <a:p>
             <a:pPr algn="ctr"/>
+            <a:endParaRPr/>
           </a:p>
         </p:txBody>
       </p:sp>
@@ -3709,6 +3723,7 @@
           <a:lstStyle/>
           <a:p>
             <a:pPr algn="ctr"/>
+            <a:endParaRPr/>
           </a:p>
         </p:txBody>
       </p:sp>
@@ -3753,6 +3768,7 @@
           <a:lstStyle/>
           <a:p>
             <a:pPr algn="ctr"/>
+            <a:endParaRPr/>
           </a:p>
         </p:txBody>
       </p:sp>
@@ -3797,6 +3813,7 @@
           <a:lstStyle/>
           <a:p>
             <a:pPr algn="ctr"/>
+            <a:endParaRPr/>
           </a:p>
         </p:txBody>
       </p:sp>
@@ -3841,6 +3858,7 @@
           <a:lstStyle/>
           <a:p>
             <a:pPr algn="ctr"/>
+            <a:endParaRPr/>
           </a:p>
         </p:txBody>
       </p:sp>
@@ -3885,6 +3903,7 @@
           <a:lstStyle/>
           <a:p>
             <a:pPr algn="ctr"/>
+            <a:endParaRPr/>
           </a:p>
         </p:txBody>
       </p:sp>
@@ -3929,6 +3948,7 @@
           <a:lstStyle/>
           <a:p>
             <a:pPr algn="ctr"/>
+            <a:endParaRPr/>
           </a:p>
         </p:txBody>
       </p:sp>
@@ -3973,6 +3993,7 @@
           <a:lstStyle/>
           <a:p>
             <a:pPr algn="ctr"/>
+            <a:endParaRPr/>
           </a:p>
         </p:txBody>
       </p:sp>
@@ -4017,6 +4038,7 @@
           <a:lstStyle/>
           <a:p>
             <a:pPr algn="ctr"/>
+            <a:endParaRPr/>
           </a:p>
         </p:txBody>
       </p:sp>
@@ -4061,6 +4083,7 @@
           <a:lstStyle/>
           <a:p>
             <a:pPr algn="ctr"/>
+            <a:endParaRPr/>
           </a:p>
         </p:txBody>
       </p:sp>
@@ -4105,6 +4128,7 @@
           <a:lstStyle/>
           <a:p>
             <a:pPr algn="ctr"/>
+            <a:endParaRPr/>
           </a:p>
         </p:txBody>
       </p:sp>
@@ -4149,6 +4173,7 @@
           <a:lstStyle/>
           <a:p>
             <a:pPr algn="ctr"/>
+            <a:endParaRPr/>
           </a:p>
         </p:txBody>
       </p:sp>
@@ -4193,6 +4218,7 @@
           <a:lstStyle/>
           <a:p>
             <a:pPr algn="ctr"/>
+            <a:endParaRPr/>
           </a:p>
         </p:txBody>
       </p:sp>
@@ -4237,6 +4263,7 @@
           <a:lstStyle/>
           <a:p>
             <a:pPr algn="ctr"/>
+            <a:endParaRPr/>
           </a:p>
         </p:txBody>
       </p:sp>
@@ -4281,6 +4308,7 @@
           <a:lstStyle/>
           <a:p>
             <a:pPr algn="ctr"/>
+            <a:endParaRPr/>
           </a:p>
         </p:txBody>
       </p:sp>
@@ -4325,6 +4353,7 @@
           <a:lstStyle/>
           <a:p>
             <a:pPr algn="ctr"/>
+            <a:endParaRPr/>
           </a:p>
         </p:txBody>
       </p:sp>
@@ -4345,7 +4374,7 @@
           <a:noFill/>
         </p:spPr>
         <p:txBody>
-          <a:bodyPr wrap="square" anchor="t" lIns="0" rIns="0" tIns="0" bIns="0">
+          <a:bodyPr wrap="square" lIns="0" tIns="0" rIns="0" bIns="0" anchor="t">
             <a:spAutoFit/>
           </a:bodyPr>
           <a:lstStyle/>
@@ -4384,7 +4413,7 @@
           <a:noFill/>
         </p:spPr>
         <p:txBody>
-          <a:bodyPr wrap="square" anchor="t" lIns="0" rIns="0" tIns="0" bIns="0">
+          <a:bodyPr wrap="square" lIns="0" tIns="0" rIns="0" bIns="0" anchor="t">
             <a:spAutoFit/>
           </a:bodyPr>
           <a:lstStyle/>
@@ -4423,7 +4452,7 @@
           <a:noFill/>
         </p:spPr>
         <p:txBody>
-          <a:bodyPr wrap="square" anchor="t" lIns="0" rIns="0" tIns="0" bIns="0">
+          <a:bodyPr wrap="square" lIns="0" tIns="0" rIns="0" bIns="0" anchor="t">
             <a:spAutoFit/>
           </a:bodyPr>
           <a:lstStyle/>
@@ -4434,13 +4463,535 @@
               </a:spcAft>
             </a:pPr>
             <a:r>
-              <a:rPr sz="1500" b="0">
-                <a:solidFill>
-                  <a:srgbClr val="46565C"/>
-                </a:solidFill>
-                <a:latin typeface="Segoe UI"/>
-              </a:rPr>
-              <a:t>Cuando una compañía de consumo masivo lanza cientos de productos al año, el cuello de botella no es generar contenido: es que todo suene y se vea como la misma marca. Content Suite convierte las reglas de marca en un artefacto que las máquinas pueden leer, aplicar y auditar.</a:t>
+              <a:rPr sz="1500" b="0" dirty="0">
+                <a:solidFill>
+                  <a:srgbClr val="46565C"/>
+                </a:solidFill>
+                <a:latin typeface="Segoe UI"/>
+              </a:rPr>
+              <a:t>Cuando </a:t>
+            </a:r>
+            <a:r>
+              <a:rPr sz="1500" b="0" dirty="0" err="1">
+                <a:solidFill>
+                  <a:srgbClr val="46565C"/>
+                </a:solidFill>
+                <a:latin typeface="Segoe UI"/>
+              </a:rPr>
+              <a:t>una</a:t>
+            </a:r>
+            <a:r>
+              <a:rPr sz="1500" b="0" dirty="0">
+                <a:solidFill>
+                  <a:srgbClr val="46565C"/>
+                </a:solidFill>
+                <a:latin typeface="Segoe UI"/>
+              </a:rPr>
+              <a:t> </a:t>
+            </a:r>
+            <a:r>
+              <a:rPr sz="1500" b="0" dirty="0" err="1">
+                <a:solidFill>
+                  <a:srgbClr val="46565C"/>
+                </a:solidFill>
+                <a:latin typeface="Segoe UI"/>
+              </a:rPr>
+              <a:t>compañía</a:t>
+            </a:r>
+            <a:r>
+              <a:rPr sz="1500" b="0" dirty="0">
+                <a:solidFill>
+                  <a:srgbClr val="46565C"/>
+                </a:solidFill>
+                <a:latin typeface="Segoe UI"/>
+              </a:rPr>
+              <a:t> de </a:t>
+            </a:r>
+            <a:r>
+              <a:rPr sz="1500" b="0" dirty="0" err="1">
+                <a:solidFill>
+                  <a:srgbClr val="46565C"/>
+                </a:solidFill>
+                <a:latin typeface="Segoe UI"/>
+              </a:rPr>
+              <a:t>consumo</a:t>
+            </a:r>
+            <a:r>
+              <a:rPr sz="1500" b="0" dirty="0">
+                <a:solidFill>
+                  <a:srgbClr val="46565C"/>
+                </a:solidFill>
+                <a:latin typeface="Segoe UI"/>
+              </a:rPr>
+              <a:t> </a:t>
+            </a:r>
+            <a:r>
+              <a:rPr sz="1500" b="0" dirty="0" err="1">
+                <a:solidFill>
+                  <a:srgbClr val="46565C"/>
+                </a:solidFill>
+                <a:latin typeface="Segoe UI"/>
+              </a:rPr>
+              <a:t>masivo</a:t>
+            </a:r>
+            <a:r>
+              <a:rPr sz="1500" b="0" dirty="0">
+                <a:solidFill>
+                  <a:srgbClr val="46565C"/>
+                </a:solidFill>
+                <a:latin typeface="Segoe UI"/>
+              </a:rPr>
+              <a:t> </a:t>
+            </a:r>
+            <a:r>
+              <a:rPr sz="1500" b="0" dirty="0" err="1">
+                <a:solidFill>
+                  <a:srgbClr val="46565C"/>
+                </a:solidFill>
+                <a:latin typeface="Segoe UI"/>
+              </a:rPr>
+              <a:t>lanza</a:t>
+            </a:r>
+            <a:r>
+              <a:rPr sz="1500" b="0" dirty="0">
+                <a:solidFill>
+                  <a:srgbClr val="46565C"/>
+                </a:solidFill>
+                <a:latin typeface="Segoe UI"/>
+              </a:rPr>
+              <a:t> </a:t>
+            </a:r>
+            <a:r>
+              <a:rPr sz="1500" b="0" dirty="0" err="1">
+                <a:solidFill>
+                  <a:srgbClr val="46565C"/>
+                </a:solidFill>
+                <a:latin typeface="Segoe UI"/>
+              </a:rPr>
+              <a:t>cientos</a:t>
+            </a:r>
+            <a:r>
+              <a:rPr sz="1500" b="0" dirty="0">
+                <a:solidFill>
+                  <a:srgbClr val="46565C"/>
+                </a:solidFill>
+                <a:latin typeface="Segoe UI"/>
+              </a:rPr>
+              <a:t> de </a:t>
+            </a:r>
+            <a:r>
+              <a:rPr sz="1500" b="0" dirty="0" err="1">
+                <a:solidFill>
+                  <a:srgbClr val="46565C"/>
+                </a:solidFill>
+                <a:latin typeface="Segoe UI"/>
+              </a:rPr>
+              <a:t>productos</a:t>
+            </a:r>
+            <a:r>
+              <a:rPr sz="1500" b="0" dirty="0">
+                <a:solidFill>
+                  <a:srgbClr val="46565C"/>
+                </a:solidFill>
+                <a:latin typeface="Segoe UI"/>
+              </a:rPr>
+              <a:t> al </a:t>
+            </a:r>
+            <a:r>
+              <a:rPr sz="1500" b="0" dirty="0" err="1">
+                <a:solidFill>
+                  <a:srgbClr val="46565C"/>
+                </a:solidFill>
+                <a:latin typeface="Segoe UI"/>
+              </a:rPr>
+              <a:t>año</a:t>
+            </a:r>
+            <a:r>
+              <a:rPr sz="1500" b="0" dirty="0">
+                <a:solidFill>
+                  <a:srgbClr val="46565C"/>
+                </a:solidFill>
+                <a:latin typeface="Segoe UI"/>
+              </a:rPr>
+              <a:t>, el </a:t>
+            </a:r>
+            <a:r>
+              <a:rPr sz="1500" b="0" dirty="0" err="1">
+                <a:solidFill>
+                  <a:srgbClr val="46565C"/>
+                </a:solidFill>
+                <a:latin typeface="Segoe UI"/>
+              </a:rPr>
+              <a:t>cuello</a:t>
+            </a:r>
+            <a:r>
+              <a:rPr sz="1500" b="0" dirty="0">
+                <a:solidFill>
+                  <a:srgbClr val="46565C"/>
+                </a:solidFill>
+                <a:latin typeface="Segoe UI"/>
+              </a:rPr>
+              <a:t> de </a:t>
+            </a:r>
+            <a:r>
+              <a:rPr sz="1500" b="0" dirty="0" err="1">
+                <a:solidFill>
+                  <a:srgbClr val="46565C"/>
+                </a:solidFill>
+                <a:latin typeface="Segoe UI"/>
+              </a:rPr>
+              <a:t>botella</a:t>
+            </a:r>
+            <a:r>
+              <a:rPr sz="1500" b="0" dirty="0">
+                <a:solidFill>
+                  <a:srgbClr val="46565C"/>
+                </a:solidFill>
+                <a:latin typeface="Segoe UI"/>
+              </a:rPr>
+              <a:t> no es </a:t>
+            </a:r>
+            <a:r>
+              <a:rPr sz="1500" b="0" dirty="0" err="1">
+                <a:solidFill>
+                  <a:srgbClr val="46565C"/>
+                </a:solidFill>
+                <a:latin typeface="Segoe UI"/>
+              </a:rPr>
+              <a:t>generar</a:t>
+            </a:r>
+            <a:r>
+              <a:rPr sz="1500" b="0" dirty="0">
+                <a:solidFill>
+                  <a:srgbClr val="46565C"/>
+                </a:solidFill>
+                <a:latin typeface="Segoe UI"/>
+              </a:rPr>
+              <a:t> </a:t>
+            </a:r>
+            <a:r>
+              <a:rPr sz="1500" b="0" dirty="0" err="1">
+                <a:solidFill>
+                  <a:srgbClr val="46565C"/>
+                </a:solidFill>
+                <a:latin typeface="Segoe UI"/>
+              </a:rPr>
+              <a:t>contenido</a:t>
+            </a:r>
+            <a:r>
+              <a:rPr sz="1500" b="0" dirty="0">
+                <a:solidFill>
+                  <a:srgbClr val="46565C"/>
+                </a:solidFill>
+                <a:latin typeface="Segoe UI"/>
+              </a:rPr>
+              <a:t>: es </a:t>
+            </a:r>
+            <a:r>
+              <a:rPr sz="1500" b="0" dirty="0" err="1">
+                <a:solidFill>
+                  <a:srgbClr val="46565C"/>
+                </a:solidFill>
+                <a:latin typeface="Segoe UI"/>
+              </a:rPr>
+              <a:t>que</a:t>
+            </a:r>
+            <a:r>
+              <a:rPr sz="1500" b="0" dirty="0">
+                <a:solidFill>
+                  <a:srgbClr val="46565C"/>
+                </a:solidFill>
+                <a:latin typeface="Segoe UI"/>
+              </a:rPr>
+              <a:t> </a:t>
+            </a:r>
+            <a:r>
+              <a:rPr sz="1500" b="0" dirty="0" err="1">
+                <a:solidFill>
+                  <a:srgbClr val="46565C"/>
+                </a:solidFill>
+                <a:latin typeface="Segoe UI"/>
+              </a:rPr>
+              <a:t>todo</a:t>
+            </a:r>
+            <a:r>
+              <a:rPr sz="1500" b="0" dirty="0">
+                <a:solidFill>
+                  <a:srgbClr val="46565C"/>
+                </a:solidFill>
+                <a:latin typeface="Segoe UI"/>
+              </a:rPr>
+              <a:t> </a:t>
+            </a:r>
+            <a:r>
+              <a:rPr sz="1500" b="0" dirty="0" err="1">
+                <a:solidFill>
+                  <a:srgbClr val="46565C"/>
+                </a:solidFill>
+                <a:latin typeface="Segoe UI"/>
+              </a:rPr>
+              <a:t>suene</a:t>
+            </a:r>
+            <a:r>
+              <a:rPr sz="1500" b="0" dirty="0">
+                <a:solidFill>
+                  <a:srgbClr val="46565C"/>
+                </a:solidFill>
+                <a:latin typeface="Segoe UI"/>
+              </a:rPr>
+              <a:t> y se </a:t>
+            </a:r>
+            <a:r>
+              <a:rPr sz="1500" b="0" dirty="0" err="1">
+                <a:solidFill>
+                  <a:srgbClr val="46565C"/>
+                </a:solidFill>
+                <a:latin typeface="Segoe UI"/>
+              </a:rPr>
+              <a:t>vea</a:t>
+            </a:r>
+            <a:r>
+              <a:rPr sz="1500" b="0" dirty="0">
+                <a:solidFill>
+                  <a:srgbClr val="46565C"/>
+                </a:solidFill>
+                <a:latin typeface="Segoe UI"/>
+              </a:rPr>
+              <a:t> </a:t>
+            </a:r>
+            <a:r>
+              <a:rPr sz="1500" b="0" dirty="0" err="1">
+                <a:solidFill>
+                  <a:srgbClr val="46565C"/>
+                </a:solidFill>
+                <a:latin typeface="Segoe UI"/>
+              </a:rPr>
+              <a:t>como</a:t>
+            </a:r>
+            <a:r>
+              <a:rPr sz="1500" b="0" dirty="0">
+                <a:solidFill>
+                  <a:srgbClr val="46565C"/>
+                </a:solidFill>
+                <a:latin typeface="Segoe UI"/>
+              </a:rPr>
+              <a:t> la </a:t>
+            </a:r>
+            <a:r>
+              <a:rPr sz="1500" b="0" dirty="0" err="1">
+                <a:solidFill>
+                  <a:srgbClr val="46565C"/>
+                </a:solidFill>
+                <a:latin typeface="Segoe UI"/>
+              </a:rPr>
+              <a:t>misma</a:t>
+            </a:r>
+            <a:r>
+              <a:rPr sz="1500" b="0" dirty="0">
+                <a:solidFill>
+                  <a:srgbClr val="46565C"/>
+                </a:solidFill>
+                <a:latin typeface="Segoe UI"/>
+              </a:rPr>
+              <a:t> </a:t>
+            </a:r>
+            <a:r>
+              <a:rPr sz="1500" b="0" dirty="0" err="1">
+                <a:solidFill>
+                  <a:srgbClr val="46565C"/>
+                </a:solidFill>
+                <a:latin typeface="Segoe UI"/>
+              </a:rPr>
+              <a:t>marca</a:t>
+            </a:r>
+            <a:r>
+              <a:rPr sz="1500" b="0" dirty="0">
+                <a:solidFill>
+                  <a:srgbClr val="46565C"/>
+                </a:solidFill>
+                <a:latin typeface="Segoe UI"/>
+              </a:rPr>
+              <a:t>. Content Suite </a:t>
+            </a:r>
+            <a:r>
+              <a:rPr sz="1500" b="0" dirty="0" err="1">
+                <a:solidFill>
+                  <a:srgbClr val="46565C"/>
+                </a:solidFill>
+                <a:latin typeface="Segoe UI"/>
+              </a:rPr>
+              <a:t>convierte</a:t>
+            </a:r>
+            <a:r>
+              <a:rPr sz="1500" b="0" dirty="0">
+                <a:solidFill>
+                  <a:srgbClr val="46565C"/>
+                </a:solidFill>
+                <a:latin typeface="Segoe UI"/>
+              </a:rPr>
+              <a:t> las </a:t>
+            </a:r>
+            <a:r>
+              <a:rPr sz="1500" b="0" dirty="0" err="1">
+                <a:solidFill>
+                  <a:srgbClr val="46565C"/>
+                </a:solidFill>
+                <a:latin typeface="Segoe UI"/>
+              </a:rPr>
+              <a:t>reglas</a:t>
+            </a:r>
+            <a:r>
+              <a:rPr sz="1500" b="0" dirty="0">
+                <a:solidFill>
+                  <a:srgbClr val="46565C"/>
+                </a:solidFill>
+                <a:latin typeface="Segoe UI"/>
+              </a:rPr>
+              <a:t> de </a:t>
+            </a:r>
+            <a:r>
+              <a:rPr sz="1500" b="0" dirty="0" err="1">
+                <a:solidFill>
+                  <a:srgbClr val="46565C"/>
+                </a:solidFill>
+                <a:latin typeface="Segoe UI"/>
+              </a:rPr>
+              <a:t>marca</a:t>
+            </a:r>
+            <a:r>
+              <a:rPr sz="1500" b="0" dirty="0">
+                <a:solidFill>
+                  <a:srgbClr val="46565C"/>
+                </a:solidFill>
+                <a:latin typeface="Segoe UI"/>
+              </a:rPr>
+              <a:t> </a:t>
+            </a:r>
+            <a:r>
+              <a:rPr sz="1500" b="0" dirty="0" err="1">
+                <a:solidFill>
+                  <a:srgbClr val="46565C"/>
+                </a:solidFill>
+                <a:latin typeface="Segoe UI"/>
+              </a:rPr>
+              <a:t>en</a:t>
+            </a:r>
+            <a:r>
+              <a:rPr sz="1500" b="0" dirty="0">
+                <a:solidFill>
+                  <a:srgbClr val="46565C"/>
+                </a:solidFill>
+                <a:latin typeface="Segoe UI"/>
+              </a:rPr>
+              <a:t> un </a:t>
+            </a:r>
+            <a:r>
+              <a:rPr sz="1500" b="0" dirty="0" err="1">
+                <a:solidFill>
+                  <a:srgbClr val="46565C"/>
+                </a:solidFill>
+                <a:latin typeface="Segoe UI"/>
+              </a:rPr>
+              <a:t>artefacto</a:t>
+            </a:r>
+            <a:r>
+              <a:rPr sz="1500" b="0" dirty="0">
+                <a:solidFill>
+                  <a:srgbClr val="46565C"/>
+                </a:solidFill>
+                <a:latin typeface="Segoe UI"/>
+              </a:rPr>
+              <a:t> </a:t>
+            </a:r>
+            <a:r>
+              <a:rPr sz="1500" b="0" dirty="0" err="1">
+                <a:solidFill>
+                  <a:srgbClr val="46565C"/>
+                </a:solidFill>
+                <a:latin typeface="Segoe UI"/>
+              </a:rPr>
+              <a:t>que</a:t>
+            </a:r>
+            <a:r>
+              <a:rPr sz="1500" b="0" dirty="0">
+                <a:solidFill>
+                  <a:srgbClr val="46565C"/>
+                </a:solidFill>
+                <a:latin typeface="Segoe UI"/>
+              </a:rPr>
+              <a:t> las </a:t>
+            </a:r>
+            <a:r>
+              <a:rPr sz="1500" b="0" dirty="0" err="1">
+                <a:solidFill>
+                  <a:srgbClr val="46565C"/>
+                </a:solidFill>
+                <a:latin typeface="Segoe UI"/>
+              </a:rPr>
+              <a:t>máquinas</a:t>
+            </a:r>
+            <a:r>
+              <a:rPr sz="1500" b="0" dirty="0">
+                <a:solidFill>
+                  <a:srgbClr val="46565C"/>
+                </a:solidFill>
+                <a:latin typeface="Segoe UI"/>
+              </a:rPr>
+              <a:t> </a:t>
+            </a:r>
+            <a:r>
+              <a:rPr sz="1500" b="0" dirty="0" err="1">
+                <a:solidFill>
+                  <a:srgbClr val="46565C"/>
+                </a:solidFill>
+                <a:latin typeface="Segoe UI"/>
+              </a:rPr>
+              <a:t>pueden</a:t>
+            </a:r>
+            <a:r>
+              <a:rPr sz="1500" b="0" dirty="0">
+                <a:solidFill>
+                  <a:srgbClr val="46565C"/>
+                </a:solidFill>
+                <a:latin typeface="Segoe UI"/>
+              </a:rPr>
+              <a:t> leer, </a:t>
+            </a:r>
+            <a:r>
+              <a:rPr sz="1500" b="0" dirty="0" err="1">
+                <a:solidFill>
+                  <a:srgbClr val="46565C"/>
+                </a:solidFill>
+                <a:latin typeface="Segoe UI"/>
+              </a:rPr>
+              <a:t>aplicar</a:t>
+            </a:r>
+            <a:r>
+              <a:rPr sz="1500" b="0" dirty="0">
+                <a:solidFill>
+                  <a:srgbClr val="46565C"/>
+                </a:solidFill>
+                <a:latin typeface="Segoe UI"/>
+              </a:rPr>
+              <a:t> y </a:t>
+            </a:r>
+            <a:r>
+              <a:rPr sz="1500" b="0" dirty="0" err="1">
+                <a:solidFill>
+                  <a:srgbClr val="46565C"/>
+                </a:solidFill>
+                <a:latin typeface="Segoe UI"/>
+              </a:rPr>
+              <a:t>auditar</a:t>
+            </a:r>
+            <a:r>
+              <a:rPr sz="1500" b="0" dirty="0">
+                <a:solidFill>
+                  <a:srgbClr val="46565C"/>
+                </a:solidFill>
+                <a:latin typeface="Segoe UI"/>
+              </a:rPr>
+              <a:t>.</a:t>
             </a:r>
           </a:p>
         </p:txBody>
@@ -4488,6 +5039,7 @@
           <a:lstStyle/>
           <a:p>
             <a:pPr algn="ctr"/>
+            <a:endParaRPr/>
           </a:p>
         </p:txBody>
       </p:sp>
@@ -4508,7 +5060,7 @@
           <a:noFill/>
         </p:spPr>
         <p:txBody>
-          <a:bodyPr wrap="square" anchor="t" lIns="0" rIns="0" tIns="0" bIns="0">
+          <a:bodyPr wrap="square" lIns="0" tIns="0" rIns="0" bIns="0" anchor="t">
             <a:spAutoFit/>
           </a:bodyPr>
           <a:lstStyle/>
@@ -4547,7 +5099,7 @@
           <a:noFill/>
         </p:spPr>
         <p:txBody>
-          <a:bodyPr wrap="square" anchor="t" lIns="0" rIns="0" tIns="0" bIns="0">
+          <a:bodyPr wrap="square" lIns="0" tIns="0" rIns="0" bIns="0" anchor="t">
             <a:spAutoFit/>
           </a:bodyPr>
           <a:lstStyle/>
@@ -4558,14 +5110,38 @@
               </a:spcAft>
             </a:pPr>
             <a:r>
-              <a:rPr sz="1050" b="0">
-                <a:solidFill>
-                  <a:srgbClr val="46565C"/>
-                </a:solidFill>
-                <a:latin typeface="Segoe UI"/>
-              </a:rPr>
-              <a:t>módulos entregados</a:t>
-            </a:r>
+              <a:rPr sz="1050" b="0" dirty="0" err="1">
+                <a:solidFill>
+                  <a:srgbClr val="46565C"/>
+                </a:solidFill>
+                <a:latin typeface="Segoe UI"/>
+              </a:rPr>
+              <a:t>módulos</a:t>
+            </a:r>
+            <a:r>
+              <a:rPr sz="1050" b="0" dirty="0">
+                <a:solidFill>
+                  <a:srgbClr val="46565C"/>
+                </a:solidFill>
+                <a:latin typeface="Segoe UI"/>
+              </a:rPr>
+              <a:t> </a:t>
+            </a:r>
+            <a:r>
+              <a:rPr sz="1050" b="0" dirty="0" err="1">
+                <a:solidFill>
+                  <a:srgbClr val="46565C"/>
+                </a:solidFill>
+                <a:latin typeface="Segoe UI"/>
+              </a:rPr>
+              <a:t>entregados</a:t>
+            </a:r>
+            <a:endParaRPr sz="1050" b="0" dirty="0">
+              <a:solidFill>
+                <a:srgbClr val="46565C"/>
+              </a:solidFill>
+              <a:latin typeface="Segoe UI"/>
+            </a:endParaRPr>
           </a:p>
         </p:txBody>
       </p:sp>
@@ -4612,6 +5188,7 @@
           <a:lstStyle/>
           <a:p>
             <a:pPr algn="ctr"/>
+            <a:endParaRPr/>
           </a:p>
         </p:txBody>
       </p:sp>
@@ -4632,7 +5209,7 @@
           <a:noFill/>
         </p:spPr>
         <p:txBody>
-          <a:bodyPr wrap="square" anchor="t" lIns="0" rIns="0" tIns="0" bIns="0">
+          <a:bodyPr wrap="square" lIns="0" tIns="0" rIns="0" bIns="0" anchor="t">
             <a:spAutoFit/>
           </a:bodyPr>
           <a:lstStyle/>
@@ -4671,7 +5248,7 @@
           <a:noFill/>
         </p:spPr>
         <p:txBody>
-          <a:bodyPr wrap="square" anchor="t" lIns="0" rIns="0" tIns="0" bIns="0">
+          <a:bodyPr wrap="square" lIns="0" tIns="0" rIns="0" bIns="0" anchor="t">
             <a:spAutoFit/>
           </a:bodyPr>
           <a:lstStyle/>
@@ -4736,6 +5313,7 @@
           <a:lstStyle/>
           <a:p>
             <a:pPr algn="ctr"/>
+            <a:endParaRPr/>
           </a:p>
         </p:txBody>
       </p:sp>
@@ -4756,7 +5334,7 @@
           <a:noFill/>
         </p:spPr>
         <p:txBody>
-          <a:bodyPr wrap="square" anchor="t" lIns="0" rIns="0" tIns="0" bIns="0">
+          <a:bodyPr wrap="square" lIns="0" tIns="0" rIns="0" bIns="0" anchor="t">
             <a:spAutoFit/>
           </a:bodyPr>
           <a:lstStyle/>
@@ -4795,7 +5373,7 @@
           <a:noFill/>
         </p:spPr>
         <p:txBody>
-          <a:bodyPr wrap="square" anchor="t" lIns="0" rIns="0" tIns="0" bIns="0">
+          <a:bodyPr wrap="square" lIns="0" tIns="0" rIns="0" bIns="0" anchor="t">
             <a:spAutoFit/>
           </a:bodyPr>
           <a:lstStyle/>
@@ -4860,6 +5438,7 @@
           <a:lstStyle/>
           <a:p>
             <a:pPr algn="ctr"/>
+            <a:endParaRPr/>
           </a:p>
         </p:txBody>
       </p:sp>
@@ -4880,7 +5459,7 @@
           <a:noFill/>
         </p:spPr>
         <p:txBody>
-          <a:bodyPr wrap="square" anchor="t" lIns="0" rIns="0" tIns="0" bIns="0">
+          <a:bodyPr wrap="square" lIns="0" tIns="0" rIns="0" bIns="0" anchor="t">
             <a:spAutoFit/>
           </a:bodyPr>
           <a:lstStyle/>
@@ -4919,7 +5498,7 @@
           <a:noFill/>
         </p:spPr>
         <p:txBody>
-          <a:bodyPr wrap="square" anchor="t" lIns="0" rIns="0" tIns="0" bIns="0">
+          <a:bodyPr wrap="square" lIns="0" tIns="0" rIns="0" bIns="0" anchor="t">
             <a:spAutoFit/>
           </a:bodyPr>
           <a:lstStyle/>
@@ -4958,7 +5537,7 @@
           <a:noFill/>
         </p:spPr>
         <p:txBody>
-          <a:bodyPr wrap="square" anchor="t" lIns="0" rIns="0" tIns="0" bIns="0">
+          <a:bodyPr wrap="square" lIns="0" tIns="0" rIns="0" bIns="0" anchor="t">
             <a:spAutoFit/>
           </a:bodyPr>
           <a:lstStyle/>
@@ -4969,7 +5548,7 @@
               </a:spcAft>
             </a:pPr>
             <a:r>
-              <a:rPr sz="1200" b="1">
+              <a:rPr sz="1200" b="1" dirty="0" err="1">
                 <a:solidFill>
                   <a:srgbClr val="101619"/>
                 </a:solidFill>
@@ -4977,6 +5556,12 @@
               </a:rPr>
               <a:t>Entregables</a:t>
             </a:r>
+            <a:endParaRPr sz="1200" b="1" dirty="0">
+              <a:solidFill>
+                <a:srgbClr val="101619"/>
+              </a:solidFill>
+              <a:latin typeface="Segoe UI"/>
+            </a:endParaRPr>
           </a:p>
           <a:p>
             <a:pPr>
@@ -4985,7 +5570,7 @@
               </a:spcAft>
             </a:pPr>
             <a:r>
-              <a:rPr sz="1150" b="0">
+              <a:rPr sz="1150" b="0" dirty="0">
                 <a:solidFill>
                   <a:srgbClr val="46565C"/>
                 </a:solidFill>
@@ -5001,7 +5586,7 @@
               </a:spcAft>
             </a:pPr>
             <a:r>
-              <a:rPr sz="1150" b="0">
+              <a:rPr sz="1150" b="0" dirty="0">
                 <a:solidFill>
                   <a:srgbClr val="46565C"/>
                 </a:solidFill>
@@ -5017,13 +5602,22 @@
               </a:spcAft>
             </a:pPr>
             <a:r>
-              <a:rPr sz="1150" b="0">
+              <a:rPr sz="1150" b="0" dirty="0" err="1">
                 <a:solidFill>
                   <a:srgbClr val="46565C"/>
                 </a:solidFill>
                 <a:latin typeface="Consolas"/>
               </a:rPr>
-              <a:t>Langfuse   cloud.langfuse.com/project/cmszm13ah0az1ad0cp6p4suff</a:t>
+              <a:t>Langfuse</a:t>
+            </a:r>
+            <a:r>
+              <a:rPr sz="1150" b="0" dirty="0">
+                <a:solidFill>
+                  <a:srgbClr val="46565C"/>
+                </a:solidFill>
+                <a:latin typeface="Consolas"/>
+              </a:rPr>
+              <a:t>   cloud.langfuse.com/project/cmszm13ah0az1ad0cp6p4suff</a:t>
             </a:r>
           </a:p>
           <a:p>
@@ -5033,7 +5627,7 @@
               </a:spcAft>
             </a:pPr>
             <a:r>
-              <a:rPr sz="1150" b="0">
+              <a:rPr sz="1150" b="0" dirty="0">
                 <a:solidFill>
                   <a:srgbClr val="46565C"/>
                 </a:solidFill>
@@ -5061,7 +5655,7 @@
           <a:noFill/>
         </p:spPr>
         <p:txBody>
-          <a:bodyPr wrap="square" anchor="t" lIns="0" rIns="0" tIns="0" bIns="0">
+          <a:bodyPr wrap="square" lIns="0" tIns="0" rIns="0" bIns="0" anchor="t">
             <a:spAutoFit/>
           </a:bodyPr>
           <a:lstStyle/>
@@ -5092,7 +5686,7 @@
 </file>
 
 <file path=ppt/slides/slide2.xml><?xml version="1.0" encoding="utf-8"?>
-<p:sld xmlns:a="http://schemas.openxmlformats.org/drawingml/2006/main" xmlns:p="http://schemas.openxmlformats.org/presentationml/2006/main" xmlns:r="http://schemas.openxmlformats.org/officeDocument/2006/relationships">
+<p:sld xmlns:a="http://schemas.openxmlformats.org/drawingml/2006/main" xmlns:r="http://schemas.openxmlformats.org/officeDocument/2006/relationships" xmlns:p="http://schemas.openxmlformats.org/presentationml/2006/main">
   <p:cSld>
     <p:bg>
       <p:bgPr>
@@ -5108,7 +5702,14 @@
         <p:cNvGrpSpPr/>
         <p:nvPr/>
       </p:nvGrpSpPr>
-      <p:grpSpPr/>
+      <p:grpSpPr>
+        <a:xfrm>
+          <a:off x="0" y="0"/>
+          <a:ext cx="0" cy="0"/>
+          <a:chOff x="0" y="0"/>
+          <a:chExt cx="0" cy="0"/>
+        </a:xfrm>
+      </p:grpSpPr>
       <p:sp>
         <p:nvSpPr>
           <p:cNvPr id="2" name="Rectangle 1"/>
@@ -5150,6 +5751,7 @@
           <a:lstStyle/>
           <a:p>
             <a:pPr algn="ctr"/>
+            <a:endParaRPr/>
           </a:p>
         </p:txBody>
       </p:sp>
@@ -5170,7 +5772,7 @@
           <a:noFill/>
         </p:spPr>
         <p:txBody>
-          <a:bodyPr wrap="square" anchor="t" lIns="0" rIns="0" tIns="0" bIns="0">
+          <a:bodyPr wrap="square" lIns="0" tIns="0" rIns="0" bIns="0" anchor="t">
             <a:spAutoFit/>
           </a:bodyPr>
           <a:lstStyle/>
@@ -5233,6 +5835,7 @@
           <a:lstStyle/>
           <a:p>
             <a:pPr algn="ctr"/>
+            <a:endParaRPr/>
           </a:p>
         </p:txBody>
       </p:sp>
@@ -5277,6 +5880,7 @@
           <a:lstStyle/>
           <a:p>
             <a:pPr algn="ctr"/>
+            <a:endParaRPr/>
           </a:p>
         </p:txBody>
       </p:sp>
@@ -5321,6 +5925,7 @@
           <a:lstStyle/>
           <a:p>
             <a:pPr algn="ctr"/>
+            <a:endParaRPr/>
           </a:p>
         </p:txBody>
       </p:sp>
@@ -5365,6 +5970,7 @@
           <a:lstStyle/>
           <a:p>
             <a:pPr algn="ctr"/>
+            <a:endParaRPr/>
           </a:p>
         </p:txBody>
       </p:sp>
@@ -5409,6 +6015,7 @@
           <a:lstStyle/>
           <a:p>
             <a:pPr algn="ctr"/>
+            <a:endParaRPr/>
           </a:p>
         </p:txBody>
       </p:sp>
@@ -5453,6 +6060,7 @@
           <a:lstStyle/>
           <a:p>
             <a:pPr algn="ctr"/>
+            <a:endParaRPr/>
           </a:p>
         </p:txBody>
       </p:sp>
@@ -5497,6 +6105,7 @@
           <a:lstStyle/>
           <a:p>
             <a:pPr algn="ctr"/>
+            <a:endParaRPr/>
           </a:p>
         </p:txBody>
       </p:sp>
@@ -5541,6 +6150,7 @@
           <a:lstStyle/>
           <a:p>
             <a:pPr algn="ctr"/>
+            <a:endParaRPr/>
           </a:p>
         </p:txBody>
       </p:sp>
@@ -5585,6 +6195,7 @@
           <a:lstStyle/>
           <a:p>
             <a:pPr algn="ctr"/>
+            <a:endParaRPr/>
           </a:p>
         </p:txBody>
       </p:sp>
@@ -5629,6 +6240,7 @@
           <a:lstStyle/>
           <a:p>
             <a:pPr algn="ctr"/>
+            <a:endParaRPr/>
           </a:p>
         </p:txBody>
       </p:sp>
@@ -5673,6 +6285,7 @@
           <a:lstStyle/>
           <a:p>
             <a:pPr algn="ctr"/>
+            <a:endParaRPr/>
           </a:p>
         </p:txBody>
       </p:sp>
@@ -5717,6 +6330,7 @@
           <a:lstStyle/>
           <a:p>
             <a:pPr algn="ctr"/>
+            <a:endParaRPr/>
           </a:p>
         </p:txBody>
       </p:sp>
@@ -5761,6 +6375,7 @@
           <a:lstStyle/>
           <a:p>
             <a:pPr algn="ctr"/>
+            <a:endParaRPr/>
           </a:p>
         </p:txBody>
       </p:sp>
@@ -5805,6 +6420,7 @@
           <a:lstStyle/>
           <a:p>
             <a:pPr algn="ctr"/>
+            <a:endParaRPr/>
           </a:p>
         </p:txBody>
       </p:sp>
@@ -5849,6 +6465,7 @@
           <a:lstStyle/>
           <a:p>
             <a:pPr algn="ctr"/>
+            <a:endParaRPr/>
           </a:p>
         </p:txBody>
       </p:sp>
@@ -5893,6 +6510,7 @@
           <a:lstStyle/>
           <a:p>
             <a:pPr algn="ctr"/>
+            <a:endParaRPr/>
           </a:p>
         </p:txBody>
       </p:sp>
@@ -5937,6 +6555,7 @@
           <a:lstStyle/>
           <a:p>
             <a:pPr algn="ctr"/>
+            <a:endParaRPr/>
           </a:p>
         </p:txBody>
       </p:sp>
@@ -5981,6 +6600,7 @@
           <a:lstStyle/>
           <a:p>
             <a:pPr algn="ctr"/>
+            <a:endParaRPr/>
           </a:p>
         </p:txBody>
       </p:sp>
@@ -6025,6 +6645,7 @@
           <a:lstStyle/>
           <a:p>
             <a:pPr algn="ctr"/>
+            <a:endParaRPr/>
           </a:p>
         </p:txBody>
       </p:sp>
@@ -6069,6 +6690,7 @@
           <a:lstStyle/>
           <a:p>
             <a:pPr algn="ctr"/>
+            <a:endParaRPr/>
           </a:p>
         </p:txBody>
       </p:sp>
@@ -6113,6 +6735,7 @@
           <a:lstStyle/>
           <a:p>
             <a:pPr algn="ctr"/>
+            <a:endParaRPr/>
           </a:p>
         </p:txBody>
       </p:sp>
@@ -6157,6 +6780,7 @@
           <a:lstStyle/>
           <a:p>
             <a:pPr algn="ctr"/>
+            <a:endParaRPr/>
           </a:p>
         </p:txBody>
       </p:sp>
@@ -6201,6 +6825,7 @@
           <a:lstStyle/>
           <a:p>
             <a:pPr algn="ctr"/>
+            <a:endParaRPr/>
           </a:p>
         </p:txBody>
       </p:sp>
@@ -6245,6 +6870,7 @@
           <a:lstStyle/>
           <a:p>
             <a:pPr algn="ctr"/>
+            <a:endParaRPr/>
           </a:p>
         </p:txBody>
       </p:sp>
@@ -6289,6 +6915,7 @@
           <a:lstStyle/>
           <a:p>
             <a:pPr algn="ctr"/>
+            <a:endParaRPr/>
           </a:p>
         </p:txBody>
       </p:sp>
@@ -6333,6 +6960,7 @@
           <a:lstStyle/>
           <a:p>
             <a:pPr algn="ctr"/>
+            <a:endParaRPr/>
           </a:p>
         </p:txBody>
       </p:sp>
@@ -6353,7 +6981,7 @@
           <a:noFill/>
         </p:spPr>
         <p:txBody>
-          <a:bodyPr wrap="square" anchor="t" lIns="0" rIns="0" tIns="0" bIns="0">
+          <a:bodyPr wrap="square" lIns="0" tIns="0" rIns="0" bIns="0" anchor="t">
             <a:spAutoFit/>
           </a:bodyPr>
           <a:lstStyle/>
@@ -6392,7 +7020,7 @@
           <a:noFill/>
         </p:spPr>
         <p:txBody>
-          <a:bodyPr wrap="square" anchor="t" lIns="0" rIns="0" tIns="0" bIns="0">
+          <a:bodyPr wrap="square" lIns="0" tIns="0" rIns="0" bIns="0" anchor="t">
             <a:spAutoFit/>
           </a:bodyPr>
           <a:lstStyle/>
@@ -6431,7 +7059,7 @@
           <a:noFill/>
         </p:spPr>
         <p:txBody>
-          <a:bodyPr wrap="square" anchor="t" lIns="0" rIns="0" tIns="0" bIns="0">
+          <a:bodyPr wrap="square" lIns="0" tIns="0" rIns="0" bIns="0" anchor="t">
             <a:spAutoFit/>
           </a:bodyPr>
           <a:lstStyle/>
@@ -6496,6 +7124,7 @@
           <a:lstStyle/>
           <a:p>
             <a:pPr algn="ctr"/>
+            <a:endParaRPr/>
           </a:p>
         </p:txBody>
       </p:sp>
@@ -6516,7 +7145,7 @@
           <a:noFill/>
         </p:spPr>
         <p:txBody>
-          <a:bodyPr wrap="square" anchor="t" lIns="0" rIns="0" tIns="0" bIns="0">
+          <a:bodyPr wrap="square" lIns="0" tIns="0" rIns="0" bIns="0" anchor="t">
             <a:spAutoFit/>
           </a:bodyPr>
           <a:lstStyle/>
@@ -6527,14 +7156,65 @@
               </a:spcAft>
             </a:pPr>
             <a:r>
-              <a:rPr sz="1200" b="1">
+              <a:rPr sz="1200" b="1" dirty="0">
                 <a:solidFill>
                   <a:srgbClr val="A8271F"/>
                 </a:solidFill>
                 <a:latin typeface="Segoe UI"/>
               </a:rPr>
-              <a:t>Lo que un LLM escribe por defecto</a:t>
-            </a:r>
+              <a:t>Lo </a:t>
+            </a:r>
+            <a:r>
+              <a:rPr sz="1200" b="1" dirty="0" err="1">
+                <a:solidFill>
+                  <a:srgbClr val="A8271F"/>
+                </a:solidFill>
+                <a:latin typeface="Segoe UI"/>
+              </a:rPr>
+              <a:t>que</a:t>
+            </a:r>
+            <a:r>
+              <a:rPr sz="1200" b="1" dirty="0">
+                <a:solidFill>
+                  <a:srgbClr val="A8271F"/>
+                </a:solidFill>
+                <a:latin typeface="Segoe UI"/>
+              </a:rPr>
+              <a:t> un LLM escribe </a:t>
+            </a:r>
+            <a:r>
+              <a:rPr sz="1200" b="1" dirty="0" err="1">
+                <a:solidFill>
+                  <a:srgbClr val="A8271F"/>
+                </a:solidFill>
+                <a:latin typeface="Segoe UI"/>
+              </a:rPr>
+              <a:t>por</a:t>
+            </a:r>
+            <a:r>
+              <a:rPr sz="1200" b="1" dirty="0">
+                <a:solidFill>
+                  <a:srgbClr val="A8271F"/>
+                </a:solidFill>
+                <a:latin typeface="Segoe UI"/>
+              </a:rPr>
+              <a:t> </a:t>
+            </a:r>
+            <a:r>
+              <a:rPr sz="1200" b="1" dirty="0" err="1">
+                <a:solidFill>
+                  <a:srgbClr val="A8271F"/>
+                </a:solidFill>
+                <a:latin typeface="Segoe UI"/>
+              </a:rPr>
+              <a:t>defecto</a:t>
+            </a:r>
+            <a:endParaRPr sz="1200" b="1" dirty="0">
+              <a:solidFill>
+                <a:srgbClr val="A8271F"/>
+              </a:solidFill>
+              <a:latin typeface="Segoe UI"/>
+            </a:endParaRPr>
           </a:p>
           <a:p>
             <a:pPr>
@@ -6543,13 +7223,31 @@
               </a:spcAft>
             </a:pPr>
             <a:r>
-              <a:rPr sz="1200" b="0">
+              <a:rPr sz="1200" b="0" dirty="0">
                 <a:solidFill>
                   <a:srgbClr val="74868C"/>
                 </a:solidFill>
                 <a:latin typeface="Segoe UI"/>
               </a:rPr>
-              <a:t>"el logo debe verse bien"</a:t>
+              <a:t>"el logo </a:t>
+            </a:r>
+            <a:r>
+              <a:rPr sz="1200" b="0" dirty="0" err="1">
+                <a:solidFill>
+                  <a:srgbClr val="74868C"/>
+                </a:solidFill>
+                <a:latin typeface="Segoe UI"/>
+              </a:rPr>
+              <a:t>debe</a:t>
+            </a:r>
+            <a:r>
+              <a:rPr sz="1200" b="0" dirty="0">
+                <a:solidFill>
+                  <a:srgbClr val="74868C"/>
+                </a:solidFill>
+                <a:latin typeface="Segoe UI"/>
+              </a:rPr>
+              <a:t> verse bien"</a:t>
             </a:r>
           </a:p>
           <a:p>
@@ -6559,13 +7257,49 @@
               </a:spcAft>
             </a:pPr>
             <a:r>
-              <a:rPr sz="1200" b="0">
+              <a:rPr sz="1200" b="0" dirty="0">
                 <a:solidFill>
                   <a:srgbClr val="74868C"/>
                 </a:solidFill>
                 <a:latin typeface="Segoe UI"/>
               </a:rPr>
-              <a:t>"usar colores cálidos"</a:t>
+              <a:t>"usar </a:t>
+            </a:r>
+            <a:r>
+              <a:rPr sz="1200" b="0" dirty="0" err="1">
+                <a:solidFill>
+                  <a:srgbClr val="74868C"/>
+                </a:solidFill>
+                <a:latin typeface="Segoe UI"/>
+              </a:rPr>
+              <a:t>colores</a:t>
+            </a:r>
+            <a:r>
+              <a:rPr sz="1200" b="0" dirty="0">
+                <a:solidFill>
+                  <a:srgbClr val="74868C"/>
+                </a:solidFill>
+                <a:latin typeface="Segoe UI"/>
+              </a:rPr>
+              <a:t> </a:t>
+            </a:r>
+            <a:r>
+              <a:rPr sz="1200" b="0" dirty="0" err="1">
+                <a:solidFill>
+                  <a:srgbClr val="74868C"/>
+                </a:solidFill>
+                <a:latin typeface="Segoe UI"/>
+              </a:rPr>
+              <a:t>cálidos</a:t>
+            </a:r>
+            <a:r>
+              <a:rPr sz="1200" b="0" dirty="0">
+                <a:solidFill>
+                  <a:srgbClr val="74868C"/>
+                </a:solidFill>
+                <a:latin typeface="Segoe UI"/>
+              </a:rPr>
+              <a:t>"</a:t>
             </a:r>
           </a:p>
           <a:p>
@@ -6575,13 +7309,49 @@
               </a:spcAft>
             </a:pPr>
             <a:r>
-              <a:rPr sz="1200" b="0">
+              <a:rPr sz="1200" b="0" dirty="0">
                 <a:solidFill>
                   <a:srgbClr val="74868C"/>
                 </a:solidFill>
                 <a:latin typeface="Segoe UI"/>
               </a:rPr>
-              <a:t>"buena legibilidad"</a:t>
+              <a:t>"</a:t>
+            </a:r>
+            <a:r>
+              <a:rPr sz="1200" b="0" dirty="0" err="1">
+                <a:solidFill>
+                  <a:srgbClr val="74868C"/>
+                </a:solidFill>
+                <a:latin typeface="Segoe UI"/>
+              </a:rPr>
+              <a:t>buena</a:t>
+            </a:r>
+            <a:r>
+              <a:rPr sz="1200" b="0" dirty="0">
+                <a:solidFill>
+                  <a:srgbClr val="74868C"/>
+                </a:solidFill>
+                <a:latin typeface="Segoe UI"/>
+              </a:rPr>
+              <a:t> </a:t>
+            </a:r>
+            <a:r>
+              <a:rPr sz="1200" b="0" dirty="0" err="1">
+                <a:solidFill>
+                  <a:srgbClr val="74868C"/>
+                </a:solidFill>
+                <a:latin typeface="Segoe UI"/>
+              </a:rPr>
+              <a:t>legibilidad</a:t>
+            </a:r>
+            <a:r>
+              <a:rPr sz="1200" b="0" dirty="0">
+                <a:solidFill>
+                  <a:srgbClr val="74868C"/>
+                </a:solidFill>
+                <a:latin typeface="Segoe UI"/>
+              </a:rPr>
+              <a:t>"</a:t>
             </a:r>
           </a:p>
           <a:p>
@@ -6591,13 +7361,49 @@
               </a:spcAft>
             </a:pPr>
             <a:r>
-              <a:rPr sz="1200" b="0">
+              <a:rPr sz="1200" b="0" dirty="0">
                 <a:solidFill>
                   <a:srgbClr val="74868C"/>
                 </a:solidFill>
                 <a:latin typeface="Segoe UI"/>
               </a:rPr>
-              <a:t>"fotos auténticas"</a:t>
+              <a:t>"</a:t>
+            </a:r>
+            <a:r>
+              <a:rPr sz="1200" b="0" dirty="0" err="1">
+                <a:solidFill>
+                  <a:srgbClr val="74868C"/>
+                </a:solidFill>
+                <a:latin typeface="Segoe UI"/>
+              </a:rPr>
+              <a:t>fotos</a:t>
+            </a:r>
+            <a:r>
+              <a:rPr sz="1200" b="0" dirty="0">
+                <a:solidFill>
+                  <a:srgbClr val="74868C"/>
+                </a:solidFill>
+                <a:latin typeface="Segoe UI"/>
+              </a:rPr>
+              <a:t> </a:t>
+            </a:r>
+            <a:r>
+              <a:rPr sz="1200" b="0" dirty="0" err="1">
+                <a:solidFill>
+                  <a:srgbClr val="74868C"/>
+                </a:solidFill>
+                <a:latin typeface="Segoe UI"/>
+              </a:rPr>
+              <a:t>auténticas</a:t>
+            </a:r>
+            <a:r>
+              <a:rPr sz="1200" b="0" dirty="0">
+                <a:solidFill>
+                  <a:srgbClr val="74868C"/>
+                </a:solidFill>
+                <a:latin typeface="Segoe UI"/>
+              </a:rPr>
+              <a:t>"</a:t>
             </a:r>
           </a:p>
         </p:txBody>
@@ -6645,6 +7451,7 @@
           <a:lstStyle/>
           <a:p>
             <a:pPr algn="ctr"/>
+            <a:endParaRPr/>
           </a:p>
         </p:txBody>
       </p:sp>
@@ -6665,7 +7472,7 @@
           <a:noFill/>
         </p:spPr>
         <p:txBody>
-          <a:bodyPr wrap="square" anchor="t" lIns="0" rIns="0" tIns="0" bIns="0">
+          <a:bodyPr wrap="square" lIns="0" tIns="0" rIns="0" bIns="0" anchor="t">
             <a:spAutoFit/>
           </a:bodyPr>
           <a:lstStyle/>
@@ -6794,6 +7601,7 @@
           <a:lstStyle/>
           <a:p>
             <a:pPr algn="ctr"/>
+            <a:endParaRPr/>
           </a:p>
         </p:txBody>
       </p:sp>
@@ -6814,7 +7622,7 @@
           <a:noFill/>
         </p:spPr>
         <p:txBody>
-          <a:bodyPr wrap="square" anchor="t" lIns="0" rIns="0" tIns="0" bIns="0">
+          <a:bodyPr wrap="square" lIns="0" tIns="0" rIns="0" bIns="0" anchor="t">
             <a:spAutoFit/>
           </a:bodyPr>
           <a:lstStyle/>
@@ -6877,7 +7685,7 @@
 </file>
 
 <file path=ppt/slides/slide3.xml><?xml version="1.0" encoding="utf-8"?>
-<p:sld xmlns:a="http://schemas.openxmlformats.org/drawingml/2006/main" xmlns:p="http://schemas.openxmlformats.org/presentationml/2006/main" xmlns:r="http://schemas.openxmlformats.org/officeDocument/2006/relationships">
+<p:sld xmlns:a="http://schemas.openxmlformats.org/drawingml/2006/main" xmlns:r="http://schemas.openxmlformats.org/officeDocument/2006/relationships" xmlns:p="http://schemas.openxmlformats.org/presentationml/2006/main">
   <p:cSld>
     <p:bg>
       <p:bgPr>
@@ -6893,7 +7701,14 @@
         <p:cNvGrpSpPr/>
         <p:nvPr/>
       </p:nvGrpSpPr>
-      <p:grpSpPr/>
+      <p:grpSpPr>
+        <a:xfrm>
+          <a:off x="0" y="0"/>
+          <a:ext cx="0" cy="0"/>
+          <a:chOff x="0" y="0"/>
+          <a:chExt cx="0" cy="0"/>
+        </a:xfrm>
+      </p:grpSpPr>
       <p:sp>
         <p:nvSpPr>
           <p:cNvPr id="2" name="Rectangle 1"/>
@@ -6935,6 +7750,7 @@
           <a:lstStyle/>
           <a:p>
             <a:pPr algn="ctr"/>
+            <a:endParaRPr/>
           </a:p>
         </p:txBody>
       </p:sp>
@@ -6955,7 +7771,7 @@
           <a:noFill/>
         </p:spPr>
         <p:txBody>
-          <a:bodyPr wrap="square" anchor="t" lIns="0" rIns="0" tIns="0" bIns="0">
+          <a:bodyPr wrap="square" lIns="0" tIns="0" rIns="0" bIns="0" anchor="t">
             <a:spAutoFit/>
           </a:bodyPr>
           <a:lstStyle/>
@@ -7018,6 +7834,7 @@
           <a:lstStyle/>
           <a:p>
             <a:pPr algn="ctr"/>
+            <a:endParaRPr/>
           </a:p>
         </p:txBody>
       </p:sp>
@@ -7062,6 +7879,7 @@
           <a:lstStyle/>
           <a:p>
             <a:pPr algn="ctr"/>
+            <a:endParaRPr/>
           </a:p>
         </p:txBody>
       </p:sp>
@@ -7106,6 +7924,7 @@
           <a:lstStyle/>
           <a:p>
             <a:pPr algn="ctr"/>
+            <a:endParaRPr/>
           </a:p>
         </p:txBody>
       </p:sp>
@@ -7150,6 +7969,7 @@
           <a:lstStyle/>
           <a:p>
             <a:pPr algn="ctr"/>
+            <a:endParaRPr/>
           </a:p>
         </p:txBody>
       </p:sp>
@@ -7194,6 +8014,7 @@
           <a:lstStyle/>
           <a:p>
             <a:pPr algn="ctr"/>
+            <a:endParaRPr/>
           </a:p>
         </p:txBody>
       </p:sp>
@@ -7238,6 +8059,7 @@
           <a:lstStyle/>
           <a:p>
             <a:pPr algn="ctr"/>
+            <a:endParaRPr/>
           </a:p>
         </p:txBody>
       </p:sp>
@@ -7282,6 +8104,7 @@
           <a:lstStyle/>
           <a:p>
             <a:pPr algn="ctr"/>
+            <a:endParaRPr/>
           </a:p>
         </p:txBody>
       </p:sp>
@@ -7326,6 +8149,7 @@
           <a:lstStyle/>
           <a:p>
             <a:pPr algn="ctr"/>
+            <a:endParaRPr/>
           </a:p>
         </p:txBody>
       </p:sp>
@@ -7370,6 +8194,7 @@
           <a:lstStyle/>
           <a:p>
             <a:pPr algn="ctr"/>
+            <a:endParaRPr/>
           </a:p>
         </p:txBody>
       </p:sp>
@@ -7414,6 +8239,7 @@
           <a:lstStyle/>
           <a:p>
             <a:pPr algn="ctr"/>
+            <a:endParaRPr/>
           </a:p>
         </p:txBody>
       </p:sp>
@@ -7458,6 +8284,7 @@
           <a:lstStyle/>
           <a:p>
             <a:pPr algn="ctr"/>
+            <a:endParaRPr/>
           </a:p>
         </p:txBody>
       </p:sp>
@@ -7502,6 +8329,7 @@
           <a:lstStyle/>
           <a:p>
             <a:pPr algn="ctr"/>
+            <a:endParaRPr/>
           </a:p>
         </p:txBody>
       </p:sp>
@@ -7546,6 +8374,7 @@
           <a:lstStyle/>
           <a:p>
             <a:pPr algn="ctr"/>
+            <a:endParaRPr/>
           </a:p>
         </p:txBody>
       </p:sp>
@@ -7590,6 +8419,7 @@
           <a:lstStyle/>
           <a:p>
             <a:pPr algn="ctr"/>
+            <a:endParaRPr/>
           </a:p>
         </p:txBody>
       </p:sp>
@@ -7634,6 +8464,7 @@
           <a:lstStyle/>
           <a:p>
             <a:pPr algn="ctr"/>
+            <a:endParaRPr/>
           </a:p>
         </p:txBody>
       </p:sp>
@@ -7678,6 +8509,7 @@
           <a:lstStyle/>
           <a:p>
             <a:pPr algn="ctr"/>
+            <a:endParaRPr/>
           </a:p>
         </p:txBody>
       </p:sp>
@@ -7722,6 +8554,7 @@
           <a:lstStyle/>
           <a:p>
             <a:pPr algn="ctr"/>
+            <a:endParaRPr/>
           </a:p>
         </p:txBody>
       </p:sp>
@@ -7766,6 +8599,7 @@
           <a:lstStyle/>
           <a:p>
             <a:pPr algn="ctr"/>
+            <a:endParaRPr/>
           </a:p>
         </p:txBody>
       </p:sp>
@@ -7810,6 +8644,7 @@
           <a:lstStyle/>
           <a:p>
             <a:pPr algn="ctr"/>
+            <a:endParaRPr/>
           </a:p>
         </p:txBody>
       </p:sp>
@@ -7854,6 +8689,7 @@
           <a:lstStyle/>
           <a:p>
             <a:pPr algn="ctr"/>
+            <a:endParaRPr/>
           </a:p>
         </p:txBody>
       </p:sp>
@@ -7898,6 +8734,7 @@
           <a:lstStyle/>
           <a:p>
             <a:pPr algn="ctr"/>
+            <a:endParaRPr/>
           </a:p>
         </p:txBody>
       </p:sp>
@@ -7942,6 +8779,7 @@
           <a:lstStyle/>
           <a:p>
             <a:pPr algn="ctr"/>
+            <a:endParaRPr/>
           </a:p>
         </p:txBody>
       </p:sp>
@@ -7986,6 +8824,7 @@
           <a:lstStyle/>
           <a:p>
             <a:pPr algn="ctr"/>
+            <a:endParaRPr/>
           </a:p>
         </p:txBody>
       </p:sp>
@@ -8030,6 +8869,7 @@
           <a:lstStyle/>
           <a:p>
             <a:pPr algn="ctr"/>
+            <a:endParaRPr/>
           </a:p>
         </p:txBody>
       </p:sp>
@@ -8074,6 +8914,7 @@
           <a:lstStyle/>
           <a:p>
             <a:pPr algn="ctr"/>
+            <a:endParaRPr/>
           </a:p>
         </p:txBody>
       </p:sp>
@@ -8118,6 +8959,7 @@
           <a:lstStyle/>
           <a:p>
             <a:pPr algn="ctr"/>
+            <a:endParaRPr/>
           </a:p>
         </p:txBody>
       </p:sp>
@@ -8138,7 +8980,7 @@
           <a:noFill/>
         </p:spPr>
         <p:txBody>
-          <a:bodyPr wrap="square" anchor="t" lIns="0" rIns="0" tIns="0" bIns="0">
+          <a:bodyPr wrap="square" lIns="0" tIns="0" rIns="0" bIns="0" anchor="t">
             <a:spAutoFit/>
           </a:bodyPr>
           <a:lstStyle/>
@@ -8177,7 +9019,7 @@
           <a:noFill/>
         </p:spPr>
         <p:txBody>
-          <a:bodyPr wrap="square" anchor="t" lIns="0" rIns="0" tIns="0" bIns="0">
+          <a:bodyPr wrap="square" lIns="0" tIns="0" rIns="0" bIns="0" anchor="t">
             <a:spAutoFit/>
           </a:bodyPr>
           <a:lstStyle/>
@@ -8242,6 +9084,7 @@
           <a:lstStyle/>
           <a:p>
             <a:pPr algn="ctr"/>
+            <a:endParaRPr/>
           </a:p>
         </p:txBody>
       </p:sp>
@@ -8262,7 +9105,7 @@
           <a:noFill/>
         </p:spPr>
         <p:txBody>
-          <a:bodyPr wrap="square" anchor="t" lIns="0" rIns="0" tIns="0" bIns="0">
+          <a:bodyPr wrap="square" lIns="0" tIns="0" rIns="0" bIns="0" anchor="t">
             <a:spAutoFit/>
           </a:bodyPr>
           <a:lstStyle/>
@@ -8375,6 +9218,7 @@
           <a:lstStyle/>
           <a:p>
             <a:pPr algn="ctr"/>
+            <a:endParaRPr/>
           </a:p>
         </p:txBody>
       </p:sp>
@@ -8395,7 +9239,7 @@
           <a:noFill/>
         </p:spPr>
         <p:txBody>
-          <a:bodyPr wrap="square" anchor="t" lIns="0" rIns="0" tIns="0" bIns="0">
+          <a:bodyPr wrap="square" lIns="0" tIns="0" rIns="0" bIns="0" anchor="t">
             <a:spAutoFit/>
           </a:bodyPr>
           <a:lstStyle/>
@@ -8508,6 +9352,7 @@
           <a:lstStyle/>
           <a:p>
             <a:pPr algn="ctr"/>
+            <a:endParaRPr/>
           </a:p>
         </p:txBody>
       </p:sp>
@@ -8528,7 +9373,7 @@
           <a:noFill/>
         </p:spPr>
         <p:txBody>
-          <a:bodyPr wrap="square" anchor="t" lIns="0" rIns="0" tIns="0" bIns="0">
+          <a:bodyPr wrap="square" lIns="0" tIns="0" rIns="0" bIns="0" anchor="t">
             <a:spAutoFit/>
           </a:bodyPr>
           <a:lstStyle/>
@@ -8539,7 +9384,7 @@
               </a:spcAft>
             </a:pPr>
             <a:r>
-              <a:rPr sz="1050" b="1">
+              <a:rPr sz="1050" b="1" dirty="0">
                 <a:solidFill>
                   <a:srgbClr val="0A4F55"/>
                 </a:solidFill>
@@ -8555,13 +9400,22 @@
               </a:spcAft>
             </a:pPr>
             <a:r>
-              <a:rPr sz="1050" b="0">
-                <a:solidFill>
-                  <a:srgbClr val="46565C"/>
-                </a:solidFill>
-                <a:latin typeface="Segoe UI"/>
-              </a:rPr>
-              <a:t>pgvector vector(1536) · HNSW</a:t>
+              <a:rPr sz="1050" b="0" dirty="0" err="1">
+                <a:solidFill>
+                  <a:srgbClr val="46565C"/>
+                </a:solidFill>
+                <a:latin typeface="Segoe UI"/>
+              </a:rPr>
+              <a:t>pgvector</a:t>
+            </a:r>
+            <a:r>
+              <a:rPr sz="1050" b="0" dirty="0">
+                <a:solidFill>
+                  <a:srgbClr val="46565C"/>
+                </a:solidFill>
+                <a:latin typeface="Segoe UI"/>
+              </a:rPr>
+              <a:t> vector(1536) · HNSW</a:t>
             </a:r>
           </a:p>
           <a:p>
@@ -8571,14 +9425,47 @@
               </a:spcAft>
             </a:pPr>
             <a:r>
-              <a:rPr sz="1050" b="0">
-                <a:solidFill>
-                  <a:srgbClr val="46565C"/>
-                </a:solidFill>
-                <a:latin typeface="Segoe UI"/>
-              </a:rPr>
-              <a:t>RLS cerrando PostgREST</a:t>
-            </a:r>
+              <a:rPr sz="1050" b="0" dirty="0">
+                <a:solidFill>
+                  <a:srgbClr val="46565C"/>
+                </a:solidFill>
+                <a:latin typeface="Segoe UI"/>
+              </a:rPr>
+              <a:t>RLS </a:t>
+            </a:r>
+            <a:r>
+              <a:rPr sz="1050" b="0" dirty="0" err="1">
+                <a:solidFill>
+                  <a:srgbClr val="46565C"/>
+                </a:solidFill>
+                <a:latin typeface="Segoe UI"/>
+              </a:rPr>
+              <a:t>cerrando</a:t>
+            </a:r>
+            <a:r>
+              <a:rPr sz="1050" b="0" dirty="0">
+                <a:solidFill>
+                  <a:srgbClr val="46565C"/>
+                </a:solidFill>
+                <a:latin typeface="Segoe UI"/>
+              </a:rPr>
+              <a:t> </a:t>
+            </a:r>
+            <a:r>
+              <a:rPr sz="1050" b="0" dirty="0" err="1">
+                <a:solidFill>
+                  <a:srgbClr val="46565C"/>
+                </a:solidFill>
+                <a:latin typeface="Segoe UI"/>
+              </a:rPr>
+              <a:t>PostgREST</a:t>
+            </a:r>
+            <a:endParaRPr sz="1050" b="0" dirty="0">
+              <a:solidFill>
+                <a:srgbClr val="46565C"/>
+              </a:solidFill>
+              <a:latin typeface="Segoe UI"/>
+            </a:endParaRPr>
           </a:p>
           <a:p>
             <a:pPr>
@@ -8587,14 +9474,65 @@
               </a:spcAft>
             </a:pPr>
             <a:r>
-              <a:rPr sz="1050" b="0">
-                <a:solidFill>
-                  <a:srgbClr val="46565C"/>
-                </a:solidFill>
-                <a:latin typeface="Segoe UI"/>
-              </a:rPr>
-              <a:t>7 tablas · migraciones idempotentes</a:t>
-            </a:r>
+              <a:rPr sz="1050" b="0" dirty="0">
+                <a:solidFill>
+                  <a:srgbClr val="46565C"/>
+                </a:solidFill>
+                <a:latin typeface="Segoe UI"/>
+              </a:rPr>
+              <a:t>7 </a:t>
+            </a:r>
+            <a:r>
+              <a:rPr sz="1050" b="0" dirty="0" err="1">
+                <a:solidFill>
+                  <a:srgbClr val="46565C"/>
+                </a:solidFill>
+                <a:latin typeface="Segoe UI"/>
+              </a:rPr>
+              <a:t>tablas</a:t>
+            </a:r>
+            <a:r>
+              <a:rPr sz="1050" b="0" dirty="0">
+                <a:solidFill>
+                  <a:srgbClr val="46565C"/>
+                </a:solidFill>
+                <a:latin typeface="Segoe UI"/>
+              </a:rPr>
+              <a:t> · </a:t>
+            </a:r>
+            <a:r>
+              <a:rPr sz="1050" b="0" dirty="0" err="1">
+                <a:solidFill>
+                  <a:srgbClr val="46565C"/>
+                </a:solidFill>
+                <a:latin typeface="Segoe UI"/>
+              </a:rPr>
+              <a:t>migraciones</a:t>
+            </a:r>
+            <a:r>
+              <a:rPr sz="1050" b="0" dirty="0">
+                <a:solidFill>
+                  <a:srgbClr val="46565C"/>
+                </a:solidFill>
+                <a:latin typeface="Segoe UI"/>
+              </a:rPr>
+              <a:t> </a:t>
+            </a:r>
+            <a:r>
+              <a:rPr sz="1050" b="0" dirty="0" err="1">
+                <a:solidFill>
+                  <a:srgbClr val="46565C"/>
+                </a:solidFill>
+                <a:latin typeface="Segoe UI"/>
+              </a:rPr>
+              <a:t>idempotentes</a:t>
+            </a:r>
+            <a:endParaRPr sz="1050" b="0" dirty="0">
+              <a:solidFill>
+                <a:srgbClr val="46565C"/>
+              </a:solidFill>
+              <a:latin typeface="Segoe UI"/>
+            </a:endParaRPr>
           </a:p>
         </p:txBody>
       </p:sp>
@@ -8641,6 +9579,7 @@
           <a:lstStyle/>
           <a:p>
             <a:pPr algn="ctr"/>
+            <a:endParaRPr/>
           </a:p>
         </p:txBody>
       </p:sp>
@@ -8661,7 +9600,7 @@
           <a:noFill/>
         </p:spPr>
         <p:txBody>
-          <a:bodyPr wrap="square" anchor="t" lIns="0" rIns="0" tIns="0" bIns="0">
+          <a:bodyPr wrap="square" lIns="0" tIns="0" rIns="0" bIns="0" anchor="t">
             <a:spAutoFit/>
           </a:bodyPr>
           <a:lstStyle/>
@@ -8774,6 +9713,7 @@
           <a:lstStyle/>
           <a:p>
             <a:pPr algn="ctr"/>
+            <a:endParaRPr/>
           </a:p>
         </p:txBody>
       </p:sp>
@@ -8794,7 +9734,7 @@
           <a:noFill/>
         </p:spPr>
         <p:txBody>
-          <a:bodyPr wrap="square" anchor="t" lIns="0" rIns="0" tIns="0" bIns="0">
+          <a:bodyPr wrap="square" lIns="0" tIns="0" rIns="0" bIns="0" anchor="t">
             <a:spAutoFit/>
           </a:bodyPr>
           <a:lstStyle/>
@@ -8907,6 +9847,7 @@
           <a:lstStyle/>
           <a:p>
             <a:pPr algn="ctr"/>
+            <a:endParaRPr/>
           </a:p>
         </p:txBody>
       </p:sp>
@@ -8927,7 +9868,7 @@
           <a:noFill/>
         </p:spPr>
         <p:txBody>
-          <a:bodyPr wrap="square" anchor="t" lIns="0" rIns="0" tIns="0" bIns="0">
+          <a:bodyPr wrap="square" lIns="0" tIns="0" rIns="0" bIns="0" anchor="t">
             <a:spAutoFit/>
           </a:bodyPr>
           <a:lstStyle/>
@@ -9006,7 +9947,7 @@
         <p:spPr>
           <a:xfrm>
             <a:off x="960120" y="5029200"/>
-            <a:ext cx="10515600" cy="1371600"/>
+            <a:ext cx="10515600" cy="605294"/>
           </a:xfrm>
           <a:prstGeom prst="rect">
             <a:avLst/>
@@ -9014,7 +9955,7 @@
           <a:noFill/>
         </p:spPr>
         <p:txBody>
-          <a:bodyPr wrap="square" anchor="t" lIns="0" rIns="0" tIns="0" bIns="0">
+          <a:bodyPr wrap="square" lIns="0" tIns="0" rIns="0" bIns="0" anchor="t">
             <a:spAutoFit/>
           </a:bodyPr>
           <a:lstStyle/>
@@ -9025,13 +9966,49 @@
               </a:spcAft>
             </a:pPr>
             <a:r>
-              <a:rPr sz="1200" b="1">
+              <a:rPr sz="1200" b="1" dirty="0">
                 <a:solidFill>
                   <a:srgbClr val="101619"/>
                 </a:solidFill>
                 <a:latin typeface="Segoe UI"/>
               </a:rPr>
-              <a:t>Por qué ai/ vive fuera de modules/</a:t>
+              <a:t>Por </a:t>
+            </a:r>
+            <a:r>
+              <a:rPr sz="1200" b="1" dirty="0" err="1">
+                <a:solidFill>
+                  <a:srgbClr val="101619"/>
+                </a:solidFill>
+                <a:latin typeface="Segoe UI"/>
+              </a:rPr>
+              <a:t>qué</a:t>
+            </a:r>
+            <a:r>
+              <a:rPr sz="1200" b="1" dirty="0">
+                <a:solidFill>
+                  <a:srgbClr val="101619"/>
+                </a:solidFill>
+                <a:latin typeface="Segoe UI"/>
+              </a:rPr>
+              <a:t> ai/ </a:t>
+            </a:r>
+            <a:r>
+              <a:rPr sz="1200" b="1" dirty="0" err="1">
+                <a:solidFill>
+                  <a:srgbClr val="101619"/>
+                </a:solidFill>
+                <a:latin typeface="Segoe UI"/>
+              </a:rPr>
+              <a:t>vive</a:t>
+            </a:r>
+            <a:r>
+              <a:rPr sz="1200" b="1" dirty="0">
+                <a:solidFill>
+                  <a:srgbClr val="101619"/>
+                </a:solidFill>
+                <a:latin typeface="Segoe UI"/>
+              </a:rPr>
+              <a:t> fuera de modules/</a:t>
             </a:r>
           </a:p>
           <a:p>
@@ -9041,14 +10018,290 @@
               </a:spcAft>
             </a:pPr>
             <a:r>
-              <a:rPr sz="1200" b="0">
-                <a:solidFill>
-                  <a:srgbClr val="46565C"/>
-                </a:solidFill>
-                <a:latin typeface="Segoe UI"/>
-              </a:rPr>
-              <a:t>El Módulo II necesita retrieval y el III generate_vision. Si esas piezas vivieran dentro de brand_dna/, los módulos siguientes importarían «hacia adentro» de otro módulo — el anti-patrón que obliga a refactorizar. Añadir un módulo es una carpeta, una línea en api.py y una fila en nav.ts.</a:t>
-            </a:r>
+              <a:rPr sz="1200" b="0" dirty="0">
+                <a:solidFill>
+                  <a:srgbClr val="46565C"/>
+                </a:solidFill>
+                <a:latin typeface="Segoe UI"/>
+              </a:rPr>
+              <a:t>El </a:t>
+            </a:r>
+            <a:r>
+              <a:rPr sz="1200" b="0" dirty="0" err="1">
+                <a:solidFill>
+                  <a:srgbClr val="46565C"/>
+                </a:solidFill>
+                <a:latin typeface="Segoe UI"/>
+              </a:rPr>
+              <a:t>Módulo</a:t>
+            </a:r>
+            <a:r>
+              <a:rPr sz="1200" b="0" dirty="0">
+                <a:solidFill>
+                  <a:srgbClr val="46565C"/>
+                </a:solidFill>
+                <a:latin typeface="Segoe UI"/>
+              </a:rPr>
+              <a:t> II </a:t>
+            </a:r>
+            <a:r>
+              <a:rPr sz="1200" b="0" dirty="0" err="1">
+                <a:solidFill>
+                  <a:srgbClr val="46565C"/>
+                </a:solidFill>
+                <a:latin typeface="Segoe UI"/>
+              </a:rPr>
+              <a:t>necesita</a:t>
+            </a:r>
+            <a:r>
+              <a:rPr sz="1200" b="0" dirty="0">
+                <a:solidFill>
+                  <a:srgbClr val="46565C"/>
+                </a:solidFill>
+                <a:latin typeface="Segoe UI"/>
+              </a:rPr>
+              <a:t> retrieval y el III vision. Si </a:t>
+            </a:r>
+            <a:r>
+              <a:rPr sz="1200" b="0" dirty="0" err="1">
+                <a:solidFill>
+                  <a:srgbClr val="46565C"/>
+                </a:solidFill>
+                <a:latin typeface="Segoe UI"/>
+              </a:rPr>
+              <a:t>esas</a:t>
+            </a:r>
+            <a:r>
+              <a:rPr sz="1200" b="0" dirty="0">
+                <a:solidFill>
+                  <a:srgbClr val="46565C"/>
+                </a:solidFill>
+                <a:latin typeface="Segoe UI"/>
+              </a:rPr>
+              <a:t> </a:t>
+            </a:r>
+            <a:r>
+              <a:rPr sz="1200" b="0" dirty="0" err="1">
+                <a:solidFill>
+                  <a:srgbClr val="46565C"/>
+                </a:solidFill>
+                <a:latin typeface="Segoe UI"/>
+              </a:rPr>
+              <a:t>piezas</a:t>
+            </a:r>
+            <a:r>
+              <a:rPr sz="1200" b="0" dirty="0">
+                <a:solidFill>
+                  <a:srgbClr val="46565C"/>
+                </a:solidFill>
+                <a:latin typeface="Segoe UI"/>
+              </a:rPr>
+              <a:t> </a:t>
+            </a:r>
+            <a:r>
+              <a:rPr sz="1200" b="0" dirty="0" err="1">
+                <a:solidFill>
+                  <a:srgbClr val="46565C"/>
+                </a:solidFill>
+                <a:latin typeface="Segoe UI"/>
+              </a:rPr>
+              <a:t>vivieran</a:t>
+            </a:r>
+            <a:r>
+              <a:rPr sz="1200" b="0" dirty="0">
+                <a:solidFill>
+                  <a:srgbClr val="46565C"/>
+                </a:solidFill>
+                <a:latin typeface="Segoe UI"/>
+              </a:rPr>
+              <a:t> </a:t>
+            </a:r>
+            <a:r>
+              <a:rPr sz="1200" b="0" dirty="0" err="1">
+                <a:solidFill>
+                  <a:srgbClr val="46565C"/>
+                </a:solidFill>
+                <a:latin typeface="Segoe UI"/>
+              </a:rPr>
+              <a:t>dentro</a:t>
+            </a:r>
+            <a:r>
+              <a:rPr sz="1200" b="0" dirty="0">
+                <a:solidFill>
+                  <a:srgbClr val="46565C"/>
+                </a:solidFill>
+                <a:latin typeface="Segoe UI"/>
+              </a:rPr>
+              <a:t> de </a:t>
+            </a:r>
+            <a:r>
+              <a:rPr sz="1200" b="0" dirty="0" err="1">
+                <a:solidFill>
+                  <a:srgbClr val="46565C"/>
+                </a:solidFill>
+                <a:latin typeface="Segoe UI"/>
+              </a:rPr>
+              <a:t>brand_dna</a:t>
+            </a:r>
+            <a:r>
+              <a:rPr sz="1200" b="0" dirty="0">
+                <a:solidFill>
+                  <a:srgbClr val="46565C"/>
+                </a:solidFill>
+                <a:latin typeface="Segoe UI"/>
+              </a:rPr>
+              <a:t>/, </a:t>
+            </a:r>
+            <a:r>
+              <a:rPr sz="1200" b="0" dirty="0" err="1">
+                <a:solidFill>
+                  <a:srgbClr val="46565C"/>
+                </a:solidFill>
+                <a:latin typeface="Segoe UI"/>
+              </a:rPr>
+              <a:t>los</a:t>
+            </a:r>
+            <a:r>
+              <a:rPr sz="1200" b="0" dirty="0">
+                <a:solidFill>
+                  <a:srgbClr val="46565C"/>
+                </a:solidFill>
+                <a:latin typeface="Segoe UI"/>
+              </a:rPr>
+              <a:t> </a:t>
+            </a:r>
+            <a:r>
+              <a:rPr sz="1200" b="0" dirty="0" err="1">
+                <a:solidFill>
+                  <a:srgbClr val="46565C"/>
+                </a:solidFill>
+                <a:latin typeface="Segoe UI"/>
+              </a:rPr>
+              <a:t>módulos</a:t>
+            </a:r>
+            <a:r>
+              <a:rPr sz="1200" b="0" dirty="0">
+                <a:solidFill>
+                  <a:srgbClr val="46565C"/>
+                </a:solidFill>
+                <a:latin typeface="Segoe UI"/>
+              </a:rPr>
+              <a:t> </a:t>
+            </a:r>
+            <a:r>
+              <a:rPr sz="1200" b="0" dirty="0" err="1">
+                <a:solidFill>
+                  <a:srgbClr val="46565C"/>
+                </a:solidFill>
+                <a:latin typeface="Segoe UI"/>
+              </a:rPr>
+              <a:t>siguientes</a:t>
+            </a:r>
+            <a:r>
+              <a:rPr sz="1200" b="0" dirty="0">
+                <a:solidFill>
+                  <a:srgbClr val="46565C"/>
+                </a:solidFill>
+                <a:latin typeface="Segoe UI"/>
+              </a:rPr>
+              <a:t> </a:t>
+            </a:r>
+            <a:r>
+              <a:rPr sz="1200" b="0" dirty="0" err="1">
+                <a:solidFill>
+                  <a:srgbClr val="46565C"/>
+                </a:solidFill>
+                <a:latin typeface="Segoe UI"/>
+              </a:rPr>
+              <a:t>importarían</a:t>
+            </a:r>
+            <a:r>
+              <a:rPr sz="1200" b="0" dirty="0">
+                <a:solidFill>
+                  <a:srgbClr val="46565C"/>
+                </a:solidFill>
+                <a:latin typeface="Segoe UI"/>
+              </a:rPr>
+              <a:t> «</a:t>
+            </a:r>
+            <a:r>
+              <a:rPr sz="1200" b="0" dirty="0" err="1">
+                <a:solidFill>
+                  <a:srgbClr val="46565C"/>
+                </a:solidFill>
+                <a:latin typeface="Segoe UI"/>
+              </a:rPr>
+              <a:t>hacia</a:t>
+            </a:r>
+            <a:r>
+              <a:rPr sz="1200" b="0" dirty="0">
+                <a:solidFill>
+                  <a:srgbClr val="46565C"/>
+                </a:solidFill>
+                <a:latin typeface="Segoe UI"/>
+              </a:rPr>
+              <a:t> </a:t>
+            </a:r>
+            <a:r>
+              <a:rPr sz="1200" b="0" dirty="0" err="1">
+                <a:solidFill>
+                  <a:srgbClr val="46565C"/>
+                </a:solidFill>
+                <a:latin typeface="Segoe UI"/>
+              </a:rPr>
+              <a:t>adentro</a:t>
+            </a:r>
+            <a:r>
+              <a:rPr sz="1200" b="0" dirty="0">
+                <a:solidFill>
+                  <a:srgbClr val="46565C"/>
+                </a:solidFill>
+                <a:latin typeface="Segoe UI"/>
+              </a:rPr>
+              <a:t>» de </a:t>
+            </a:r>
+            <a:r>
+              <a:rPr sz="1200" b="0" dirty="0" err="1">
+                <a:solidFill>
+                  <a:srgbClr val="46565C"/>
+                </a:solidFill>
+                <a:latin typeface="Segoe UI"/>
+              </a:rPr>
+              <a:t>otro</a:t>
+            </a:r>
+            <a:r>
+              <a:rPr sz="1200" b="0" dirty="0">
+                <a:solidFill>
+                  <a:srgbClr val="46565C"/>
+                </a:solidFill>
+                <a:latin typeface="Segoe UI"/>
+              </a:rPr>
+              <a:t> </a:t>
+            </a:r>
+            <a:r>
+              <a:rPr sz="1200" b="0" dirty="0" err="1">
+                <a:solidFill>
+                  <a:srgbClr val="46565C"/>
+                </a:solidFill>
+                <a:latin typeface="Segoe UI"/>
+              </a:rPr>
+              <a:t>módulo</a:t>
+            </a:r>
+            <a:r>
+              <a:rPr lang="es-PE" sz="1200" b="0" dirty="0">
+                <a:solidFill>
+                  <a:srgbClr val="46565C"/>
+                </a:solidFill>
+                <a:latin typeface="Segoe UI"/>
+              </a:rPr>
+              <a:t>.</a:t>
+            </a:r>
+            <a:endParaRPr sz="1200" b="0" dirty="0">
+              <a:solidFill>
+                <a:srgbClr val="46565C"/>
+              </a:solidFill>
+              <a:latin typeface="Segoe UI"/>
+            </a:endParaRPr>
           </a:p>
         </p:txBody>
       </p:sp>
@@ -9061,7 +10314,7 @@
 </file>
 
 <file path=ppt/slides/slide4.xml><?xml version="1.0" encoding="utf-8"?>
-<p:sld xmlns:a="http://schemas.openxmlformats.org/drawingml/2006/main" xmlns:p="http://schemas.openxmlformats.org/presentationml/2006/main" xmlns:r="http://schemas.openxmlformats.org/officeDocument/2006/relationships">
+<p:sld xmlns:a="http://schemas.openxmlformats.org/drawingml/2006/main" xmlns:r="http://schemas.openxmlformats.org/officeDocument/2006/relationships" xmlns:p="http://schemas.openxmlformats.org/presentationml/2006/main">
   <p:cSld>
     <p:bg>
       <p:bgPr>
@@ -9077,7 +10330,14 @@
         <p:cNvGrpSpPr/>
         <p:nvPr/>
       </p:nvGrpSpPr>
-      <p:grpSpPr/>
+      <p:grpSpPr>
+        <a:xfrm>
+          <a:off x="0" y="0"/>
+          <a:ext cx="0" cy="0"/>
+          <a:chOff x="0" y="0"/>
+          <a:chExt cx="0" cy="0"/>
+        </a:xfrm>
+      </p:grpSpPr>
       <p:sp>
         <p:nvSpPr>
           <p:cNvPr id="2" name="Rectangle 1"/>
@@ -9119,6 +10379,7 @@
           <a:lstStyle/>
           <a:p>
             <a:pPr algn="ctr"/>
+            <a:endParaRPr/>
           </a:p>
         </p:txBody>
       </p:sp>
@@ -9139,7 +10400,7 @@
           <a:noFill/>
         </p:spPr>
         <p:txBody>
-          <a:bodyPr wrap="square" anchor="t" lIns="0" rIns="0" tIns="0" bIns="0">
+          <a:bodyPr wrap="square" lIns="0" tIns="0" rIns="0" bIns="0" anchor="t">
             <a:spAutoFit/>
           </a:bodyPr>
           <a:lstStyle/>
@@ -9202,6 +10463,7 @@
           <a:lstStyle/>
           <a:p>
             <a:pPr algn="ctr"/>
+            <a:endParaRPr/>
           </a:p>
         </p:txBody>
       </p:sp>
@@ -9246,6 +10508,7 @@
           <a:lstStyle/>
           <a:p>
             <a:pPr algn="ctr"/>
+            <a:endParaRPr/>
           </a:p>
         </p:txBody>
       </p:sp>
@@ -9290,6 +10553,7 @@
           <a:lstStyle/>
           <a:p>
             <a:pPr algn="ctr"/>
+            <a:endParaRPr/>
           </a:p>
         </p:txBody>
       </p:sp>
@@ -9334,6 +10598,7 @@
           <a:lstStyle/>
           <a:p>
             <a:pPr algn="ctr"/>
+            <a:endParaRPr/>
           </a:p>
         </p:txBody>
       </p:sp>
@@ -9378,6 +10643,7 @@
           <a:lstStyle/>
           <a:p>
             <a:pPr algn="ctr"/>
+            <a:endParaRPr/>
           </a:p>
         </p:txBody>
       </p:sp>
@@ -9422,6 +10688,7 @@
           <a:lstStyle/>
           <a:p>
             <a:pPr algn="ctr"/>
+            <a:endParaRPr/>
           </a:p>
         </p:txBody>
       </p:sp>
@@ -9466,6 +10733,7 @@
           <a:lstStyle/>
           <a:p>
             <a:pPr algn="ctr"/>
+            <a:endParaRPr/>
           </a:p>
         </p:txBody>
       </p:sp>
@@ -9510,6 +10778,7 @@
           <a:lstStyle/>
           <a:p>
             <a:pPr algn="ctr"/>
+            <a:endParaRPr/>
           </a:p>
         </p:txBody>
       </p:sp>
@@ -9554,6 +10823,7 @@
           <a:lstStyle/>
           <a:p>
             <a:pPr algn="ctr"/>
+            <a:endParaRPr/>
           </a:p>
         </p:txBody>
       </p:sp>
@@ -9598,6 +10868,7 @@
           <a:lstStyle/>
           <a:p>
             <a:pPr algn="ctr"/>
+            <a:endParaRPr/>
           </a:p>
         </p:txBody>
       </p:sp>
@@ -9642,6 +10913,7 @@
           <a:lstStyle/>
           <a:p>
             <a:pPr algn="ctr"/>
+            <a:endParaRPr/>
           </a:p>
         </p:txBody>
       </p:sp>
@@ -9686,6 +10958,7 @@
           <a:lstStyle/>
           <a:p>
             <a:pPr algn="ctr"/>
+            <a:endParaRPr/>
           </a:p>
         </p:txBody>
       </p:sp>
@@ -9730,6 +11003,7 @@
           <a:lstStyle/>
           <a:p>
             <a:pPr algn="ctr"/>
+            <a:endParaRPr/>
           </a:p>
         </p:txBody>
       </p:sp>
@@ -9774,6 +11048,7 @@
           <a:lstStyle/>
           <a:p>
             <a:pPr algn="ctr"/>
+            <a:endParaRPr/>
           </a:p>
         </p:txBody>
       </p:sp>
@@ -9818,6 +11093,7 @@
           <a:lstStyle/>
           <a:p>
             <a:pPr algn="ctr"/>
+            <a:endParaRPr/>
           </a:p>
         </p:txBody>
       </p:sp>
@@ -9862,6 +11138,7 @@
           <a:lstStyle/>
           <a:p>
             <a:pPr algn="ctr"/>
+            <a:endParaRPr/>
           </a:p>
         </p:txBody>
       </p:sp>
@@ -9906,6 +11183,7 @@
           <a:lstStyle/>
           <a:p>
             <a:pPr algn="ctr"/>
+            <a:endParaRPr/>
           </a:p>
         </p:txBody>
       </p:sp>
@@ -9950,6 +11228,7 @@
           <a:lstStyle/>
           <a:p>
             <a:pPr algn="ctr"/>
+            <a:endParaRPr/>
           </a:p>
         </p:txBody>
       </p:sp>
@@ -9994,6 +11273,7 @@
           <a:lstStyle/>
           <a:p>
             <a:pPr algn="ctr"/>
+            <a:endParaRPr/>
           </a:p>
         </p:txBody>
       </p:sp>
@@ -10038,6 +11318,7 @@
           <a:lstStyle/>
           <a:p>
             <a:pPr algn="ctr"/>
+            <a:endParaRPr/>
           </a:p>
         </p:txBody>
       </p:sp>
@@ -10082,6 +11363,7 @@
           <a:lstStyle/>
           <a:p>
             <a:pPr algn="ctr"/>
+            <a:endParaRPr/>
           </a:p>
         </p:txBody>
       </p:sp>
@@ -10126,6 +11408,7 @@
           <a:lstStyle/>
           <a:p>
             <a:pPr algn="ctr"/>
+            <a:endParaRPr/>
           </a:p>
         </p:txBody>
       </p:sp>
@@ -10170,6 +11453,7 @@
           <a:lstStyle/>
           <a:p>
             <a:pPr algn="ctr"/>
+            <a:endParaRPr/>
           </a:p>
         </p:txBody>
       </p:sp>
@@ -10214,6 +11498,7 @@
           <a:lstStyle/>
           <a:p>
             <a:pPr algn="ctr"/>
+            <a:endParaRPr/>
           </a:p>
         </p:txBody>
       </p:sp>
@@ -10258,6 +11543,7 @@
           <a:lstStyle/>
           <a:p>
             <a:pPr algn="ctr"/>
+            <a:endParaRPr/>
           </a:p>
         </p:txBody>
       </p:sp>
@@ -10302,6 +11588,7 @@
           <a:lstStyle/>
           <a:p>
             <a:pPr algn="ctr"/>
+            <a:endParaRPr/>
           </a:p>
         </p:txBody>
       </p:sp>
@@ -10322,7 +11609,7 @@
           <a:noFill/>
         </p:spPr>
         <p:txBody>
-          <a:bodyPr wrap="square" anchor="t" lIns="0" rIns="0" tIns="0" bIns="0">
+          <a:bodyPr wrap="square" lIns="0" tIns="0" rIns="0" bIns="0" anchor="t">
             <a:spAutoFit/>
           </a:bodyPr>
           <a:lstStyle/>
@@ -10361,7 +11648,7 @@
           <a:noFill/>
         </p:spPr>
         <p:txBody>
-          <a:bodyPr wrap="square" anchor="t" lIns="0" rIns="0" tIns="0" bIns="0">
+          <a:bodyPr wrap="square" lIns="0" tIns="0" rIns="0" bIns="0" anchor="t">
             <a:spAutoFit/>
           </a:bodyPr>
           <a:lstStyle/>
@@ -10372,13 +11659,103 @@
               </a:spcAft>
             </a:pPr>
             <a:r>
-              <a:rPr sz="3000" b="1">
+              <a:rPr sz="3000" b="1" dirty="0">
                 <a:solidFill>
                   <a:srgbClr val="101619"/>
                 </a:solidFill>
                 <a:latin typeface="Segoe UI"/>
               </a:rPr>
-              <a:t>El recorrido, y qué mirar en cada paso</a:t>
+              <a:t>El </a:t>
+            </a:r>
+            <a:r>
+              <a:rPr sz="3000" b="1" dirty="0" err="1">
+                <a:solidFill>
+                  <a:srgbClr val="101619"/>
+                </a:solidFill>
+                <a:latin typeface="Segoe UI"/>
+              </a:rPr>
+              <a:t>recorrido</a:t>
+            </a:r>
+            <a:r>
+              <a:rPr sz="3000" b="1" dirty="0">
+                <a:solidFill>
+                  <a:srgbClr val="101619"/>
+                </a:solidFill>
+                <a:latin typeface="Segoe UI"/>
+              </a:rPr>
+              <a:t>, y </a:t>
+            </a:r>
+            <a:r>
+              <a:rPr sz="3000" b="1" dirty="0" err="1">
+                <a:solidFill>
+                  <a:srgbClr val="101619"/>
+                </a:solidFill>
+                <a:latin typeface="Segoe UI"/>
+              </a:rPr>
+              <a:t>qué</a:t>
+            </a:r>
+            <a:r>
+              <a:rPr sz="3000" b="1" dirty="0">
+                <a:solidFill>
+                  <a:srgbClr val="101619"/>
+                </a:solidFill>
+                <a:latin typeface="Segoe UI"/>
+              </a:rPr>
+              <a:t> </a:t>
+            </a:r>
+            <a:r>
+              <a:rPr sz="3000" b="1" dirty="0" err="1">
+                <a:solidFill>
+                  <a:srgbClr val="101619"/>
+                </a:solidFill>
+                <a:latin typeface="Segoe UI"/>
+              </a:rPr>
+              <a:t>mirar</a:t>
+            </a:r>
+            <a:r>
+              <a:rPr sz="3000" b="1" dirty="0">
+                <a:solidFill>
+                  <a:srgbClr val="101619"/>
+                </a:solidFill>
+                <a:latin typeface="Segoe UI"/>
+              </a:rPr>
+              <a:t> </a:t>
+            </a:r>
+            <a:r>
+              <a:rPr sz="3000" b="1" dirty="0" err="1">
+                <a:solidFill>
+                  <a:srgbClr val="101619"/>
+                </a:solidFill>
+                <a:latin typeface="Segoe UI"/>
+              </a:rPr>
+              <a:t>en</a:t>
+            </a:r>
+            <a:r>
+              <a:rPr sz="3000" b="1" dirty="0">
+                <a:solidFill>
+                  <a:srgbClr val="101619"/>
+                </a:solidFill>
+                <a:latin typeface="Segoe UI"/>
+              </a:rPr>
+              <a:t> </a:t>
+            </a:r>
+            <a:r>
+              <a:rPr sz="3000" b="1" dirty="0" err="1">
+                <a:solidFill>
+                  <a:srgbClr val="101619"/>
+                </a:solidFill>
+                <a:latin typeface="Segoe UI"/>
+              </a:rPr>
+              <a:t>cada</a:t>
+            </a:r>
+            <a:r>
+              <a:rPr sz="3000" b="1" dirty="0">
+                <a:solidFill>
+                  <a:srgbClr val="101619"/>
+                </a:solidFill>
+                <a:latin typeface="Segoe UI"/>
+              </a:rPr>
+              <a:t> paso</a:t>
             </a:r>
           </a:p>
         </p:txBody>
@@ -10426,6 +11803,7 @@
           <a:lstStyle/>
           <a:p>
             <a:pPr algn="ctr"/>
+            <a:endParaRPr/>
           </a:p>
         </p:txBody>
       </p:sp>
@@ -10446,7 +11824,7 @@
           <a:noFill/>
         </p:spPr>
         <p:txBody>
-          <a:bodyPr wrap="square" anchor="t" lIns="0" rIns="0" tIns="0" bIns="0">
+          <a:bodyPr wrap="square" lIns="0" tIns="0" rIns="0" bIns="0" anchor="t">
             <a:spAutoFit/>
           </a:bodyPr>
           <a:lstStyle/>
@@ -10457,13 +11835,49 @@
               </a:spcAft>
             </a:pPr>
             <a:r>
-              <a:rPr sz="1300" b="1">
+              <a:rPr sz="1300" b="1" dirty="0">
                 <a:solidFill>
                   <a:srgbClr val="101619"/>
                 </a:solidFill>
                 <a:latin typeface="Segoe UI"/>
               </a:rPr>
-              <a:t>1 · Creador abre un manual</a:t>
+              <a:t>1 · </a:t>
+            </a:r>
+            <a:r>
+              <a:rPr sz="1300" b="1" dirty="0" err="1">
+                <a:solidFill>
+                  <a:srgbClr val="101619"/>
+                </a:solidFill>
+                <a:latin typeface="Segoe UI"/>
+              </a:rPr>
+              <a:t>Creador</a:t>
+            </a:r>
+            <a:r>
+              <a:rPr sz="1300" b="1" dirty="0">
+                <a:solidFill>
+                  <a:srgbClr val="101619"/>
+                </a:solidFill>
+                <a:latin typeface="Segoe UI"/>
+              </a:rPr>
+              <a:t> </a:t>
+            </a:r>
+            <a:r>
+              <a:rPr sz="1300" b="1" dirty="0" err="1">
+                <a:solidFill>
+                  <a:srgbClr val="101619"/>
+                </a:solidFill>
+                <a:latin typeface="Segoe UI"/>
+              </a:rPr>
+              <a:t>abre</a:t>
+            </a:r>
+            <a:r>
+              <a:rPr sz="1300" b="1" dirty="0">
+                <a:solidFill>
+                  <a:srgbClr val="101619"/>
+                </a:solidFill>
+                <a:latin typeface="Segoe UI"/>
+              </a:rPr>
+              <a:t> un manual</a:t>
             </a:r>
           </a:p>
           <a:p>
@@ -10473,13 +11887,94 @@
               </a:spcAft>
             </a:pPr>
             <a:r>
-              <a:rPr sz="1100" b="0">
-                <a:solidFill>
-                  <a:srgbClr val="46565C"/>
-                </a:solidFill>
-                <a:latin typeface="Segoe UI"/>
-              </a:rPr>
-              <a:t>Espectro de voz, léxico con chips rojos/verdes,</a:t>
+              <a:rPr sz="1100" b="0" dirty="0" err="1">
+                <a:solidFill>
+                  <a:srgbClr val="46565C"/>
+                </a:solidFill>
+                <a:latin typeface="Segoe UI"/>
+              </a:rPr>
+              <a:t>Espectro</a:t>
+            </a:r>
+            <a:r>
+              <a:rPr sz="1100" b="0" dirty="0">
+                <a:solidFill>
+                  <a:srgbClr val="46565C"/>
+                </a:solidFill>
+                <a:latin typeface="Segoe UI"/>
+              </a:rPr>
+              <a:t> de </a:t>
+            </a:r>
+            <a:r>
+              <a:rPr sz="1100" b="0" dirty="0" err="1">
+                <a:solidFill>
+                  <a:srgbClr val="46565C"/>
+                </a:solidFill>
+                <a:latin typeface="Segoe UI"/>
+              </a:rPr>
+              <a:t>voz</a:t>
+            </a:r>
+            <a:r>
+              <a:rPr sz="1100" b="0" dirty="0">
+                <a:solidFill>
+                  <a:srgbClr val="46565C"/>
+                </a:solidFill>
+                <a:latin typeface="Segoe UI"/>
+              </a:rPr>
+              <a:t>, </a:t>
+            </a:r>
+            <a:r>
+              <a:rPr sz="1100" b="0" dirty="0" err="1">
+                <a:solidFill>
+                  <a:srgbClr val="46565C"/>
+                </a:solidFill>
+                <a:latin typeface="Segoe UI"/>
+              </a:rPr>
+              <a:t>léxico</a:t>
+            </a:r>
+            <a:r>
+              <a:rPr sz="1100" b="0" dirty="0">
+                <a:solidFill>
+                  <a:srgbClr val="46565C"/>
+                </a:solidFill>
+                <a:latin typeface="Segoe UI"/>
+              </a:rPr>
+              <a:t> con chips </a:t>
+            </a:r>
+            <a:r>
+              <a:rPr sz="1100" b="0" dirty="0" err="1">
+                <a:solidFill>
+                  <a:srgbClr val="46565C"/>
+                </a:solidFill>
+                <a:latin typeface="Segoe UI"/>
+              </a:rPr>
+              <a:t>rojos</a:t>
+            </a:r>
+            <a:r>
+              <a:rPr sz="1100" b="0" dirty="0">
+                <a:solidFill>
+                  <a:srgbClr val="46565C"/>
+                </a:solidFill>
+                <a:latin typeface="Segoe UI"/>
+              </a:rPr>
+              <a:t>/</a:t>
+            </a:r>
+            <a:r>
+              <a:rPr sz="1100" b="0" dirty="0" err="1">
+                <a:solidFill>
+                  <a:srgbClr val="46565C"/>
+                </a:solidFill>
+                <a:latin typeface="Segoe UI"/>
+              </a:rPr>
+              <a:t>verdes</a:t>
+            </a:r>
+            <a:r>
+              <a:rPr sz="1100" b="0" dirty="0">
+                <a:solidFill>
+                  <a:srgbClr val="46565C"/>
+                </a:solidFill>
+                <a:latin typeface="Segoe UI"/>
+              </a:rPr>
+              <a:t>,</a:t>
             </a:r>
           </a:p>
           <a:p>
@@ -10489,13 +11984,85 @@
               </a:spcAft>
             </a:pPr>
             <a:r>
-              <a:rPr sz="1100" b="0">
-                <a:solidFill>
-                  <a:srgbClr val="46565C"/>
-                </a:solidFill>
-                <a:latin typeface="Segoe UI"/>
-              </a:rPr>
-              <a:t>paleta con contraste WCAG calculado en cliente.</a:t>
+              <a:rPr sz="1100" b="0" dirty="0">
+                <a:solidFill>
+                  <a:srgbClr val="46565C"/>
+                </a:solidFill>
+                <a:latin typeface="Segoe UI"/>
+              </a:rPr>
+              <a:t>paleta con </a:t>
+            </a:r>
+            <a:r>
+              <a:rPr sz="1100" b="0" dirty="0" err="1">
+                <a:solidFill>
+                  <a:srgbClr val="46565C"/>
+                </a:solidFill>
+                <a:latin typeface="Segoe UI"/>
+              </a:rPr>
+              <a:t>contraste</a:t>
+            </a:r>
+            <a:r>
+              <a:rPr sz="1100" b="0" dirty="0">
+                <a:solidFill>
+                  <a:srgbClr val="46565C"/>
+                </a:solidFill>
+                <a:latin typeface="Segoe UI"/>
+              </a:rPr>
+              <a:t> WCAG </a:t>
+            </a:r>
+            <a:r>
+              <a:rPr sz="1100" b="0" dirty="0" err="1">
+                <a:solidFill>
+                  <a:srgbClr val="46565C"/>
+                </a:solidFill>
+                <a:latin typeface="Segoe UI"/>
+              </a:rPr>
+              <a:t>calculado</a:t>
+            </a:r>
+            <a:r>
+              <a:rPr sz="1100" b="0" dirty="0">
+                <a:solidFill>
+                  <a:srgbClr val="46565C"/>
+                </a:solidFill>
+                <a:latin typeface="Segoe UI"/>
+              </a:rPr>
+              <a:t> </a:t>
+            </a:r>
+            <a:r>
+              <a:rPr sz="1100" b="0" dirty="0" err="1">
+                <a:solidFill>
+                  <a:srgbClr val="46565C"/>
+                </a:solidFill>
+                <a:latin typeface="Segoe UI"/>
+              </a:rPr>
+              <a:t>en</a:t>
+            </a:r>
+            <a:r>
+              <a:rPr sz="1100" b="0" dirty="0">
+                <a:solidFill>
+                  <a:srgbClr val="46565C"/>
+                </a:solidFill>
+                <a:latin typeface="Segoe UI"/>
+              </a:rPr>
+              <a:t> </a:t>
+            </a:r>
+            <a:r>
+              <a:rPr sz="1100" b="0" dirty="0" err="1">
+                <a:solidFill>
+                  <a:srgbClr val="46565C"/>
+                </a:solidFill>
+                <a:latin typeface="Segoe UI"/>
+              </a:rPr>
+              <a:t>cliente</a:t>
+            </a:r>
+            <a:r>
+              <a:rPr sz="1100" b="0" dirty="0">
+                <a:solidFill>
+                  <a:srgbClr val="46565C"/>
+                </a:solidFill>
+                <a:latin typeface="Segoe UI"/>
+              </a:rPr>
+              <a:t>.</a:t>
             </a:r>
           </a:p>
           <a:p>
@@ -10505,13 +12072,103 @@
               </a:spcAft>
             </a:pPr>
             <a:r>
-              <a:rPr sz="1100" b="0">
-                <a:solidFill>
-                  <a:srgbClr val="46565C"/>
-                </a:solidFill>
-                <a:latin typeface="Segoe UI"/>
-              </a:rPr>
-              <a:t>Mirar: cada regla lleva su check_hint.</a:t>
+              <a:rPr sz="1100" b="0" dirty="0">
+                <a:solidFill>
+                  <a:srgbClr val="46565C"/>
+                </a:solidFill>
+                <a:latin typeface="Segoe UI"/>
+              </a:rPr>
+              <a:t>Mirar: </a:t>
+            </a:r>
+            <a:r>
+              <a:rPr sz="1100" b="0" dirty="0" err="1">
+                <a:solidFill>
+                  <a:srgbClr val="46565C"/>
+                </a:solidFill>
+                <a:latin typeface="Segoe UI"/>
+              </a:rPr>
+              <a:t>cada</a:t>
+            </a:r>
+            <a:r>
+              <a:rPr sz="1100" b="0" dirty="0">
+                <a:solidFill>
+                  <a:srgbClr val="46565C"/>
+                </a:solidFill>
+                <a:latin typeface="Segoe UI"/>
+              </a:rPr>
+              <a:t> </a:t>
+            </a:r>
+            <a:r>
+              <a:rPr sz="1100" b="0" dirty="0" err="1">
+                <a:solidFill>
+                  <a:srgbClr val="46565C"/>
+                </a:solidFill>
+                <a:latin typeface="Segoe UI"/>
+              </a:rPr>
+              <a:t>regla</a:t>
+            </a:r>
+            <a:r>
+              <a:rPr sz="1100" b="0" dirty="0">
+                <a:solidFill>
+                  <a:srgbClr val="46565C"/>
+                </a:solidFill>
+                <a:latin typeface="Segoe UI"/>
+              </a:rPr>
+              <a:t> </a:t>
+            </a:r>
+            <a:r>
+              <a:rPr sz="1100" b="0" dirty="0" err="1">
+                <a:solidFill>
+                  <a:srgbClr val="46565C"/>
+                </a:solidFill>
+                <a:latin typeface="Segoe UI"/>
+              </a:rPr>
+              <a:t>lleva</a:t>
+            </a:r>
+            <a:r>
+              <a:rPr sz="1100" b="0" dirty="0">
+                <a:solidFill>
+                  <a:srgbClr val="46565C"/>
+                </a:solidFill>
+                <a:latin typeface="Segoe UI"/>
+              </a:rPr>
+              <a:t> </a:t>
+            </a:r>
+            <a:r>
+              <a:rPr sz="1100" b="0" dirty="0" err="1">
+                <a:solidFill>
+                  <a:srgbClr val="46565C"/>
+                </a:solidFill>
+                <a:latin typeface="Segoe UI"/>
+              </a:rPr>
+              <a:t>su</a:t>
+            </a:r>
+            <a:r>
+              <a:rPr sz="1100" b="0" dirty="0">
+                <a:solidFill>
+                  <a:srgbClr val="46565C"/>
+                </a:solidFill>
+                <a:latin typeface="Segoe UI"/>
+              </a:rPr>
+              <a:t> </a:t>
+            </a:r>
+            <a:r>
+              <a:rPr sz="1100" b="0" dirty="0" err="1">
+                <a:solidFill>
+                  <a:srgbClr val="46565C"/>
+                </a:solidFill>
+                <a:latin typeface="Segoe UI"/>
+              </a:rPr>
+              <a:t>check_hint</a:t>
+            </a:r>
+            <a:r>
+              <a:rPr sz="1100" b="0" dirty="0">
+                <a:solidFill>
+                  <a:srgbClr val="46565C"/>
+                </a:solidFill>
+                <a:latin typeface="Segoe UI"/>
+              </a:rPr>
+              <a:t>.</a:t>
             </a:r>
           </a:p>
         </p:txBody>
@@ -10559,6 +12216,7 @@
           <a:lstStyle/>
           <a:p>
             <a:pPr algn="ctr"/>
+            <a:endParaRPr/>
           </a:p>
         </p:txBody>
       </p:sp>
@@ -10579,7 +12237,7 @@
           <a:noFill/>
         </p:spPr>
         <p:txBody>
-          <a:bodyPr wrap="square" anchor="t" lIns="0" rIns="0" tIns="0" bIns="0">
+          <a:bodyPr wrap="square" lIns="0" tIns="0" rIns="0" bIns="0" anchor="t">
             <a:spAutoFit/>
           </a:bodyPr>
           <a:lstStyle/>
@@ -10692,6 +12350,7 @@
           <a:lstStyle/>
           <a:p>
             <a:pPr algn="ctr"/>
+            <a:endParaRPr/>
           </a:p>
         </p:txBody>
       </p:sp>
@@ -10712,7 +12371,7 @@
           <a:noFill/>
         </p:spPr>
         <p:txBody>
-          <a:bodyPr wrap="square" anchor="t" lIns="0" rIns="0" tIns="0" bIns="0">
+          <a:bodyPr wrap="square" lIns="0" tIns="0" rIns="0" bIns="0" anchor="t">
             <a:spAutoFit/>
           </a:bodyPr>
           <a:lstStyle/>
@@ -10825,6 +12484,7 @@
           <a:lstStyle/>
           <a:p>
             <a:pPr algn="ctr"/>
+            <a:endParaRPr/>
           </a:p>
         </p:txBody>
       </p:sp>
@@ -10845,7 +12505,7 @@
           <a:noFill/>
         </p:spPr>
         <p:txBody>
-          <a:bodyPr wrap="square" anchor="t" lIns="0" rIns="0" tIns="0" bIns="0">
+          <a:bodyPr wrap="square" lIns="0" tIns="0" rIns="0" bIns="0" anchor="t">
             <a:spAutoFit/>
           </a:bodyPr>
           <a:lstStyle/>
@@ -10958,6 +12618,7 @@
           <a:lstStyle/>
           <a:p>
             <a:pPr algn="ctr"/>
+            <a:endParaRPr/>
           </a:p>
         </p:txBody>
       </p:sp>
@@ -10978,7 +12639,7 @@
           <a:noFill/>
         </p:spPr>
         <p:txBody>
-          <a:bodyPr wrap="square" anchor="t" lIns="0" rIns="0" tIns="0" bIns="0">
+          <a:bodyPr wrap="square" lIns="0" tIns="0" rIns="0" bIns="0" anchor="t">
             <a:spAutoFit/>
           </a:bodyPr>
           <a:lstStyle/>
@@ -11028,139 +12689,6 @@
                 <a:latin typeface="Segoe UI"/>
               </a:rPr>
               <a:t>recuperado, prompt enviado y latencias.</a:t>
-            </a:r>
-          </a:p>
-        </p:txBody>
-      </p:sp>
-      <p:sp>
-        <p:nvSpPr>
-          <p:cNvPr id="42" name="Rectangle 41"/>
-          <p:cNvSpPr/>
-          <p:nvPr/>
-        </p:nvSpPr>
-        <p:spPr>
-          <a:xfrm>
-            <a:off x="8092440" y="3374136"/>
-            <a:ext cx="3383280" cy="1481328"/>
-          </a:xfrm>
-          <a:prstGeom prst="rect">
-            <a:avLst/>
-          </a:prstGeom>
-          <a:solidFill>
-            <a:srgbClr val="F2F5F6"/>
-          </a:solidFill>
-          <a:ln w="9525">
-            <a:solidFill>
-              <a:srgbClr val="D2DBDE"/>
-            </a:solidFill>
-          </a:ln>
-          <a:effectLst/>
-        </p:spPr>
-        <p:style>
-          <a:lnRef idx="1">
-            <a:schemeClr val="accent1"/>
-          </a:lnRef>
-          <a:fillRef idx="3">
-            <a:schemeClr val="accent1"/>
-          </a:fillRef>
-          <a:effectRef idx="2">
-            <a:schemeClr val="accent1"/>
-          </a:effectRef>
-          <a:fontRef idx="minor">
-            <a:schemeClr val="lt1"/>
-          </a:fontRef>
-        </p:style>
-        <p:txBody>
-          <a:bodyPr rtlCol="0" anchor="ctr"/>
-          <a:lstStyle/>
-          <a:p>
-            <a:pPr algn="ctr"/>
-          </a:p>
-        </p:txBody>
-      </p:sp>
-      <p:sp>
-        <p:nvSpPr>
-          <p:cNvPr id="43" name="TextBox 42"/>
-          <p:cNvSpPr txBox="1"/>
-          <p:nvPr/>
-        </p:nvSpPr>
-        <p:spPr>
-          <a:xfrm>
-            <a:off x="8257032" y="3502152"/>
-            <a:ext cx="3054096" cy="1225296"/>
-          </a:xfrm>
-          <a:prstGeom prst="rect">
-            <a:avLst/>
-          </a:prstGeom>
-          <a:noFill/>
-        </p:spPr>
-        <p:txBody>
-          <a:bodyPr wrap="square" anchor="t" lIns="0" rIns="0" tIns="0" bIns="0">
-            <a:spAutoFit/>
-          </a:bodyPr>
-          <a:lstStyle/>
-          <a:p>
-            <a:pPr algn="l">
-              <a:spcAft>
-                <a:spcPts val="400"/>
-              </a:spcAft>
-            </a:pPr>
-            <a:r>
-              <a:rPr sz="1300" b="1">
-                <a:solidFill>
-                  <a:srgbClr val="101619"/>
-                </a:solidFill>
-                <a:latin typeface="Segoe UI"/>
-              </a:rPr>
-              <a:t>Prueba de gobernanza en vivo</a:t>
-            </a:r>
-          </a:p>
-          <a:p>
-            <a:pPr>
-              <a:spcAft>
-                <a:spcPts val="400"/>
-              </a:spcAft>
-            </a:pPr>
-            <a:r>
-              <a:rPr sz="1100" b="0">
-                <a:solidFill>
-                  <a:srgbClr val="46565C"/>
-                </a:solidFill>
-                <a:latin typeface="Segoe UI"/>
-              </a:rPr>
-              <a:t>curl con el token del aprobador contra POST</a:t>
-            </a:r>
-          </a:p>
-          <a:p>
-            <a:pPr>
-              <a:spcAft>
-                <a:spcPts val="400"/>
-              </a:spcAft>
-            </a:pPr>
-            <a:r>
-              <a:rPr sz="1100" b="0">
-                <a:solidFill>
-                  <a:srgbClr val="46565C"/>
-                </a:solidFill>
-                <a:latin typeface="Segoe UI"/>
-              </a:rPr>
-              <a:t>/brands devuelve 403. El RBAC no es la UI:</a:t>
-            </a:r>
-          </a:p>
-          <a:p>
-            <a:pPr>
-              <a:spcAft>
-                <a:spcPts val="400"/>
-              </a:spcAft>
-            </a:pPr>
-            <a:r>
-              <a:rPr sz="1100" b="0">
-                <a:solidFill>
-                  <a:srgbClr val="46565C"/>
-                </a:solidFill>
-                <a:latin typeface="Segoe UI"/>
-              </a:rPr>
-              <a:t>se aplica en el servidor.</a:t>
             </a:r>
           </a:p>
         </p:txBody>
@@ -11208,6 +12736,7 @@
           <a:lstStyle/>
           <a:p>
             <a:pPr algn="ctr"/>
+            <a:endParaRPr/>
           </a:p>
         </p:txBody>
       </p:sp>
@@ -11220,7 +12749,7 @@
         <p:spPr>
           <a:xfrm>
             <a:off x="1188720" y="5175504"/>
-            <a:ext cx="10058400" cy="822960"/>
+            <a:ext cx="10058400" cy="582211"/>
           </a:xfrm>
           <a:prstGeom prst="rect">
             <a:avLst/>
@@ -11228,7 +12757,7 @@
           <a:noFill/>
         </p:spPr>
         <p:txBody>
-          <a:bodyPr wrap="square" anchor="t" lIns="0" rIns="0" tIns="0" bIns="0">
+          <a:bodyPr wrap="square" lIns="0" tIns="0" rIns="0" bIns="0" anchor="t">
             <a:spAutoFit/>
           </a:bodyPr>
           <a:lstStyle/>
@@ -11239,13 +12768,31 @@
               </a:spcAft>
             </a:pPr>
             <a:r>
-              <a:rPr sz="1150" b="1">
+              <a:rPr sz="1150" b="1" dirty="0">
                 <a:solidFill>
                   <a:srgbClr val="101619"/>
                 </a:solidFill>
                 <a:latin typeface="Segoe UI"/>
               </a:rPr>
-              <a:t>Nota sobre la demo</a:t>
+              <a:t>Nota </a:t>
+            </a:r>
+            <a:r>
+              <a:rPr sz="1150" b="1" dirty="0" err="1">
+                <a:solidFill>
+                  <a:srgbClr val="101619"/>
+                </a:solidFill>
+                <a:latin typeface="Segoe UI"/>
+              </a:rPr>
+              <a:t>sobre</a:t>
+            </a:r>
+            <a:r>
+              <a:rPr sz="1150" b="1" dirty="0">
+                <a:solidFill>
+                  <a:srgbClr val="101619"/>
+                </a:solidFill>
+                <a:latin typeface="Segoe UI"/>
+              </a:rPr>
+              <a:t> la demo</a:t>
             </a:r>
           </a:p>
           <a:p>
@@ -11255,14 +12802,335 @@
               </a:spcAft>
             </a:pPr>
             <a:r>
-              <a:rPr sz="1150" b="0">
-                <a:solidFill>
-                  <a:srgbClr val="46565C"/>
-                </a:solidFill>
-                <a:latin typeface="Segoe UI"/>
-              </a:rPr>
-              <a:t>El backend corre en el free tier de Render y duerme tras 15 min: la primera petición puede tardar ~60 s. Por eso hay marcas ya sembradas — la demo del visor nunca depende de una llamada en vivo — y la sustentación se apoya en vídeo grabado.</a:t>
-            </a:r>
+              <a:rPr sz="1150" b="0" dirty="0">
+                <a:solidFill>
+                  <a:srgbClr val="46565C"/>
+                </a:solidFill>
+                <a:latin typeface="Segoe UI"/>
+              </a:rPr>
+              <a:t>El backend </a:t>
+            </a:r>
+            <a:r>
+              <a:rPr sz="1150" b="0" dirty="0" err="1">
+                <a:solidFill>
+                  <a:srgbClr val="46565C"/>
+                </a:solidFill>
+                <a:latin typeface="Segoe UI"/>
+              </a:rPr>
+              <a:t>corre</a:t>
+            </a:r>
+            <a:r>
+              <a:rPr sz="1150" b="0" dirty="0">
+                <a:solidFill>
+                  <a:srgbClr val="46565C"/>
+                </a:solidFill>
+                <a:latin typeface="Segoe UI"/>
+              </a:rPr>
+              <a:t> </a:t>
+            </a:r>
+            <a:r>
+              <a:rPr sz="1150" b="0" dirty="0" err="1">
+                <a:solidFill>
+                  <a:srgbClr val="46565C"/>
+                </a:solidFill>
+                <a:latin typeface="Segoe UI"/>
+              </a:rPr>
+              <a:t>en</a:t>
+            </a:r>
+            <a:r>
+              <a:rPr sz="1150" b="0" dirty="0">
+                <a:solidFill>
+                  <a:srgbClr val="46565C"/>
+                </a:solidFill>
+                <a:latin typeface="Segoe UI"/>
+              </a:rPr>
+              <a:t> el free tier de Render y </a:t>
+            </a:r>
+            <a:r>
+              <a:rPr sz="1150" b="0" dirty="0" err="1">
+                <a:solidFill>
+                  <a:srgbClr val="46565C"/>
+                </a:solidFill>
+                <a:latin typeface="Segoe UI"/>
+              </a:rPr>
+              <a:t>duerme</a:t>
+            </a:r>
+            <a:r>
+              <a:rPr sz="1150" b="0" dirty="0">
+                <a:solidFill>
+                  <a:srgbClr val="46565C"/>
+                </a:solidFill>
+                <a:latin typeface="Segoe UI"/>
+              </a:rPr>
+              <a:t> </a:t>
+            </a:r>
+            <a:r>
+              <a:rPr sz="1150" b="0" dirty="0" err="1">
+                <a:solidFill>
+                  <a:srgbClr val="46565C"/>
+                </a:solidFill>
+                <a:latin typeface="Segoe UI"/>
+              </a:rPr>
+              <a:t>tras</a:t>
+            </a:r>
+            <a:r>
+              <a:rPr sz="1150" b="0" dirty="0">
+                <a:solidFill>
+                  <a:srgbClr val="46565C"/>
+                </a:solidFill>
+                <a:latin typeface="Segoe UI"/>
+              </a:rPr>
+              <a:t> 15 min: la </a:t>
+            </a:r>
+            <a:r>
+              <a:rPr sz="1150" b="0" dirty="0" err="1">
+                <a:solidFill>
+                  <a:srgbClr val="46565C"/>
+                </a:solidFill>
+                <a:latin typeface="Segoe UI"/>
+              </a:rPr>
+              <a:t>primera</a:t>
+            </a:r>
+            <a:r>
+              <a:rPr sz="1150" b="0" dirty="0">
+                <a:solidFill>
+                  <a:srgbClr val="46565C"/>
+                </a:solidFill>
+                <a:latin typeface="Segoe UI"/>
+              </a:rPr>
+              <a:t> </a:t>
+            </a:r>
+            <a:r>
+              <a:rPr sz="1150" b="0" dirty="0" err="1">
+                <a:solidFill>
+                  <a:srgbClr val="46565C"/>
+                </a:solidFill>
+                <a:latin typeface="Segoe UI"/>
+              </a:rPr>
+              <a:t>petición</a:t>
+            </a:r>
+            <a:r>
+              <a:rPr sz="1150" b="0" dirty="0">
+                <a:solidFill>
+                  <a:srgbClr val="46565C"/>
+                </a:solidFill>
+                <a:latin typeface="Segoe UI"/>
+              </a:rPr>
+              <a:t> </a:t>
+            </a:r>
+            <a:r>
+              <a:rPr sz="1150" b="0" dirty="0" err="1">
+                <a:solidFill>
+                  <a:srgbClr val="46565C"/>
+                </a:solidFill>
+                <a:latin typeface="Segoe UI"/>
+              </a:rPr>
+              <a:t>puede</a:t>
+            </a:r>
+            <a:r>
+              <a:rPr sz="1150" b="0" dirty="0">
+                <a:solidFill>
+                  <a:srgbClr val="46565C"/>
+                </a:solidFill>
+                <a:latin typeface="Segoe UI"/>
+              </a:rPr>
+              <a:t> </a:t>
+            </a:r>
+            <a:r>
+              <a:rPr sz="1150" b="0" dirty="0" err="1">
+                <a:solidFill>
+                  <a:srgbClr val="46565C"/>
+                </a:solidFill>
+                <a:latin typeface="Segoe UI"/>
+              </a:rPr>
+              <a:t>tardar</a:t>
+            </a:r>
+            <a:r>
+              <a:rPr sz="1150" b="0" dirty="0">
+                <a:solidFill>
+                  <a:srgbClr val="46565C"/>
+                </a:solidFill>
+                <a:latin typeface="Segoe UI"/>
+              </a:rPr>
+              <a:t> ~60 s. Por </a:t>
+            </a:r>
+            <a:r>
+              <a:rPr sz="1150" b="0" dirty="0" err="1">
+                <a:solidFill>
+                  <a:srgbClr val="46565C"/>
+                </a:solidFill>
+                <a:latin typeface="Segoe UI"/>
+              </a:rPr>
+              <a:t>eso</a:t>
+            </a:r>
+            <a:r>
+              <a:rPr sz="1150" b="0" dirty="0">
+                <a:solidFill>
+                  <a:srgbClr val="46565C"/>
+                </a:solidFill>
+                <a:latin typeface="Segoe UI"/>
+              </a:rPr>
+              <a:t> hay </a:t>
+            </a:r>
+            <a:r>
+              <a:rPr sz="1150" b="0" dirty="0" err="1">
+                <a:solidFill>
+                  <a:srgbClr val="46565C"/>
+                </a:solidFill>
+                <a:latin typeface="Segoe UI"/>
+              </a:rPr>
+              <a:t>marcas</a:t>
+            </a:r>
+            <a:r>
+              <a:rPr sz="1150" b="0" dirty="0">
+                <a:solidFill>
+                  <a:srgbClr val="46565C"/>
+                </a:solidFill>
+                <a:latin typeface="Segoe UI"/>
+              </a:rPr>
+              <a:t> </a:t>
+            </a:r>
+            <a:r>
+              <a:rPr sz="1150" b="0" dirty="0" err="1">
+                <a:solidFill>
+                  <a:srgbClr val="46565C"/>
+                </a:solidFill>
+                <a:latin typeface="Segoe UI"/>
+              </a:rPr>
+              <a:t>ya</a:t>
+            </a:r>
+            <a:r>
+              <a:rPr sz="1150" b="0" dirty="0">
+                <a:solidFill>
+                  <a:srgbClr val="46565C"/>
+                </a:solidFill>
+                <a:latin typeface="Segoe UI"/>
+              </a:rPr>
+              <a:t> </a:t>
+            </a:r>
+            <a:r>
+              <a:rPr sz="1150" b="0" dirty="0" err="1">
+                <a:solidFill>
+                  <a:srgbClr val="46565C"/>
+                </a:solidFill>
+                <a:latin typeface="Segoe UI"/>
+              </a:rPr>
+              <a:t>sembradas</a:t>
+            </a:r>
+            <a:r>
+              <a:rPr sz="1150" b="0" dirty="0">
+                <a:solidFill>
+                  <a:srgbClr val="46565C"/>
+                </a:solidFill>
+                <a:latin typeface="Segoe UI"/>
+              </a:rPr>
+              <a:t> — la demo del visor </a:t>
+            </a:r>
+            <a:r>
+              <a:rPr sz="1150" b="0" dirty="0" err="1">
+                <a:solidFill>
+                  <a:srgbClr val="46565C"/>
+                </a:solidFill>
+                <a:latin typeface="Segoe UI"/>
+              </a:rPr>
+              <a:t>nunca</a:t>
+            </a:r>
+            <a:r>
+              <a:rPr sz="1150" b="0" dirty="0">
+                <a:solidFill>
+                  <a:srgbClr val="46565C"/>
+                </a:solidFill>
+                <a:latin typeface="Segoe UI"/>
+              </a:rPr>
+              <a:t> </a:t>
+            </a:r>
+            <a:r>
+              <a:rPr sz="1150" b="0" dirty="0" err="1">
+                <a:solidFill>
+                  <a:srgbClr val="46565C"/>
+                </a:solidFill>
+                <a:latin typeface="Segoe UI"/>
+              </a:rPr>
+              <a:t>depende</a:t>
+            </a:r>
+            <a:r>
+              <a:rPr sz="1150" b="0" dirty="0">
+                <a:solidFill>
+                  <a:srgbClr val="46565C"/>
+                </a:solidFill>
+                <a:latin typeface="Segoe UI"/>
+              </a:rPr>
+              <a:t> de </a:t>
+            </a:r>
+            <a:r>
+              <a:rPr sz="1150" b="0" dirty="0" err="1">
+                <a:solidFill>
+                  <a:srgbClr val="46565C"/>
+                </a:solidFill>
+                <a:latin typeface="Segoe UI"/>
+              </a:rPr>
+              <a:t>una</a:t>
+            </a:r>
+            <a:r>
+              <a:rPr sz="1150" b="0" dirty="0">
+                <a:solidFill>
+                  <a:srgbClr val="46565C"/>
+                </a:solidFill>
+                <a:latin typeface="Segoe UI"/>
+              </a:rPr>
+              <a:t> </a:t>
+            </a:r>
+            <a:r>
+              <a:rPr sz="1150" b="0" dirty="0" err="1">
+                <a:solidFill>
+                  <a:srgbClr val="46565C"/>
+                </a:solidFill>
+                <a:latin typeface="Segoe UI"/>
+              </a:rPr>
+              <a:t>llamada</a:t>
+            </a:r>
+            <a:r>
+              <a:rPr sz="1150" b="0" dirty="0">
+                <a:solidFill>
+                  <a:srgbClr val="46565C"/>
+                </a:solidFill>
+                <a:latin typeface="Segoe UI"/>
+              </a:rPr>
+              <a:t> </a:t>
+            </a:r>
+            <a:r>
+              <a:rPr sz="1150" b="0" dirty="0" err="1">
+                <a:solidFill>
+                  <a:srgbClr val="46565C"/>
+                </a:solidFill>
+                <a:latin typeface="Segoe UI"/>
+              </a:rPr>
+              <a:t>en</a:t>
+            </a:r>
+            <a:r>
+              <a:rPr sz="1150" b="0" dirty="0">
+                <a:solidFill>
+                  <a:srgbClr val="46565C"/>
+                </a:solidFill>
+                <a:latin typeface="Segoe UI"/>
+              </a:rPr>
+              <a:t> vivo</a:t>
+            </a:r>
+            <a:r>
+              <a:rPr lang="es-PE" sz="1150" b="0" dirty="0">
+                <a:solidFill>
+                  <a:srgbClr val="46565C"/>
+                </a:solidFill>
+                <a:latin typeface="Segoe UI"/>
+              </a:rPr>
+              <a:t>.</a:t>
+            </a:r>
+            <a:endParaRPr sz="1150" b="0" dirty="0">
+              <a:solidFill>
+                <a:srgbClr val="46565C"/>
+              </a:solidFill>
+              <a:latin typeface="Segoe UI"/>
+            </a:endParaRPr>
           </a:p>
         </p:txBody>
       </p:sp>
@@ -11275,7 +13143,7 @@
 </file>
 
 <file path=ppt/slides/slide5.xml><?xml version="1.0" encoding="utf-8"?>
-<p:sld xmlns:a="http://schemas.openxmlformats.org/drawingml/2006/main" xmlns:p="http://schemas.openxmlformats.org/presentationml/2006/main" xmlns:r="http://schemas.openxmlformats.org/officeDocument/2006/relationships">
+<p:sld xmlns:a="http://schemas.openxmlformats.org/drawingml/2006/main" xmlns:r="http://schemas.openxmlformats.org/officeDocument/2006/relationships" xmlns:p="http://schemas.openxmlformats.org/presentationml/2006/main">
   <p:cSld>
     <p:bg>
       <p:bgPr>
@@ -11291,7 +13159,14 @@
         <p:cNvGrpSpPr/>
         <p:nvPr/>
       </p:nvGrpSpPr>
-      <p:grpSpPr/>
+      <p:grpSpPr>
+        <a:xfrm>
+          <a:off x="0" y="0"/>
+          <a:ext cx="0" cy="0"/>
+          <a:chOff x="0" y="0"/>
+          <a:chExt cx="0" cy="0"/>
+        </a:xfrm>
+      </p:grpSpPr>
       <p:sp>
         <p:nvSpPr>
           <p:cNvPr id="2" name="Rectangle 1"/>
@@ -11333,6 +13208,7 @@
           <a:lstStyle/>
           <a:p>
             <a:pPr algn="ctr"/>
+            <a:endParaRPr/>
           </a:p>
         </p:txBody>
       </p:sp>
@@ -11353,7 +13229,7 @@
           <a:noFill/>
         </p:spPr>
         <p:txBody>
-          <a:bodyPr wrap="square" anchor="t" lIns="0" rIns="0" tIns="0" bIns="0">
+          <a:bodyPr wrap="square" lIns="0" tIns="0" rIns="0" bIns="0" anchor="t">
             <a:spAutoFit/>
           </a:bodyPr>
           <a:lstStyle/>
@@ -11416,6 +13292,7 @@
           <a:lstStyle/>
           <a:p>
             <a:pPr algn="ctr"/>
+            <a:endParaRPr/>
           </a:p>
         </p:txBody>
       </p:sp>
@@ -11460,6 +13337,7 @@
           <a:lstStyle/>
           <a:p>
             <a:pPr algn="ctr"/>
+            <a:endParaRPr/>
           </a:p>
         </p:txBody>
       </p:sp>
@@ -11504,6 +13382,7 @@
           <a:lstStyle/>
           <a:p>
             <a:pPr algn="ctr"/>
+            <a:endParaRPr/>
           </a:p>
         </p:txBody>
       </p:sp>
@@ -11548,6 +13427,7 @@
           <a:lstStyle/>
           <a:p>
             <a:pPr algn="ctr"/>
+            <a:endParaRPr/>
           </a:p>
         </p:txBody>
       </p:sp>
@@ -11592,6 +13472,7 @@
           <a:lstStyle/>
           <a:p>
             <a:pPr algn="ctr"/>
+            <a:endParaRPr/>
           </a:p>
         </p:txBody>
       </p:sp>
@@ -11636,6 +13517,7 @@
           <a:lstStyle/>
           <a:p>
             <a:pPr algn="ctr"/>
+            <a:endParaRPr/>
           </a:p>
         </p:txBody>
       </p:sp>
@@ -11680,6 +13562,7 @@
           <a:lstStyle/>
           <a:p>
             <a:pPr algn="ctr"/>
+            <a:endParaRPr/>
           </a:p>
         </p:txBody>
       </p:sp>
@@ -11724,6 +13607,7 @@
           <a:lstStyle/>
           <a:p>
             <a:pPr algn="ctr"/>
+            <a:endParaRPr/>
           </a:p>
         </p:txBody>
       </p:sp>
@@ -11768,6 +13652,7 @@
           <a:lstStyle/>
           <a:p>
             <a:pPr algn="ctr"/>
+            <a:endParaRPr/>
           </a:p>
         </p:txBody>
       </p:sp>
@@ -11812,6 +13697,7 @@
           <a:lstStyle/>
           <a:p>
             <a:pPr algn="ctr"/>
+            <a:endParaRPr/>
           </a:p>
         </p:txBody>
       </p:sp>
@@ -11856,6 +13742,7 @@
           <a:lstStyle/>
           <a:p>
             <a:pPr algn="ctr"/>
+            <a:endParaRPr/>
           </a:p>
         </p:txBody>
       </p:sp>
@@ -11900,6 +13787,7 @@
           <a:lstStyle/>
           <a:p>
             <a:pPr algn="ctr"/>
+            <a:endParaRPr/>
           </a:p>
         </p:txBody>
       </p:sp>
@@ -11944,6 +13832,7 @@
           <a:lstStyle/>
           <a:p>
             <a:pPr algn="ctr"/>
+            <a:endParaRPr/>
           </a:p>
         </p:txBody>
       </p:sp>
@@ -11988,6 +13877,7 @@
           <a:lstStyle/>
           <a:p>
             <a:pPr algn="ctr"/>
+            <a:endParaRPr/>
           </a:p>
         </p:txBody>
       </p:sp>
@@ -12032,6 +13922,7 @@
           <a:lstStyle/>
           <a:p>
             <a:pPr algn="ctr"/>
+            <a:endParaRPr/>
           </a:p>
         </p:txBody>
       </p:sp>
@@ -12076,6 +13967,7 @@
           <a:lstStyle/>
           <a:p>
             <a:pPr algn="ctr"/>
+            <a:endParaRPr/>
           </a:p>
         </p:txBody>
       </p:sp>
@@ -12120,6 +14012,7 @@
           <a:lstStyle/>
           <a:p>
             <a:pPr algn="ctr"/>
+            <a:endParaRPr/>
           </a:p>
         </p:txBody>
       </p:sp>
@@ -12164,6 +14057,7 @@
           <a:lstStyle/>
           <a:p>
             <a:pPr algn="ctr"/>
+            <a:endParaRPr/>
           </a:p>
         </p:txBody>
       </p:sp>
@@ -12208,6 +14102,7 @@
           <a:lstStyle/>
           <a:p>
             <a:pPr algn="ctr"/>
+            <a:endParaRPr/>
           </a:p>
         </p:txBody>
       </p:sp>
@@ -12252,6 +14147,7 @@
           <a:lstStyle/>
           <a:p>
             <a:pPr algn="ctr"/>
+            <a:endParaRPr/>
           </a:p>
         </p:txBody>
       </p:sp>
@@ -12296,6 +14192,7 @@
           <a:lstStyle/>
           <a:p>
             <a:pPr algn="ctr"/>
+            <a:endParaRPr/>
           </a:p>
         </p:txBody>
       </p:sp>
@@ -12340,6 +14237,7 @@
           <a:lstStyle/>
           <a:p>
             <a:pPr algn="ctr"/>
+            <a:endParaRPr/>
           </a:p>
         </p:txBody>
       </p:sp>
@@ -12384,6 +14282,7 @@
           <a:lstStyle/>
           <a:p>
             <a:pPr algn="ctr"/>
+            <a:endParaRPr/>
           </a:p>
         </p:txBody>
       </p:sp>
@@ -12428,6 +14327,7 @@
           <a:lstStyle/>
           <a:p>
             <a:pPr algn="ctr"/>
+            <a:endParaRPr/>
           </a:p>
         </p:txBody>
       </p:sp>
@@ -12472,6 +14372,7 @@
           <a:lstStyle/>
           <a:p>
             <a:pPr algn="ctr"/>
+            <a:endParaRPr/>
           </a:p>
         </p:txBody>
       </p:sp>
@@ -12516,6 +14417,7 @@
           <a:lstStyle/>
           <a:p>
             <a:pPr algn="ctr"/>
+            <a:endParaRPr/>
           </a:p>
         </p:txBody>
       </p:sp>
@@ -12536,7 +14438,7 @@
           <a:noFill/>
         </p:spPr>
         <p:txBody>
-          <a:bodyPr wrap="square" anchor="t" lIns="0" rIns="0" tIns="0" bIns="0">
+          <a:bodyPr wrap="square" lIns="0" tIns="0" rIns="0" bIns="0" anchor="t">
             <a:spAutoFit/>
           </a:bodyPr>
           <a:lstStyle/>
@@ -12575,7 +14477,7 @@
           <a:noFill/>
         </p:spPr>
         <p:txBody>
-          <a:bodyPr wrap="square" anchor="t" lIns="0" rIns="0" tIns="0" bIns="0">
+          <a:bodyPr wrap="square" lIns="0" tIns="0" rIns="0" bIns="0" anchor="t">
             <a:spAutoFit/>
           </a:bodyPr>
           <a:lstStyle/>
@@ -12640,6 +14542,7 @@
           <a:lstStyle/>
           <a:p>
             <a:pPr algn="ctr"/>
+            <a:endParaRPr/>
           </a:p>
         </p:txBody>
       </p:sp>
@@ -12660,7 +14563,7 @@
           <a:noFill/>
         </p:spPr>
         <p:txBody>
-          <a:bodyPr wrap="square" anchor="t" lIns="0" rIns="0" tIns="0" bIns="0">
+          <a:bodyPr wrap="square" lIns="0" tIns="0" rIns="0" bIns="0" anchor="t">
             <a:spAutoFit/>
           </a:bodyPr>
           <a:lstStyle/>
@@ -12757,6 +14660,7 @@
           <a:lstStyle/>
           <a:p>
             <a:pPr algn="ctr"/>
+            <a:endParaRPr/>
           </a:p>
         </p:txBody>
       </p:sp>
@@ -12777,7 +14681,7 @@
           <a:noFill/>
         </p:spPr>
         <p:txBody>
-          <a:bodyPr wrap="square" anchor="t" lIns="0" rIns="0" tIns="0" bIns="0">
+          <a:bodyPr wrap="square" lIns="0" tIns="0" rIns="0" bIns="0" anchor="t">
             <a:spAutoFit/>
           </a:bodyPr>
           <a:lstStyle/>
@@ -12788,14 +14692,83 @@
               </a:spcAft>
             </a:pPr>
             <a:r>
-              <a:rPr sz="1300" b="1">
+              <a:rPr sz="1300" b="1" dirty="0">
                 <a:solidFill>
                   <a:srgbClr val="101619"/>
                 </a:solidFill>
                 <a:latin typeface="Segoe UI"/>
               </a:rPr>
-              <a:t>Chunking por dominio, no por tamaño</a:t>
-            </a:r>
+              <a:t>Chunking </a:t>
+            </a:r>
+            <a:r>
+              <a:rPr sz="1300" b="1" dirty="0" err="1">
+                <a:solidFill>
+                  <a:srgbClr val="101619"/>
+                </a:solidFill>
+                <a:latin typeface="Segoe UI"/>
+              </a:rPr>
+              <a:t>por</a:t>
+            </a:r>
+            <a:r>
+              <a:rPr sz="1300" b="1" dirty="0">
+                <a:solidFill>
+                  <a:srgbClr val="101619"/>
+                </a:solidFill>
+                <a:latin typeface="Segoe UI"/>
+              </a:rPr>
+              <a:t> </a:t>
+            </a:r>
+            <a:r>
+              <a:rPr sz="1300" b="1" dirty="0" err="1">
+                <a:solidFill>
+                  <a:srgbClr val="101619"/>
+                </a:solidFill>
+                <a:latin typeface="Segoe UI"/>
+              </a:rPr>
+              <a:t>dominio</a:t>
+            </a:r>
+            <a:r>
+              <a:rPr sz="1300" b="1" dirty="0">
+                <a:solidFill>
+                  <a:srgbClr val="101619"/>
+                </a:solidFill>
+                <a:latin typeface="Segoe UI"/>
+              </a:rPr>
+              <a:t>, no </a:t>
+            </a:r>
+            <a:r>
+              <a:rPr sz="1300" b="1" dirty="0" err="1">
+                <a:solidFill>
+                  <a:srgbClr val="101619"/>
+                </a:solidFill>
+                <a:latin typeface="Segoe UI"/>
+              </a:rPr>
+              <a:t>por</a:t>
+            </a:r>
+            <a:r>
+              <a:rPr sz="1300" b="1" dirty="0">
+                <a:solidFill>
+                  <a:srgbClr val="101619"/>
+                </a:solidFill>
+                <a:latin typeface="Segoe UI"/>
+              </a:rPr>
+              <a:t> </a:t>
+            </a:r>
+            <a:r>
+              <a:rPr sz="1300" b="1" dirty="0" err="1">
+                <a:solidFill>
+                  <a:srgbClr val="101619"/>
+                </a:solidFill>
+                <a:latin typeface="Segoe UI"/>
+              </a:rPr>
+              <a:t>tamaño</a:t>
+            </a:r>
+            <a:endParaRPr sz="1300" b="1" dirty="0">
+              <a:solidFill>
+                <a:srgbClr val="101619"/>
+              </a:solidFill>
+              <a:latin typeface="Segoe UI"/>
+            </a:endParaRPr>
           </a:p>
           <a:p>
             <a:pPr>
@@ -12804,14 +14777,65 @@
               </a:spcAft>
             </a:pPr>
             <a:r>
-              <a:rPr sz="1100" b="0">
-                <a:solidFill>
-                  <a:srgbClr val="46565C"/>
-                </a:solidFill>
-                <a:latin typeface="Segoe UI"/>
-              </a:rPr>
-              <a:t>Sin metadata limpia no hay pre-filtrado, y una</a:t>
-            </a:r>
+              <a:rPr sz="1100" b="0" dirty="0">
+                <a:solidFill>
+                  <a:srgbClr val="46565C"/>
+                </a:solidFill>
+                <a:latin typeface="Segoe UI"/>
+              </a:rPr>
+              <a:t>Sin metadata </a:t>
+            </a:r>
+            <a:r>
+              <a:rPr sz="1100" b="0" dirty="0" err="1">
+                <a:solidFill>
+                  <a:srgbClr val="46565C"/>
+                </a:solidFill>
+                <a:latin typeface="Segoe UI"/>
+              </a:rPr>
+              <a:t>limpia</a:t>
+            </a:r>
+            <a:r>
+              <a:rPr sz="1100" b="0" dirty="0">
+                <a:solidFill>
+                  <a:srgbClr val="46565C"/>
+                </a:solidFill>
+                <a:latin typeface="Segoe UI"/>
+              </a:rPr>
+              <a:t> no hay pre-</a:t>
+            </a:r>
+            <a:r>
+              <a:rPr sz="1100" b="0" dirty="0" err="1">
+                <a:solidFill>
+                  <a:srgbClr val="46565C"/>
+                </a:solidFill>
+                <a:latin typeface="Segoe UI"/>
+              </a:rPr>
+              <a:t>filtrado</a:t>
+            </a:r>
+            <a:r>
+              <a:rPr sz="1100" b="0" dirty="0">
+                <a:solidFill>
+                  <a:srgbClr val="46565C"/>
+                </a:solidFill>
+                <a:latin typeface="Segoe UI"/>
+              </a:rPr>
+              <a:t>, y </a:t>
+            </a:r>
+            <a:r>
+              <a:rPr sz="1100" b="0" dirty="0" err="1">
+                <a:solidFill>
+                  <a:srgbClr val="46565C"/>
+                </a:solidFill>
+                <a:latin typeface="Segoe UI"/>
+              </a:rPr>
+              <a:t>una</a:t>
+            </a:r>
+            <a:endParaRPr sz="1100" b="0" dirty="0">
+              <a:solidFill>
+                <a:srgbClr val="46565C"/>
+              </a:solidFill>
+              <a:latin typeface="Segoe UI"/>
+            </a:endParaRPr>
           </a:p>
           <a:p>
             <a:pPr>
@@ -12820,13 +14844,67 @@
               </a:spcAft>
             </a:pPr>
             <a:r>
-              <a:rPr sz="1100" b="0">
-                <a:solidFill>
-                  <a:srgbClr val="46565C"/>
-                </a:solidFill>
-                <a:latin typeface="Segoe UI"/>
-              </a:rPr>
-              <a:t>consulta sobre el logo devolvería léxico.</a:t>
+              <a:rPr sz="1100" b="0" dirty="0">
+                <a:solidFill>
+                  <a:srgbClr val="46565C"/>
+                </a:solidFill>
+                <a:latin typeface="Segoe UI"/>
+              </a:rPr>
+              <a:t>consulta </a:t>
+            </a:r>
+            <a:r>
+              <a:rPr sz="1100" b="0" dirty="0" err="1">
+                <a:solidFill>
+                  <a:srgbClr val="46565C"/>
+                </a:solidFill>
+                <a:latin typeface="Segoe UI"/>
+              </a:rPr>
+              <a:t>sobre</a:t>
+            </a:r>
+            <a:r>
+              <a:rPr sz="1100" b="0" dirty="0">
+                <a:solidFill>
+                  <a:srgbClr val="46565C"/>
+                </a:solidFill>
+                <a:latin typeface="Segoe UI"/>
+              </a:rPr>
+              <a:t> el logo </a:t>
+            </a:r>
+            <a:r>
+              <a:rPr sz="1100" b="0" dirty="0" err="1">
+                <a:solidFill>
+                  <a:srgbClr val="46565C"/>
+                </a:solidFill>
+                <a:latin typeface="Segoe UI"/>
+              </a:rPr>
+              <a:t>devolvería</a:t>
+            </a:r>
+            <a:r>
+              <a:rPr sz="1100" b="0" dirty="0">
+                <a:solidFill>
+                  <a:srgbClr val="46565C"/>
+                </a:solidFill>
+                <a:latin typeface="Segoe UI"/>
+              </a:rPr>
+              <a:t> </a:t>
+            </a:r>
+            <a:r>
+              <a:rPr sz="1100" b="0" dirty="0" err="1">
+                <a:solidFill>
+                  <a:srgbClr val="46565C"/>
+                </a:solidFill>
+                <a:latin typeface="Segoe UI"/>
+              </a:rPr>
+              <a:t>léxico</a:t>
+            </a:r>
+            <a:r>
+              <a:rPr sz="1100" b="0" dirty="0">
+                <a:solidFill>
+                  <a:srgbClr val="46565C"/>
+                </a:solidFill>
+                <a:latin typeface="Segoe UI"/>
+              </a:rPr>
+              <a:t>.</a:t>
             </a:r>
           </a:p>
         </p:txBody>
@@ -12874,6 +14952,7 @@
           <a:lstStyle/>
           <a:p>
             <a:pPr algn="ctr"/>
+            <a:endParaRPr/>
           </a:p>
         </p:txBody>
       </p:sp>
@@ -12894,7 +14973,7 @@
           <a:noFill/>
         </p:spPr>
         <p:txBody>
-          <a:bodyPr wrap="square" anchor="t" lIns="0" rIns="0" tIns="0" bIns="0">
+          <a:bodyPr wrap="square" lIns="0" tIns="0" rIns="0" bIns="0" anchor="t">
             <a:spAutoFit/>
           </a:bodyPr>
           <a:lstStyle/>
@@ -12905,14 +14984,65 @@
               </a:spcAft>
             </a:pPr>
             <a:r>
-              <a:rPr sz="1300" b="1">
+              <a:rPr sz="1300" b="1" dirty="0">
                 <a:solidFill>
                   <a:srgbClr val="101619"/>
                 </a:solidFill>
                 <a:latin typeface="Segoe UI"/>
               </a:rPr>
-              <a:t>RAG para guía, código para lo duro</a:t>
-            </a:r>
+              <a:t>RAG para </a:t>
+            </a:r>
+            <a:r>
+              <a:rPr sz="1300" b="1" dirty="0" err="1">
+                <a:solidFill>
+                  <a:srgbClr val="101619"/>
+                </a:solidFill>
+                <a:latin typeface="Segoe UI"/>
+              </a:rPr>
+              <a:t>guía</a:t>
+            </a:r>
+            <a:r>
+              <a:rPr sz="1300" b="1" dirty="0">
+                <a:solidFill>
+                  <a:srgbClr val="101619"/>
+                </a:solidFill>
+                <a:latin typeface="Segoe UI"/>
+              </a:rPr>
+              <a:t>, </a:t>
+            </a:r>
+            <a:r>
+              <a:rPr sz="1300" b="1" dirty="0" err="1">
+                <a:solidFill>
+                  <a:srgbClr val="101619"/>
+                </a:solidFill>
+                <a:latin typeface="Segoe UI"/>
+              </a:rPr>
+              <a:t>código</a:t>
+            </a:r>
+            <a:r>
+              <a:rPr sz="1300" b="1" dirty="0">
+                <a:solidFill>
+                  <a:srgbClr val="101619"/>
+                </a:solidFill>
+                <a:latin typeface="Segoe UI"/>
+              </a:rPr>
+              <a:t> para lo </a:t>
+            </a:r>
+            <a:r>
+              <a:rPr sz="1300" b="1" dirty="0" err="1">
+                <a:solidFill>
+                  <a:srgbClr val="101619"/>
+                </a:solidFill>
+                <a:latin typeface="Segoe UI"/>
+              </a:rPr>
+              <a:t>duro</a:t>
+            </a:r>
+            <a:endParaRPr sz="1300" b="1" dirty="0">
+              <a:solidFill>
+                <a:srgbClr val="101619"/>
+              </a:solidFill>
+              <a:latin typeface="Segoe UI"/>
+            </a:endParaRPr>
           </a:p>
           <a:p>
             <a:pPr>
@@ -12921,13 +15051,49 @@
               </a:spcAft>
             </a:pPr>
             <a:r>
-              <a:rPr sz="1100" b="0">
-                <a:solidFill>
-                  <a:srgbClr val="46565C"/>
-                </a:solidFill>
-                <a:latin typeface="Segoe UI"/>
-              </a:rPr>
-              <a:t>Un check de palabra prohibida necesita 100 % de</a:t>
+              <a:rPr sz="1100" b="0" dirty="0">
+                <a:solidFill>
+                  <a:srgbClr val="46565C"/>
+                </a:solidFill>
+                <a:latin typeface="Segoe UI"/>
+              </a:rPr>
+              <a:t>Un check de palabra </a:t>
+            </a:r>
+            <a:r>
+              <a:rPr sz="1100" b="0" dirty="0" err="1">
+                <a:solidFill>
+                  <a:srgbClr val="46565C"/>
+                </a:solidFill>
+                <a:latin typeface="Segoe UI"/>
+              </a:rPr>
+              <a:t>prohibida</a:t>
+            </a:r>
+            <a:r>
+              <a:rPr sz="1100" b="0" dirty="0">
+                <a:solidFill>
+                  <a:srgbClr val="46565C"/>
+                </a:solidFill>
+                <a:latin typeface="Segoe UI"/>
+              </a:rPr>
+              <a:t> </a:t>
+            </a:r>
+            <a:r>
+              <a:rPr sz="1100" b="0" dirty="0" err="1">
+                <a:solidFill>
+                  <a:srgbClr val="46565C"/>
+                </a:solidFill>
+                <a:latin typeface="Segoe UI"/>
+              </a:rPr>
+              <a:t>necesita</a:t>
+            </a:r>
+            <a:r>
+              <a:rPr sz="1100" b="0" dirty="0">
+                <a:solidFill>
+                  <a:srgbClr val="46565C"/>
+                </a:solidFill>
+                <a:latin typeface="Segoe UI"/>
+              </a:rPr>
+              <a:t> 100 % de</a:t>
             </a:r>
           </a:p>
           <a:p>
@@ -12937,13 +15103,67 @@
               </a:spcAft>
             </a:pPr>
             <a:r>
-              <a:rPr sz="1100" b="0">
-                <a:solidFill>
-                  <a:srgbClr val="46565C"/>
-                </a:solidFill>
-                <a:latin typeface="Segoe UI"/>
-              </a:rPr>
-              <a:t>recall. La búsqueda semántica no lo garantiza.</a:t>
+              <a:rPr sz="1100" b="0" dirty="0">
+                <a:solidFill>
+                  <a:srgbClr val="46565C"/>
+                </a:solidFill>
+                <a:latin typeface="Segoe UI"/>
+              </a:rPr>
+              <a:t>recall. La </a:t>
+            </a:r>
+            <a:r>
+              <a:rPr sz="1100" b="0" dirty="0" err="1">
+                <a:solidFill>
+                  <a:srgbClr val="46565C"/>
+                </a:solidFill>
+                <a:latin typeface="Segoe UI"/>
+              </a:rPr>
+              <a:t>búsqueda</a:t>
+            </a:r>
+            <a:r>
+              <a:rPr sz="1100" b="0" dirty="0">
+                <a:solidFill>
+                  <a:srgbClr val="46565C"/>
+                </a:solidFill>
+                <a:latin typeface="Segoe UI"/>
+              </a:rPr>
+              <a:t> </a:t>
+            </a:r>
+            <a:r>
+              <a:rPr sz="1100" b="0" dirty="0" err="1">
+                <a:solidFill>
+                  <a:srgbClr val="46565C"/>
+                </a:solidFill>
+                <a:latin typeface="Segoe UI"/>
+              </a:rPr>
+              <a:t>semántica</a:t>
+            </a:r>
+            <a:r>
+              <a:rPr sz="1100" b="0" dirty="0">
+                <a:solidFill>
+                  <a:srgbClr val="46565C"/>
+                </a:solidFill>
+                <a:latin typeface="Segoe UI"/>
+              </a:rPr>
+              <a:t> no lo </a:t>
+            </a:r>
+            <a:r>
+              <a:rPr sz="1100" b="0" dirty="0" err="1">
+                <a:solidFill>
+                  <a:srgbClr val="46565C"/>
+                </a:solidFill>
+                <a:latin typeface="Segoe UI"/>
+              </a:rPr>
+              <a:t>garantiza</a:t>
+            </a:r>
+            <a:r>
+              <a:rPr sz="1100" b="0" dirty="0">
+                <a:solidFill>
+                  <a:srgbClr val="46565C"/>
+                </a:solidFill>
+                <a:latin typeface="Segoe UI"/>
+              </a:rPr>
+              <a:t>.</a:t>
             </a:r>
           </a:p>
         </p:txBody>
@@ -12991,6 +15211,7 @@
           <a:lstStyle/>
           <a:p>
             <a:pPr algn="ctr"/>
+            <a:endParaRPr/>
           </a:p>
         </p:txBody>
       </p:sp>
@@ -13011,7 +15232,7 @@
           <a:noFill/>
         </p:spPr>
         <p:txBody>
-          <a:bodyPr wrap="square" anchor="t" lIns="0" rIns="0" tIns="0" bIns="0">
+          <a:bodyPr wrap="square" lIns="0" tIns="0" rIns="0" bIns="0" anchor="t">
             <a:spAutoFit/>
           </a:bodyPr>
           <a:lstStyle/>
@@ -13108,6 +15329,7 @@
           <a:lstStyle/>
           <a:p>
             <a:pPr algn="ctr"/>
+            <a:endParaRPr/>
           </a:p>
         </p:txBody>
       </p:sp>
@@ -13120,7 +15342,7 @@
         <p:spPr>
           <a:xfrm>
             <a:off x="1124712" y="4654296"/>
-            <a:ext cx="4791456" cy="978408"/>
+            <a:ext cx="4791456" cy="641201"/>
           </a:xfrm>
           <a:prstGeom prst="rect">
             <a:avLst/>
@@ -13128,7 +15350,7 @@
           <a:noFill/>
         </p:spPr>
         <p:txBody>
-          <a:bodyPr wrap="square" anchor="t" lIns="0" rIns="0" tIns="0" bIns="0">
+          <a:bodyPr wrap="square" lIns="0" tIns="0" rIns="0" bIns="0" anchor="t">
             <a:spAutoFit/>
           </a:bodyPr>
           <a:lstStyle/>
@@ -13139,14 +15361,20 @@
               </a:spcAft>
             </a:pPr>
             <a:r>
-              <a:rPr sz="1300" b="1">
+              <a:rPr lang="es-PE" sz="1300" b="1" dirty="0">
                 <a:solidFill>
                   <a:srgbClr val="101619"/>
                 </a:solidFill>
                 <a:latin typeface="Segoe UI"/>
               </a:rPr>
-              <a:t>Capa de proveedor intercambiable</a:t>
-            </a:r>
+              <a:t>Cambio de proveedor</a:t>
+            </a:r>
+            <a:endParaRPr sz="1300" b="1" dirty="0">
+              <a:solidFill>
+                <a:srgbClr val="101619"/>
+              </a:solidFill>
+              <a:latin typeface="Segoe UI"/>
+            </a:endParaRPr>
           </a:p>
           <a:p>
             <a:pPr>
@@ -13155,13 +15383,85 @@
               </a:spcAft>
             </a:pPr>
             <a:r>
-              <a:rPr sz="1100" b="0">
-                <a:solidFill>
-                  <a:srgbClr val="46565C"/>
-                </a:solidFill>
-                <a:latin typeface="Segoe UI"/>
-              </a:rPr>
-              <a:t>Gemini limita a 20 peticiones AL DÍA por modelo.</a:t>
+              <a:rPr sz="1100" b="0" dirty="0">
+                <a:solidFill>
+                  <a:srgbClr val="46565C"/>
+                </a:solidFill>
+                <a:latin typeface="Segoe UI"/>
+              </a:rPr>
+              <a:t>Gemini </a:t>
+            </a:r>
+            <a:r>
+              <a:rPr sz="1100" b="0" dirty="0" err="1">
+                <a:solidFill>
+                  <a:srgbClr val="46565C"/>
+                </a:solidFill>
+                <a:latin typeface="Segoe UI"/>
+              </a:rPr>
+              <a:t>limita</a:t>
+            </a:r>
+            <a:r>
+              <a:rPr sz="1100" b="0" dirty="0">
+                <a:solidFill>
+                  <a:srgbClr val="46565C"/>
+                </a:solidFill>
+                <a:latin typeface="Segoe UI"/>
+              </a:rPr>
+              <a:t> a 20 </a:t>
+            </a:r>
+            <a:r>
+              <a:rPr sz="1100" b="0" dirty="0" err="1">
+                <a:solidFill>
+                  <a:srgbClr val="46565C"/>
+                </a:solidFill>
+                <a:latin typeface="Segoe UI"/>
+              </a:rPr>
+              <a:t>peticiones</a:t>
+            </a:r>
+            <a:r>
+              <a:rPr sz="1100" b="0" dirty="0">
+                <a:solidFill>
+                  <a:srgbClr val="46565C"/>
+                </a:solidFill>
+                <a:latin typeface="Segoe UI"/>
+              </a:rPr>
+              <a:t> AL DÍA </a:t>
+            </a:r>
+            <a:r>
+              <a:rPr sz="1100" b="0" dirty="0" err="1">
+                <a:solidFill>
+                  <a:srgbClr val="46565C"/>
+                </a:solidFill>
+                <a:latin typeface="Segoe UI"/>
+              </a:rPr>
+              <a:t>por</a:t>
+            </a:r>
+            <a:r>
+              <a:rPr sz="1100" b="0" dirty="0">
+                <a:solidFill>
+                  <a:srgbClr val="46565C"/>
+                </a:solidFill>
+                <a:latin typeface="Segoe UI"/>
+              </a:rPr>
+              <a:t> </a:t>
+            </a:r>
+            <a:r>
+              <a:rPr sz="1100" b="0" dirty="0" err="1">
+                <a:solidFill>
+                  <a:srgbClr val="46565C"/>
+                </a:solidFill>
+                <a:latin typeface="Segoe UI"/>
+              </a:rPr>
+              <a:t>modelo</a:t>
+            </a:r>
+            <a:r>
+              <a:rPr sz="1100" b="0" dirty="0">
+                <a:solidFill>
+                  <a:srgbClr val="46565C"/>
+                </a:solidFill>
+                <a:latin typeface="Segoe UI"/>
+              </a:rPr>
+              <a:t>.</a:t>
             </a:r>
           </a:p>
           <a:p>
@@ -13171,170 +15471,56 @@
               </a:spcAft>
             </a:pPr>
             <a:r>
-              <a:rPr sz="1100" b="0">
-                <a:solidFill>
-                  <a:srgbClr val="46565C"/>
-                </a:solidFill>
-                <a:latin typeface="Segoe UI"/>
-              </a:rPr>
-              <a:t>Migrar a OpenAI tocó un solo archivo.</a:t>
-            </a:r>
-          </a:p>
-        </p:txBody>
-      </p:sp>
-      <p:sp>
-        <p:nvSpPr>
-          <p:cNvPr id="42" name="Rectangle 41"/>
-          <p:cNvSpPr/>
-          <p:nvPr/>
-        </p:nvSpPr>
-        <p:spPr>
-          <a:xfrm>
-            <a:off x="6336792" y="4526280"/>
-            <a:ext cx="5120640" cy="1234440"/>
-          </a:xfrm>
-          <a:prstGeom prst="rect">
-            <a:avLst/>
-          </a:prstGeom>
-          <a:solidFill>
-            <a:srgbClr val="F2F5F6"/>
-          </a:solidFill>
-          <a:ln w="9525">
-            <a:solidFill>
-              <a:srgbClr val="D2DBDE"/>
-            </a:solidFill>
-          </a:ln>
-          <a:effectLst/>
-        </p:spPr>
-        <p:style>
-          <a:lnRef idx="1">
-            <a:schemeClr val="accent1"/>
-          </a:lnRef>
-          <a:fillRef idx="3">
-            <a:schemeClr val="accent1"/>
-          </a:fillRef>
-          <a:effectRef idx="2">
-            <a:schemeClr val="accent1"/>
-          </a:effectRef>
-          <a:fontRef idx="minor">
-            <a:schemeClr val="lt1"/>
-          </a:fontRef>
-        </p:style>
-        <p:txBody>
-          <a:bodyPr rtlCol="0" anchor="ctr"/>
-          <a:lstStyle/>
-          <a:p>
-            <a:pPr algn="ctr"/>
-          </a:p>
-        </p:txBody>
-      </p:sp>
-      <p:sp>
-        <p:nvSpPr>
-          <p:cNvPr id="43" name="TextBox 42"/>
-          <p:cNvSpPr txBox="1"/>
-          <p:nvPr/>
-        </p:nvSpPr>
-        <p:spPr>
-          <a:xfrm>
-            <a:off x="6501384" y="4654296"/>
-            <a:ext cx="4791456" cy="978408"/>
-          </a:xfrm>
-          <a:prstGeom prst="rect">
-            <a:avLst/>
-          </a:prstGeom>
-          <a:noFill/>
-        </p:spPr>
-        <p:txBody>
-          <a:bodyPr wrap="square" anchor="t" lIns="0" rIns="0" tIns="0" bIns="0">
-            <a:spAutoFit/>
-          </a:bodyPr>
-          <a:lstStyle/>
-          <a:p>
-            <a:pPr algn="l">
-              <a:spcAft>
-                <a:spcPts val="400"/>
-              </a:spcAft>
-            </a:pPr>
-            <a:r>
-              <a:rPr sz="1300" b="1">
-                <a:solidFill>
-                  <a:srgbClr val="101619"/>
-                </a:solidFill>
-                <a:latin typeface="Segoe UI"/>
-              </a:rPr>
-              <a:t>202 + polling en el Módulo I</a:t>
-            </a:r>
-          </a:p>
-          <a:p>
-            <a:pPr>
-              <a:spcAft>
-                <a:spcPts val="400"/>
-              </a:spcAft>
-            </a:pPr>
-            <a:r>
-              <a:rPr sz="1100" b="0">
-                <a:solidFill>
-                  <a:srgbClr val="46565C"/>
-                </a:solidFill>
-                <a:latin typeface="Segoe UI"/>
-              </a:rPr>
-              <a:t>80 s de generación no caben en un request que</a:t>
-            </a:r>
-          </a:p>
-          <a:p>
-            <a:pPr>
-              <a:spcAft>
-                <a:spcPts val="400"/>
-              </a:spcAft>
-            </a:pPr>
-            <a:r>
-              <a:rPr sz="1100" b="0">
-                <a:solidFill>
-                  <a:srgbClr val="46565C"/>
-                </a:solidFill>
-                <a:latin typeface="Segoe UI"/>
-              </a:rPr>
-              <a:t>deba sobrevivir a un refresh del navegador.</a:t>
-            </a:r>
-          </a:p>
-        </p:txBody>
-      </p:sp>
-      <p:sp>
-        <p:nvSpPr>
-          <p:cNvPr id="44" name="TextBox 43"/>
-          <p:cNvSpPr txBox="1"/>
-          <p:nvPr/>
-        </p:nvSpPr>
-        <p:spPr>
-          <a:xfrm>
-            <a:off x="960120" y="6035040"/>
-            <a:ext cx="10515600" cy="365760"/>
-          </a:xfrm>
-          <a:prstGeom prst="rect">
-            <a:avLst/>
-          </a:prstGeom>
-          <a:noFill/>
-        </p:spPr>
-        <p:txBody>
-          <a:bodyPr wrap="square" anchor="t" lIns="0" rIns="0" tIns="0" bIns="0">
-            <a:spAutoFit/>
-          </a:bodyPr>
-          <a:lstStyle/>
-          <a:p>
-            <a:pPr algn="l">
-              <a:spcAft>
-                <a:spcPts val="400"/>
-              </a:spcAft>
-            </a:pPr>
-            <a:r>
-              <a:rPr sz="1100" b="0">
-                <a:solidFill>
-                  <a:srgbClr val="74868C"/>
-                </a:solidFill>
-                <a:latin typeface="Segoe UI"/>
-              </a:rPr>
-              <a:t>Las diez decisiones completas, con su contexto, están documentadas en el README.</a:t>
-            </a:r>
+              <a:rPr lang="es-PE" sz="1100" b="0" dirty="0">
+                <a:solidFill>
+                  <a:srgbClr val="46565C"/>
+                </a:solidFill>
+                <a:latin typeface="Segoe UI"/>
+              </a:rPr>
+              <a:t>Se mi</a:t>
+            </a:r>
+            <a:r>
+              <a:rPr sz="1100" b="0" dirty="0">
+                <a:solidFill>
+                  <a:srgbClr val="46565C"/>
+                </a:solidFill>
+                <a:latin typeface="Segoe UI"/>
+              </a:rPr>
+              <a:t>gr</a:t>
+            </a:r>
+            <a:r>
+              <a:rPr lang="es-PE" sz="1100" b="0" dirty="0" err="1">
+                <a:solidFill>
+                  <a:srgbClr val="46565C"/>
+                </a:solidFill>
+                <a:latin typeface="Segoe UI"/>
+              </a:rPr>
+              <a:t>ó</a:t>
+            </a:r>
+            <a:r>
+              <a:rPr sz="1100" b="0" dirty="0">
+                <a:solidFill>
+                  <a:srgbClr val="46565C"/>
+                </a:solidFill>
+                <a:latin typeface="Segoe UI"/>
+              </a:rPr>
+              <a:t> a OpenAI</a:t>
+            </a:r>
+            <a:r>
+              <a:rPr lang="es-PE" sz="1100" b="0" dirty="0">
+                <a:solidFill>
+                  <a:srgbClr val="46565C"/>
+                </a:solidFill>
+                <a:latin typeface="Segoe UI"/>
+              </a:rPr>
+              <a:t>.</a:t>
+            </a:r>
+            <a:endParaRPr sz="1100" b="0" dirty="0">
+              <a:solidFill>
+                <a:srgbClr val="46565C"/>
+              </a:solidFill>
+              <a:latin typeface="Segoe UI"/>
+            </a:endParaRPr>
           </a:p>
         </p:txBody>
       </p:sp>
@@ -13347,7 +15533,7 @@
 </file>
 
 <file path=ppt/slides/slide6.xml><?xml version="1.0" encoding="utf-8"?>
-<p:sld xmlns:a="http://schemas.openxmlformats.org/drawingml/2006/main" xmlns:p="http://schemas.openxmlformats.org/presentationml/2006/main" xmlns:r="http://schemas.openxmlformats.org/officeDocument/2006/relationships">
+<p:sld xmlns:a="http://schemas.openxmlformats.org/drawingml/2006/main" xmlns:r="http://schemas.openxmlformats.org/officeDocument/2006/relationships" xmlns:p="http://schemas.openxmlformats.org/presentationml/2006/main">
   <p:cSld>
     <p:bg>
       <p:bgPr>
@@ -13363,7 +15549,14 @@
         <p:cNvGrpSpPr/>
         <p:nvPr/>
       </p:nvGrpSpPr>
-      <p:grpSpPr/>
+      <p:grpSpPr>
+        <a:xfrm>
+          <a:off x="0" y="0"/>
+          <a:ext cx="0" cy="0"/>
+          <a:chOff x="0" y="0"/>
+          <a:chExt cx="0" cy="0"/>
+        </a:xfrm>
+      </p:grpSpPr>
       <p:sp>
         <p:nvSpPr>
           <p:cNvPr id="2" name="Rectangle 1"/>
@@ -13405,6 +15598,7 @@
           <a:lstStyle/>
           <a:p>
             <a:pPr algn="ctr"/>
+            <a:endParaRPr/>
           </a:p>
         </p:txBody>
       </p:sp>
@@ -13425,7 +15619,7 @@
           <a:noFill/>
         </p:spPr>
         <p:txBody>
-          <a:bodyPr wrap="square" anchor="t" lIns="0" rIns="0" tIns="0" bIns="0">
+          <a:bodyPr wrap="square" lIns="0" tIns="0" rIns="0" bIns="0" anchor="t">
             <a:spAutoFit/>
           </a:bodyPr>
           <a:lstStyle/>
@@ -13488,6 +15682,7 @@
           <a:lstStyle/>
           <a:p>
             <a:pPr algn="ctr"/>
+            <a:endParaRPr/>
           </a:p>
         </p:txBody>
       </p:sp>
@@ -13532,6 +15727,7 @@
           <a:lstStyle/>
           <a:p>
             <a:pPr algn="ctr"/>
+            <a:endParaRPr/>
           </a:p>
         </p:txBody>
       </p:sp>
@@ -13576,6 +15772,7 @@
           <a:lstStyle/>
           <a:p>
             <a:pPr algn="ctr"/>
+            <a:endParaRPr/>
           </a:p>
         </p:txBody>
       </p:sp>
@@ -13620,6 +15817,7 @@
           <a:lstStyle/>
           <a:p>
             <a:pPr algn="ctr"/>
+            <a:endParaRPr/>
           </a:p>
         </p:txBody>
       </p:sp>
@@ -13664,6 +15862,7 @@
           <a:lstStyle/>
           <a:p>
             <a:pPr algn="ctr"/>
+            <a:endParaRPr/>
           </a:p>
         </p:txBody>
       </p:sp>
@@ -13708,6 +15907,7 @@
           <a:lstStyle/>
           <a:p>
             <a:pPr algn="ctr"/>
+            <a:endParaRPr/>
           </a:p>
         </p:txBody>
       </p:sp>
@@ -13752,6 +15952,7 @@
           <a:lstStyle/>
           <a:p>
             <a:pPr algn="ctr"/>
+            <a:endParaRPr/>
           </a:p>
         </p:txBody>
       </p:sp>
@@ -13796,6 +15997,7 @@
           <a:lstStyle/>
           <a:p>
             <a:pPr algn="ctr"/>
+            <a:endParaRPr/>
           </a:p>
         </p:txBody>
       </p:sp>
@@ -13840,6 +16042,7 @@
           <a:lstStyle/>
           <a:p>
             <a:pPr algn="ctr"/>
+            <a:endParaRPr/>
           </a:p>
         </p:txBody>
       </p:sp>
@@ -13884,6 +16087,7 @@
           <a:lstStyle/>
           <a:p>
             <a:pPr algn="ctr"/>
+            <a:endParaRPr/>
           </a:p>
         </p:txBody>
       </p:sp>
@@ -13928,6 +16132,7 @@
           <a:lstStyle/>
           <a:p>
             <a:pPr algn="ctr"/>
+            <a:endParaRPr/>
           </a:p>
         </p:txBody>
       </p:sp>
@@ -13972,6 +16177,7 @@
           <a:lstStyle/>
           <a:p>
             <a:pPr algn="ctr"/>
+            <a:endParaRPr/>
           </a:p>
         </p:txBody>
       </p:sp>
@@ -14016,6 +16222,7 @@
           <a:lstStyle/>
           <a:p>
             <a:pPr algn="ctr"/>
+            <a:endParaRPr/>
           </a:p>
         </p:txBody>
       </p:sp>
@@ -14060,6 +16267,7 @@
           <a:lstStyle/>
           <a:p>
             <a:pPr algn="ctr"/>
+            <a:endParaRPr/>
           </a:p>
         </p:txBody>
       </p:sp>
@@ -14104,6 +16312,7 @@
           <a:lstStyle/>
           <a:p>
             <a:pPr algn="ctr"/>
+            <a:endParaRPr/>
           </a:p>
         </p:txBody>
       </p:sp>
@@ -14148,6 +16357,7 @@
           <a:lstStyle/>
           <a:p>
             <a:pPr algn="ctr"/>
+            <a:endParaRPr/>
           </a:p>
         </p:txBody>
       </p:sp>
@@ -14192,6 +16402,7 @@
           <a:lstStyle/>
           <a:p>
             <a:pPr algn="ctr"/>
+            <a:endParaRPr/>
           </a:p>
         </p:txBody>
       </p:sp>
@@ -14236,6 +16447,7 @@
           <a:lstStyle/>
           <a:p>
             <a:pPr algn="ctr"/>
+            <a:endParaRPr/>
           </a:p>
         </p:txBody>
       </p:sp>
@@ -14280,6 +16492,7 @@
           <a:lstStyle/>
           <a:p>
             <a:pPr algn="ctr"/>
+            <a:endParaRPr/>
           </a:p>
         </p:txBody>
       </p:sp>
@@ -14324,6 +16537,7 @@
           <a:lstStyle/>
           <a:p>
             <a:pPr algn="ctr"/>
+            <a:endParaRPr/>
           </a:p>
         </p:txBody>
       </p:sp>
@@ -14368,6 +16582,7 @@
           <a:lstStyle/>
           <a:p>
             <a:pPr algn="ctr"/>
+            <a:endParaRPr/>
           </a:p>
         </p:txBody>
       </p:sp>
@@ -14412,6 +16627,7 @@
           <a:lstStyle/>
           <a:p>
             <a:pPr algn="ctr"/>
+            <a:endParaRPr/>
           </a:p>
         </p:txBody>
       </p:sp>
@@ -14456,6 +16672,7 @@
           <a:lstStyle/>
           <a:p>
             <a:pPr algn="ctr"/>
+            <a:endParaRPr/>
           </a:p>
         </p:txBody>
       </p:sp>
@@ -14500,6 +16717,7 @@
           <a:lstStyle/>
           <a:p>
             <a:pPr algn="ctr"/>
+            <a:endParaRPr/>
           </a:p>
         </p:txBody>
       </p:sp>
@@ -14544,6 +16762,7 @@
           <a:lstStyle/>
           <a:p>
             <a:pPr algn="ctr"/>
+            <a:endParaRPr/>
           </a:p>
         </p:txBody>
       </p:sp>
@@ -14588,6 +16807,7 @@
           <a:lstStyle/>
           <a:p>
             <a:pPr algn="ctr"/>
+            <a:endParaRPr/>
           </a:p>
         </p:txBody>
       </p:sp>
@@ -14608,7 +16828,7 @@
           <a:noFill/>
         </p:spPr>
         <p:txBody>
-          <a:bodyPr wrap="square" anchor="t" lIns="0" rIns="0" tIns="0" bIns="0">
+          <a:bodyPr wrap="square" lIns="0" tIns="0" rIns="0" bIns="0" anchor="t">
             <a:spAutoFit/>
           </a:bodyPr>
           <a:lstStyle/>
@@ -14647,7 +16867,7 @@
           <a:noFill/>
         </p:spPr>
         <p:txBody>
-          <a:bodyPr wrap="square" anchor="t" lIns="0" rIns="0" tIns="0" bIns="0">
+          <a:bodyPr wrap="square" lIns="0" tIns="0" rIns="0" bIns="0" anchor="t">
             <a:spAutoFit/>
           </a:bodyPr>
           <a:lstStyle/>
@@ -14686,7 +16906,7 @@
           <a:noFill/>
         </p:spPr>
         <p:txBody>
-          <a:bodyPr wrap="square" anchor="t" lIns="0" rIns="0" tIns="0" bIns="0">
+          <a:bodyPr wrap="square" lIns="0" tIns="0" rIns="0" bIns="0" anchor="t">
             <a:spAutoFit/>
           </a:bodyPr>
           <a:lstStyle/>
@@ -14697,14 +16917,29 @@
               </a:spcAft>
             </a:pPr>
             <a:r>
-              <a:rPr sz="1400" b="1">
+              <a:rPr sz="1400" b="1" dirty="0">
                 <a:solidFill>
                   <a:srgbClr val="0E6C74"/>
                 </a:solidFill>
                 <a:latin typeface="Segoe UI"/>
               </a:rPr>
-              <a:t>Valor al negocio</a:t>
-            </a:r>
+              <a:t>Valor al </a:t>
+            </a:r>
+            <a:r>
+              <a:rPr sz="1400" b="1" dirty="0" err="1">
+                <a:solidFill>
+                  <a:srgbClr val="0E6C74"/>
+                </a:solidFill>
+                <a:latin typeface="Segoe UI"/>
+              </a:rPr>
+              <a:t>negocio</a:t>
+            </a:r>
+            <a:endParaRPr sz="1400" b="1" dirty="0">
+              <a:solidFill>
+                <a:srgbClr val="0E6C74"/>
+              </a:solidFill>
+              <a:latin typeface="Segoe UI"/>
+            </a:endParaRPr>
           </a:p>
           <a:p>
             <a:pPr>
@@ -14713,13 +16948,175 @@
               </a:spcAft>
             </a:pPr>
             <a:r>
-              <a:rPr sz="1200" b="0">
-                <a:solidFill>
-                  <a:srgbClr val="46565C"/>
-                </a:solidFill>
-                <a:latin typeface="Segoe UI"/>
-              </a:rPr>
-              <a:t>·  El manual deja de ser un PDF que nadie abre: se vuelve reglas que el sistema aplica solo.</a:t>
+              <a:rPr sz="1200" b="0" dirty="0">
+                <a:solidFill>
+                  <a:srgbClr val="46565C"/>
+                </a:solidFill>
+                <a:latin typeface="Segoe UI"/>
+              </a:rPr>
+              <a:t>·  El manual </a:t>
+            </a:r>
+            <a:r>
+              <a:rPr sz="1200" b="0" dirty="0" err="1">
+                <a:solidFill>
+                  <a:srgbClr val="46565C"/>
+                </a:solidFill>
+                <a:latin typeface="Segoe UI"/>
+              </a:rPr>
+              <a:t>deja</a:t>
+            </a:r>
+            <a:r>
+              <a:rPr sz="1200" b="0" dirty="0">
+                <a:solidFill>
+                  <a:srgbClr val="46565C"/>
+                </a:solidFill>
+                <a:latin typeface="Segoe UI"/>
+              </a:rPr>
+              <a:t> de ser un PDF </a:t>
+            </a:r>
+            <a:r>
+              <a:rPr sz="1200" b="0" dirty="0" err="1">
+                <a:solidFill>
+                  <a:srgbClr val="46565C"/>
+                </a:solidFill>
+                <a:latin typeface="Segoe UI"/>
+              </a:rPr>
+              <a:t>que</a:t>
+            </a:r>
+            <a:r>
+              <a:rPr sz="1200" b="0" dirty="0">
+                <a:solidFill>
+                  <a:srgbClr val="46565C"/>
+                </a:solidFill>
+                <a:latin typeface="Segoe UI"/>
+              </a:rPr>
+              <a:t> </a:t>
+            </a:r>
+            <a:r>
+              <a:rPr sz="1200" b="0" dirty="0" err="1">
+                <a:solidFill>
+                  <a:srgbClr val="46565C"/>
+                </a:solidFill>
+                <a:latin typeface="Segoe UI"/>
+              </a:rPr>
+              <a:t>nadie</a:t>
+            </a:r>
+            <a:r>
+              <a:rPr sz="1200" b="0" dirty="0">
+                <a:solidFill>
+                  <a:srgbClr val="46565C"/>
+                </a:solidFill>
+                <a:latin typeface="Segoe UI"/>
+              </a:rPr>
+              <a:t> </a:t>
+            </a:r>
+            <a:r>
+              <a:rPr sz="1200" b="0" dirty="0" err="1">
+                <a:solidFill>
+                  <a:srgbClr val="46565C"/>
+                </a:solidFill>
+                <a:latin typeface="Segoe UI"/>
+              </a:rPr>
+              <a:t>abre</a:t>
+            </a:r>
+            <a:r>
+              <a:rPr sz="1200" b="0" dirty="0">
+                <a:solidFill>
+                  <a:srgbClr val="46565C"/>
+                </a:solidFill>
+                <a:latin typeface="Segoe UI"/>
+              </a:rPr>
+              <a:t>: se </a:t>
+            </a:r>
+            <a:r>
+              <a:rPr sz="1200" b="0" dirty="0" err="1">
+                <a:solidFill>
+                  <a:srgbClr val="46565C"/>
+                </a:solidFill>
+                <a:latin typeface="Segoe UI"/>
+              </a:rPr>
+              <a:t>vuelve</a:t>
+            </a:r>
+            <a:r>
+              <a:rPr sz="1200" b="0" dirty="0">
+                <a:solidFill>
+                  <a:srgbClr val="46565C"/>
+                </a:solidFill>
+                <a:latin typeface="Segoe UI"/>
+              </a:rPr>
+              <a:t> </a:t>
+            </a:r>
+            <a:r>
+              <a:rPr sz="1200" b="0" dirty="0" err="1">
+                <a:solidFill>
+                  <a:srgbClr val="46565C"/>
+                </a:solidFill>
+                <a:latin typeface="Segoe UI"/>
+              </a:rPr>
+              <a:t>reglas</a:t>
+            </a:r>
+            <a:r>
+              <a:rPr sz="1200" b="0" dirty="0">
+                <a:solidFill>
+                  <a:srgbClr val="46565C"/>
+                </a:solidFill>
+                <a:latin typeface="Segoe UI"/>
+              </a:rPr>
+              <a:t> </a:t>
+            </a:r>
+            <a:r>
+              <a:rPr sz="1200" b="0" dirty="0" err="1">
+                <a:solidFill>
+                  <a:srgbClr val="46565C"/>
+                </a:solidFill>
+                <a:latin typeface="Segoe UI"/>
+              </a:rPr>
+              <a:t>que</a:t>
+            </a:r>
+            <a:r>
+              <a:rPr sz="1200" b="0" dirty="0">
+                <a:solidFill>
+                  <a:srgbClr val="46565C"/>
+                </a:solidFill>
+                <a:latin typeface="Segoe UI"/>
+              </a:rPr>
+              <a:t> el </a:t>
+            </a:r>
+            <a:r>
+              <a:rPr sz="1200" b="0" dirty="0" err="1">
+                <a:solidFill>
+                  <a:srgbClr val="46565C"/>
+                </a:solidFill>
+                <a:latin typeface="Segoe UI"/>
+              </a:rPr>
+              <a:t>sistema</a:t>
+            </a:r>
+            <a:r>
+              <a:rPr sz="1200" b="0" dirty="0">
+                <a:solidFill>
+                  <a:srgbClr val="46565C"/>
+                </a:solidFill>
+                <a:latin typeface="Segoe UI"/>
+              </a:rPr>
+              <a:t> </a:t>
+            </a:r>
+            <a:r>
+              <a:rPr sz="1200" b="0" dirty="0" err="1">
+                <a:solidFill>
+                  <a:srgbClr val="46565C"/>
+                </a:solidFill>
+                <a:latin typeface="Segoe UI"/>
+              </a:rPr>
+              <a:t>aplica</a:t>
+            </a:r>
+            <a:r>
+              <a:rPr sz="1200" b="0" dirty="0">
+                <a:solidFill>
+                  <a:srgbClr val="46565C"/>
+                </a:solidFill>
+                <a:latin typeface="Segoe UI"/>
+              </a:rPr>
+              <a:t> solo.</a:t>
             </a:r>
           </a:p>
           <a:p>
@@ -14729,13 +17126,211 @@
               </a:spcAft>
             </a:pPr>
             <a:r>
-              <a:rPr sz="1200" b="0">
-                <a:solidFill>
-                  <a:srgbClr val="46565C"/>
-                </a:solidFill>
-                <a:latin typeface="Segoe UI"/>
-              </a:rPr>
-              <a:t>·  La revisión de marca deja de depender de quién esté disponible. Mismo criterio en la pieza 1 y en la 200.</a:t>
+              <a:rPr sz="1200" b="0" dirty="0">
+                <a:solidFill>
+                  <a:srgbClr val="46565C"/>
+                </a:solidFill>
+                <a:latin typeface="Segoe UI"/>
+              </a:rPr>
+              <a:t>·  La </a:t>
+            </a:r>
+            <a:r>
+              <a:rPr sz="1200" b="0" dirty="0" err="1">
+                <a:solidFill>
+                  <a:srgbClr val="46565C"/>
+                </a:solidFill>
+                <a:latin typeface="Segoe UI"/>
+              </a:rPr>
+              <a:t>revisión</a:t>
+            </a:r>
+            <a:r>
+              <a:rPr sz="1200" b="0" dirty="0">
+                <a:solidFill>
+                  <a:srgbClr val="46565C"/>
+                </a:solidFill>
+                <a:latin typeface="Segoe UI"/>
+              </a:rPr>
+              <a:t> de </a:t>
+            </a:r>
+            <a:r>
+              <a:rPr sz="1200" b="0" dirty="0" err="1">
+                <a:solidFill>
+                  <a:srgbClr val="46565C"/>
+                </a:solidFill>
+                <a:latin typeface="Segoe UI"/>
+              </a:rPr>
+              <a:t>marca</a:t>
+            </a:r>
+            <a:r>
+              <a:rPr sz="1200" b="0" dirty="0">
+                <a:solidFill>
+                  <a:srgbClr val="46565C"/>
+                </a:solidFill>
+                <a:latin typeface="Segoe UI"/>
+              </a:rPr>
+              <a:t> </a:t>
+            </a:r>
+            <a:r>
+              <a:rPr sz="1200" b="0" dirty="0" err="1">
+                <a:solidFill>
+                  <a:srgbClr val="46565C"/>
+                </a:solidFill>
+                <a:latin typeface="Segoe UI"/>
+              </a:rPr>
+              <a:t>deja</a:t>
+            </a:r>
+            <a:r>
+              <a:rPr sz="1200" b="0" dirty="0">
+                <a:solidFill>
+                  <a:srgbClr val="46565C"/>
+                </a:solidFill>
+                <a:latin typeface="Segoe UI"/>
+              </a:rPr>
+              <a:t> de </a:t>
+            </a:r>
+            <a:r>
+              <a:rPr sz="1200" b="0" dirty="0" err="1">
+                <a:solidFill>
+                  <a:srgbClr val="46565C"/>
+                </a:solidFill>
+                <a:latin typeface="Segoe UI"/>
+              </a:rPr>
+              <a:t>depender</a:t>
+            </a:r>
+            <a:r>
+              <a:rPr sz="1200" b="0" dirty="0">
+                <a:solidFill>
+                  <a:srgbClr val="46565C"/>
+                </a:solidFill>
+                <a:latin typeface="Segoe UI"/>
+              </a:rPr>
+              <a:t> de </a:t>
+            </a:r>
+            <a:r>
+              <a:rPr sz="1200" b="0" dirty="0" err="1">
+                <a:solidFill>
+                  <a:srgbClr val="46565C"/>
+                </a:solidFill>
+                <a:latin typeface="Segoe UI"/>
+              </a:rPr>
+              <a:t>quién</a:t>
+            </a:r>
+            <a:r>
+              <a:rPr sz="1200" b="0" dirty="0">
+                <a:solidFill>
+                  <a:srgbClr val="46565C"/>
+                </a:solidFill>
+                <a:latin typeface="Segoe UI"/>
+              </a:rPr>
+              <a:t> </a:t>
+            </a:r>
+            <a:r>
+              <a:rPr sz="1200" b="0" dirty="0" err="1">
+                <a:solidFill>
+                  <a:srgbClr val="46565C"/>
+                </a:solidFill>
+                <a:latin typeface="Segoe UI"/>
+              </a:rPr>
+              <a:t>esté</a:t>
+            </a:r>
+            <a:r>
+              <a:rPr sz="1200" b="0" dirty="0">
+                <a:solidFill>
+                  <a:srgbClr val="46565C"/>
+                </a:solidFill>
+                <a:latin typeface="Segoe UI"/>
+              </a:rPr>
+              <a:t> disponible. </a:t>
+            </a:r>
+            <a:r>
+              <a:rPr sz="1200" b="0" dirty="0" err="1">
+                <a:solidFill>
+                  <a:srgbClr val="46565C"/>
+                </a:solidFill>
+                <a:latin typeface="Segoe UI"/>
+              </a:rPr>
+              <a:t>Mismo</a:t>
+            </a:r>
+            <a:r>
+              <a:rPr sz="1200" b="0" dirty="0">
+                <a:solidFill>
+                  <a:srgbClr val="46565C"/>
+                </a:solidFill>
+                <a:latin typeface="Segoe UI"/>
+              </a:rPr>
+              <a:t> </a:t>
+            </a:r>
+            <a:r>
+              <a:rPr sz="1200" b="0" dirty="0" err="1">
+                <a:solidFill>
+                  <a:srgbClr val="46565C"/>
+                </a:solidFill>
+                <a:latin typeface="Segoe UI"/>
+              </a:rPr>
+              <a:t>criterio</a:t>
+            </a:r>
+            <a:r>
+              <a:rPr sz="1200" b="0" dirty="0">
+                <a:solidFill>
+                  <a:srgbClr val="46565C"/>
+                </a:solidFill>
+                <a:latin typeface="Segoe UI"/>
+              </a:rPr>
+              <a:t> </a:t>
+            </a:r>
+            <a:r>
+              <a:rPr sz="1200" b="0" dirty="0" err="1">
+                <a:solidFill>
+                  <a:srgbClr val="46565C"/>
+                </a:solidFill>
+                <a:latin typeface="Segoe UI"/>
+              </a:rPr>
+              <a:t>en</a:t>
+            </a:r>
+            <a:r>
+              <a:rPr sz="1200" b="0" dirty="0">
+                <a:solidFill>
+                  <a:srgbClr val="46565C"/>
+                </a:solidFill>
+                <a:latin typeface="Segoe UI"/>
+              </a:rPr>
+              <a:t> la </a:t>
+            </a:r>
+            <a:r>
+              <a:rPr sz="1200" b="0" dirty="0" err="1">
+                <a:solidFill>
+                  <a:srgbClr val="46565C"/>
+                </a:solidFill>
+                <a:latin typeface="Segoe UI"/>
+              </a:rPr>
+              <a:t>pieza</a:t>
+            </a:r>
+            <a:r>
+              <a:rPr sz="1200" b="0" dirty="0">
+                <a:solidFill>
+                  <a:srgbClr val="46565C"/>
+                </a:solidFill>
+                <a:latin typeface="Segoe UI"/>
+              </a:rPr>
+              <a:t> 1 y </a:t>
+            </a:r>
+            <a:r>
+              <a:rPr sz="1200" b="0" dirty="0" err="1">
+                <a:solidFill>
+                  <a:srgbClr val="46565C"/>
+                </a:solidFill>
+                <a:latin typeface="Segoe UI"/>
+              </a:rPr>
+              <a:t>en</a:t>
+            </a:r>
+            <a:r>
+              <a:rPr sz="1200" b="0" dirty="0">
+                <a:solidFill>
+                  <a:srgbClr val="46565C"/>
+                </a:solidFill>
+                <a:latin typeface="Segoe UI"/>
+              </a:rPr>
+              <a:t> la 200.</a:t>
             </a:r>
           </a:p>
           <a:p>
@@ -14745,13 +17340,229 @@
               </a:spcAft>
             </a:pPr>
             <a:r>
-              <a:rPr sz="1200" b="0">
-                <a:solidFill>
-                  <a:srgbClr val="46565C"/>
-                </a:solidFill>
-                <a:latin typeface="Segoe UI"/>
-              </a:rPr>
-              <a:t>·  Cada decisión es rastreable: un hallazgo cita su regla; una pieza cita las reglas que la guiaron.</a:t>
+              <a:rPr sz="1200" b="0" dirty="0">
+                <a:solidFill>
+                  <a:srgbClr val="46565C"/>
+                </a:solidFill>
+                <a:latin typeface="Segoe UI"/>
+              </a:rPr>
+              <a:t>·  Cada </a:t>
+            </a:r>
+            <a:r>
+              <a:rPr sz="1200" b="0" dirty="0" err="1">
+                <a:solidFill>
+                  <a:srgbClr val="46565C"/>
+                </a:solidFill>
+                <a:latin typeface="Segoe UI"/>
+              </a:rPr>
+              <a:t>decisión</a:t>
+            </a:r>
+            <a:r>
+              <a:rPr sz="1200" b="0" dirty="0">
+                <a:solidFill>
+                  <a:srgbClr val="46565C"/>
+                </a:solidFill>
+                <a:latin typeface="Segoe UI"/>
+              </a:rPr>
+              <a:t> es </a:t>
+            </a:r>
+            <a:r>
+              <a:rPr sz="1200" b="0" dirty="0" err="1">
+                <a:solidFill>
+                  <a:srgbClr val="46565C"/>
+                </a:solidFill>
+                <a:latin typeface="Segoe UI"/>
+              </a:rPr>
+              <a:t>rastreable</a:t>
+            </a:r>
+            <a:r>
+              <a:rPr sz="1200" b="0" dirty="0">
+                <a:solidFill>
+                  <a:srgbClr val="46565C"/>
+                </a:solidFill>
+                <a:latin typeface="Segoe UI"/>
+              </a:rPr>
+              <a:t>: un </a:t>
+            </a:r>
+            <a:r>
+              <a:rPr sz="1200" b="0" dirty="0" err="1">
+                <a:solidFill>
+                  <a:srgbClr val="46565C"/>
+                </a:solidFill>
+                <a:latin typeface="Segoe UI"/>
+              </a:rPr>
+              <a:t>hallazgo</a:t>
+            </a:r>
+            <a:r>
+              <a:rPr sz="1200" b="0" dirty="0">
+                <a:solidFill>
+                  <a:srgbClr val="46565C"/>
+                </a:solidFill>
+                <a:latin typeface="Segoe UI"/>
+              </a:rPr>
+              <a:t> </a:t>
+            </a:r>
+            <a:r>
+              <a:rPr sz="1200" b="0" dirty="0" err="1">
+                <a:solidFill>
+                  <a:srgbClr val="46565C"/>
+                </a:solidFill>
+                <a:latin typeface="Segoe UI"/>
+              </a:rPr>
+              <a:t>cita</a:t>
+            </a:r>
+            <a:r>
+              <a:rPr sz="1200" b="0" dirty="0">
+                <a:solidFill>
+                  <a:srgbClr val="46565C"/>
+                </a:solidFill>
+                <a:latin typeface="Segoe UI"/>
+              </a:rPr>
+              <a:t> </a:t>
+            </a:r>
+            <a:r>
+              <a:rPr sz="1200" b="0" dirty="0" err="1">
+                <a:solidFill>
+                  <a:srgbClr val="46565C"/>
+                </a:solidFill>
+                <a:latin typeface="Segoe UI"/>
+              </a:rPr>
+              <a:t>su</a:t>
+            </a:r>
+            <a:r>
+              <a:rPr sz="1200" b="0" dirty="0">
+                <a:solidFill>
+                  <a:srgbClr val="46565C"/>
+                </a:solidFill>
+                <a:latin typeface="Segoe UI"/>
+              </a:rPr>
+              <a:t> </a:t>
+            </a:r>
+            <a:r>
+              <a:rPr sz="1200" b="0" dirty="0" err="1">
+                <a:solidFill>
+                  <a:srgbClr val="46565C"/>
+                </a:solidFill>
+                <a:latin typeface="Segoe UI"/>
+              </a:rPr>
+              <a:t>regla</a:t>
+            </a:r>
+            <a:r>
+              <a:rPr sz="1200" b="0" dirty="0">
+                <a:solidFill>
+                  <a:srgbClr val="46565C"/>
+                </a:solidFill>
+                <a:latin typeface="Segoe UI"/>
+              </a:rPr>
+              <a:t>; </a:t>
+            </a:r>
+            <a:r>
+              <a:rPr sz="1200" b="0" dirty="0" err="1">
+                <a:solidFill>
+                  <a:srgbClr val="46565C"/>
+                </a:solidFill>
+                <a:latin typeface="Segoe UI"/>
+              </a:rPr>
+              <a:t>una</a:t>
+            </a:r>
+            <a:r>
+              <a:rPr sz="1200" b="0" dirty="0">
+                <a:solidFill>
+                  <a:srgbClr val="46565C"/>
+                </a:solidFill>
+                <a:latin typeface="Segoe UI"/>
+              </a:rPr>
+              <a:t> </a:t>
+            </a:r>
+            <a:r>
+              <a:rPr sz="1200" b="0" dirty="0" err="1">
+                <a:solidFill>
+                  <a:srgbClr val="46565C"/>
+                </a:solidFill>
+                <a:latin typeface="Segoe UI"/>
+              </a:rPr>
+              <a:t>pieza</a:t>
+            </a:r>
+            <a:r>
+              <a:rPr sz="1200" b="0" dirty="0">
+                <a:solidFill>
+                  <a:srgbClr val="46565C"/>
+                </a:solidFill>
+                <a:latin typeface="Segoe UI"/>
+              </a:rPr>
+              <a:t> </a:t>
+            </a:r>
+            <a:r>
+              <a:rPr sz="1200" b="0" dirty="0" err="1">
+                <a:solidFill>
+                  <a:srgbClr val="46565C"/>
+                </a:solidFill>
+                <a:latin typeface="Segoe UI"/>
+              </a:rPr>
+              <a:t>cita</a:t>
+            </a:r>
+            <a:r>
+              <a:rPr sz="1200" b="0" dirty="0">
+                <a:solidFill>
+                  <a:srgbClr val="46565C"/>
+                </a:solidFill>
+                <a:latin typeface="Segoe UI"/>
+              </a:rPr>
+              <a:t> las </a:t>
+            </a:r>
+            <a:r>
+              <a:rPr sz="1200" b="0" dirty="0" err="1">
+                <a:solidFill>
+                  <a:srgbClr val="46565C"/>
+                </a:solidFill>
+                <a:latin typeface="Segoe UI"/>
+              </a:rPr>
+              <a:t>reglas</a:t>
+            </a:r>
+            <a:r>
+              <a:rPr sz="1200" b="0" dirty="0">
+                <a:solidFill>
+                  <a:srgbClr val="46565C"/>
+                </a:solidFill>
+                <a:latin typeface="Segoe UI"/>
+              </a:rPr>
+              <a:t> </a:t>
+            </a:r>
+            <a:r>
+              <a:rPr sz="1200" b="0" dirty="0" err="1">
+                <a:solidFill>
+                  <a:srgbClr val="46565C"/>
+                </a:solidFill>
+                <a:latin typeface="Segoe UI"/>
+              </a:rPr>
+              <a:t>que</a:t>
+            </a:r>
+            <a:r>
+              <a:rPr sz="1200" b="0" dirty="0">
+                <a:solidFill>
+                  <a:srgbClr val="46565C"/>
+                </a:solidFill>
+                <a:latin typeface="Segoe UI"/>
+              </a:rPr>
+              <a:t> la </a:t>
+            </a:r>
+            <a:r>
+              <a:rPr sz="1200" b="0" dirty="0" err="1">
+                <a:solidFill>
+                  <a:srgbClr val="46565C"/>
+                </a:solidFill>
+                <a:latin typeface="Segoe UI"/>
+              </a:rPr>
+              <a:t>guiaron</a:t>
+            </a:r>
+            <a:r>
+              <a:rPr sz="1200" b="0" dirty="0">
+                <a:solidFill>
+                  <a:srgbClr val="46565C"/>
+                </a:solidFill>
+                <a:latin typeface="Segoe UI"/>
+              </a:rPr>
+              <a:t>.</a:t>
             </a:r>
           </a:p>
           <a:p>
@@ -14761,13 +17572,121 @@
               </a:spcAft>
             </a:pPr>
             <a:r>
-              <a:rPr sz="1200" b="0">
-                <a:solidFill>
-                  <a:srgbClr val="46565C"/>
-                </a:solidFill>
-                <a:latin typeface="Segoe UI"/>
-              </a:rPr>
-              <a:t>·  Riesgo regulatorio acotado: claims prohibidos y octógonos de la Ley 30021 son reglas del sistema.</a:t>
+              <a:rPr sz="1200" b="0" dirty="0">
+                <a:solidFill>
+                  <a:srgbClr val="46565C"/>
+                </a:solidFill>
+                <a:latin typeface="Segoe UI"/>
+              </a:rPr>
+              <a:t>·  Riesgo </a:t>
+            </a:r>
+            <a:r>
+              <a:rPr sz="1200" b="0" dirty="0" err="1">
+                <a:solidFill>
+                  <a:srgbClr val="46565C"/>
+                </a:solidFill>
+                <a:latin typeface="Segoe UI"/>
+              </a:rPr>
+              <a:t>regulatorio</a:t>
+            </a:r>
+            <a:r>
+              <a:rPr sz="1200" b="0" dirty="0">
+                <a:solidFill>
+                  <a:srgbClr val="46565C"/>
+                </a:solidFill>
+                <a:latin typeface="Segoe UI"/>
+              </a:rPr>
+              <a:t> </a:t>
+            </a:r>
+            <a:r>
+              <a:rPr sz="1200" b="0" dirty="0" err="1">
+                <a:solidFill>
+                  <a:srgbClr val="46565C"/>
+                </a:solidFill>
+                <a:latin typeface="Segoe UI"/>
+              </a:rPr>
+              <a:t>acotado</a:t>
+            </a:r>
+            <a:r>
+              <a:rPr sz="1200" b="0" dirty="0">
+                <a:solidFill>
+                  <a:srgbClr val="46565C"/>
+                </a:solidFill>
+                <a:latin typeface="Segoe UI"/>
+              </a:rPr>
+              <a:t>: claims </a:t>
+            </a:r>
+            <a:r>
+              <a:rPr sz="1200" b="0" dirty="0" err="1">
+                <a:solidFill>
+                  <a:srgbClr val="46565C"/>
+                </a:solidFill>
+                <a:latin typeface="Segoe UI"/>
+              </a:rPr>
+              <a:t>prohibidos</a:t>
+            </a:r>
+            <a:r>
+              <a:rPr sz="1200" b="0" dirty="0">
+                <a:solidFill>
+                  <a:srgbClr val="46565C"/>
+                </a:solidFill>
+                <a:latin typeface="Segoe UI"/>
+              </a:rPr>
+              <a:t> y </a:t>
+            </a:r>
+            <a:r>
+              <a:rPr sz="1200" b="0" dirty="0" err="1">
+                <a:solidFill>
+                  <a:srgbClr val="46565C"/>
+                </a:solidFill>
+                <a:latin typeface="Segoe UI"/>
+              </a:rPr>
+              <a:t>octógonos</a:t>
+            </a:r>
+            <a:r>
+              <a:rPr sz="1200" b="0" dirty="0">
+                <a:solidFill>
+                  <a:srgbClr val="46565C"/>
+                </a:solidFill>
+                <a:latin typeface="Segoe UI"/>
+              </a:rPr>
+              <a:t> de la Ley 30021 son </a:t>
+            </a:r>
+            <a:r>
+              <a:rPr sz="1200" b="0" dirty="0" err="1">
+                <a:solidFill>
+                  <a:srgbClr val="46565C"/>
+                </a:solidFill>
+                <a:latin typeface="Segoe UI"/>
+              </a:rPr>
+              <a:t>reglas</a:t>
+            </a:r>
+            <a:r>
+              <a:rPr sz="1200" b="0" dirty="0">
+                <a:solidFill>
+                  <a:srgbClr val="46565C"/>
+                </a:solidFill>
+                <a:latin typeface="Segoe UI"/>
+              </a:rPr>
+              <a:t> del </a:t>
+            </a:r>
+            <a:r>
+              <a:rPr sz="1200" b="0" dirty="0" err="1">
+                <a:solidFill>
+                  <a:srgbClr val="46565C"/>
+                </a:solidFill>
+                <a:latin typeface="Segoe UI"/>
+              </a:rPr>
+              <a:t>sistema</a:t>
+            </a:r>
+            <a:r>
+              <a:rPr sz="1200" b="0" dirty="0">
+                <a:solidFill>
+                  <a:srgbClr val="46565C"/>
+                </a:solidFill>
+                <a:latin typeface="Segoe UI"/>
+              </a:rPr>
+              <a:t>.</a:t>
             </a:r>
           </a:p>
         </p:txBody>
@@ -14789,7 +17708,7 @@
           <a:noFill/>
         </p:spPr>
         <p:txBody>
-          <a:bodyPr wrap="square" anchor="t" lIns="0" rIns="0" tIns="0" bIns="0">
+          <a:bodyPr wrap="square" lIns="0" tIns="0" rIns="0" bIns="0" anchor="t">
             <a:spAutoFit/>
           </a:bodyPr>
           <a:lstStyle/>
@@ -14800,14 +17719,38 @@
               </a:spcAft>
             </a:pPr>
             <a:r>
-              <a:rPr sz="1400" b="1">
+              <a:rPr sz="1400" b="1" dirty="0" err="1">
                 <a:solidFill>
                   <a:srgbClr val="A8271F"/>
                 </a:solidFill>
                 <a:latin typeface="Segoe UI"/>
               </a:rPr>
-              <a:t>Limitaciones, sin maquillar</a:t>
-            </a:r>
+              <a:t>Limitaciones</a:t>
+            </a:r>
+            <a:r>
+              <a:rPr sz="1400" b="1" dirty="0">
+                <a:solidFill>
+                  <a:srgbClr val="A8271F"/>
+                </a:solidFill>
+                <a:latin typeface="Segoe UI"/>
+              </a:rPr>
+              <a:t>, sin </a:t>
+            </a:r>
+            <a:r>
+              <a:rPr sz="1400" b="1" dirty="0" err="1">
+                <a:solidFill>
+                  <a:srgbClr val="A8271F"/>
+                </a:solidFill>
+                <a:latin typeface="Segoe UI"/>
+              </a:rPr>
+              <a:t>maquillar</a:t>
+            </a:r>
+            <a:endParaRPr sz="1400" b="1" dirty="0">
+              <a:solidFill>
+                <a:srgbClr val="A8271F"/>
+              </a:solidFill>
+              <a:latin typeface="Segoe UI"/>
+            </a:endParaRPr>
           </a:p>
           <a:p>
             <a:pPr>
@@ -14816,13 +17759,265 @@
               </a:spcAft>
             </a:pPr>
             <a:r>
-              <a:rPr sz="1200" b="0">
-                <a:solidFill>
-                  <a:srgbClr val="46565C"/>
-                </a:solidFill>
-                <a:latin typeface="Segoe UI"/>
-              </a:rPr>
-              <a:t>·  La auditoría visual estima proporciones, no mide píxeles. Acertó (44 px sobre 43 reales), pero cada hallazgo lleva confidence por eso.</a:t>
+              <a:rPr sz="1200" b="0" dirty="0">
+                <a:solidFill>
+                  <a:srgbClr val="46565C"/>
+                </a:solidFill>
+                <a:latin typeface="Segoe UI"/>
+              </a:rPr>
+              <a:t>·  La </a:t>
+            </a:r>
+            <a:r>
+              <a:rPr sz="1200" b="0" dirty="0" err="1">
+                <a:solidFill>
+                  <a:srgbClr val="46565C"/>
+                </a:solidFill>
+                <a:latin typeface="Segoe UI"/>
+              </a:rPr>
+              <a:t>auditoría</a:t>
+            </a:r>
+            <a:r>
+              <a:rPr sz="1200" b="0" dirty="0">
+                <a:solidFill>
+                  <a:srgbClr val="46565C"/>
+                </a:solidFill>
+                <a:latin typeface="Segoe UI"/>
+              </a:rPr>
+              <a:t> visual </a:t>
+            </a:r>
+            <a:r>
+              <a:rPr sz="1200" b="0" dirty="0" err="1">
+                <a:solidFill>
+                  <a:srgbClr val="46565C"/>
+                </a:solidFill>
+                <a:latin typeface="Segoe UI"/>
+              </a:rPr>
+              <a:t>estima</a:t>
+            </a:r>
+            <a:r>
+              <a:rPr sz="1200" b="0" dirty="0">
+                <a:solidFill>
+                  <a:srgbClr val="46565C"/>
+                </a:solidFill>
+                <a:latin typeface="Segoe UI"/>
+              </a:rPr>
+              <a:t> </a:t>
+            </a:r>
+            <a:r>
+              <a:rPr sz="1200" b="0" dirty="0" err="1">
+                <a:solidFill>
+                  <a:srgbClr val="46565C"/>
+                </a:solidFill>
+                <a:latin typeface="Segoe UI"/>
+              </a:rPr>
+              <a:t>proporciones</a:t>
+            </a:r>
+            <a:r>
+              <a:rPr sz="1200" b="0" dirty="0">
+                <a:solidFill>
+                  <a:srgbClr val="46565C"/>
+                </a:solidFill>
+                <a:latin typeface="Segoe UI"/>
+              </a:rPr>
+              <a:t>, no </a:t>
+            </a:r>
+            <a:r>
+              <a:rPr sz="1200" b="0" dirty="0" err="1">
+                <a:solidFill>
+                  <a:srgbClr val="46565C"/>
+                </a:solidFill>
+                <a:latin typeface="Segoe UI"/>
+              </a:rPr>
+              <a:t>mide</a:t>
+            </a:r>
+            <a:r>
+              <a:rPr sz="1200" b="0" dirty="0">
+                <a:solidFill>
+                  <a:srgbClr val="46565C"/>
+                </a:solidFill>
+                <a:latin typeface="Segoe UI"/>
+              </a:rPr>
+              <a:t> </a:t>
+            </a:r>
+            <a:r>
+              <a:rPr sz="1200" b="0" dirty="0" err="1">
+                <a:solidFill>
+                  <a:srgbClr val="46565C"/>
+                </a:solidFill>
+                <a:latin typeface="Segoe UI"/>
+              </a:rPr>
+              <a:t>píxeles</a:t>
+            </a:r>
+            <a:r>
+              <a:rPr sz="1200" b="0" dirty="0">
+                <a:solidFill>
+                  <a:srgbClr val="46565C"/>
+                </a:solidFill>
+                <a:latin typeface="Segoe UI"/>
+              </a:rPr>
+              <a:t>. </a:t>
+            </a:r>
+            <a:r>
+              <a:rPr sz="1200" b="0" dirty="0" err="1">
+                <a:solidFill>
+                  <a:srgbClr val="46565C"/>
+                </a:solidFill>
+                <a:latin typeface="Segoe UI"/>
+              </a:rPr>
+              <a:t>Acertó</a:t>
+            </a:r>
+            <a:r>
+              <a:rPr sz="1200" b="0" dirty="0">
+                <a:solidFill>
+                  <a:srgbClr val="46565C"/>
+                </a:solidFill>
+                <a:latin typeface="Segoe UI"/>
+              </a:rPr>
+              <a:t> (44 </a:t>
+            </a:r>
+            <a:r>
+              <a:rPr sz="1200" b="0" dirty="0" err="1">
+                <a:solidFill>
+                  <a:srgbClr val="46565C"/>
+                </a:solidFill>
+                <a:latin typeface="Segoe UI"/>
+              </a:rPr>
+              <a:t>px</a:t>
+            </a:r>
+            <a:r>
+              <a:rPr sz="1200" b="0" dirty="0">
+                <a:solidFill>
+                  <a:srgbClr val="46565C"/>
+                </a:solidFill>
+                <a:latin typeface="Segoe UI"/>
+              </a:rPr>
+              <a:t> </a:t>
+            </a:r>
+            <a:r>
+              <a:rPr sz="1200" b="0" dirty="0" err="1">
+                <a:solidFill>
+                  <a:srgbClr val="46565C"/>
+                </a:solidFill>
+                <a:latin typeface="Segoe UI"/>
+              </a:rPr>
+              <a:t>sobre</a:t>
+            </a:r>
+            <a:r>
+              <a:rPr sz="1200" b="0" dirty="0">
+                <a:solidFill>
+                  <a:srgbClr val="46565C"/>
+                </a:solidFill>
+                <a:latin typeface="Segoe UI"/>
+              </a:rPr>
+              <a:t> 43 reales), </a:t>
+            </a:r>
+            <a:r>
+              <a:rPr sz="1200" b="0" dirty="0" err="1">
+                <a:solidFill>
+                  <a:srgbClr val="46565C"/>
+                </a:solidFill>
+                <a:latin typeface="Segoe UI"/>
+              </a:rPr>
+              <a:t>pero</a:t>
+            </a:r>
+            <a:r>
+              <a:rPr sz="1200" b="0" dirty="0">
+                <a:solidFill>
+                  <a:srgbClr val="46565C"/>
+                </a:solidFill>
+                <a:latin typeface="Segoe UI"/>
+              </a:rPr>
+              <a:t> </a:t>
+            </a:r>
+            <a:r>
+              <a:rPr sz="1200" b="0" dirty="0" err="1">
+                <a:solidFill>
+                  <a:srgbClr val="46565C"/>
+                </a:solidFill>
+                <a:latin typeface="Segoe UI"/>
+              </a:rPr>
+              <a:t>cada</a:t>
+            </a:r>
+            <a:r>
+              <a:rPr sz="1200" b="0" dirty="0">
+                <a:solidFill>
+                  <a:srgbClr val="46565C"/>
+                </a:solidFill>
+                <a:latin typeface="Segoe UI"/>
+              </a:rPr>
+              <a:t> </a:t>
+            </a:r>
+            <a:r>
+              <a:rPr sz="1200" b="0" dirty="0" err="1">
+                <a:solidFill>
+                  <a:srgbClr val="46565C"/>
+                </a:solidFill>
+                <a:latin typeface="Segoe UI"/>
+              </a:rPr>
+              <a:t>hallazgo</a:t>
+            </a:r>
+            <a:r>
+              <a:rPr sz="1200" b="0" dirty="0">
+                <a:solidFill>
+                  <a:srgbClr val="46565C"/>
+                </a:solidFill>
+                <a:latin typeface="Segoe UI"/>
+              </a:rPr>
+              <a:t> </a:t>
+            </a:r>
+            <a:r>
+              <a:rPr sz="1200" b="0" dirty="0" err="1">
+                <a:solidFill>
+                  <a:srgbClr val="46565C"/>
+                </a:solidFill>
+                <a:latin typeface="Segoe UI"/>
+              </a:rPr>
+              <a:t>lleva</a:t>
+            </a:r>
+            <a:r>
+              <a:rPr sz="1200" b="0" dirty="0">
+                <a:solidFill>
+                  <a:srgbClr val="46565C"/>
+                </a:solidFill>
+                <a:latin typeface="Segoe UI"/>
+              </a:rPr>
+              <a:t> confidence </a:t>
+            </a:r>
+            <a:r>
+              <a:rPr sz="1200" b="0" dirty="0" err="1">
+                <a:solidFill>
+                  <a:srgbClr val="46565C"/>
+                </a:solidFill>
+                <a:latin typeface="Segoe UI"/>
+              </a:rPr>
+              <a:t>por</a:t>
+            </a:r>
+            <a:r>
+              <a:rPr sz="1200" b="0" dirty="0">
+                <a:solidFill>
+                  <a:srgbClr val="46565C"/>
+                </a:solidFill>
+                <a:latin typeface="Segoe UI"/>
+              </a:rPr>
+              <a:t> </a:t>
+            </a:r>
+            <a:r>
+              <a:rPr sz="1200" b="0" dirty="0" err="1">
+                <a:solidFill>
+                  <a:srgbClr val="46565C"/>
+                </a:solidFill>
+                <a:latin typeface="Segoe UI"/>
+              </a:rPr>
+              <a:t>eso</a:t>
+            </a:r>
+            <a:r>
+              <a:rPr sz="1200" b="0" dirty="0">
+                <a:solidFill>
+                  <a:srgbClr val="46565C"/>
+                </a:solidFill>
+                <a:latin typeface="Segoe UI"/>
+              </a:rPr>
+              <a:t>.</a:t>
             </a:r>
           </a:p>
           <a:p>
@@ -14832,13 +18027,103 @@
               </a:spcAft>
             </a:pPr>
             <a:r>
-              <a:rPr sz="1200" b="0">
-                <a:solidFill>
-                  <a:srgbClr val="46565C"/>
-                </a:solidFill>
-                <a:latin typeface="Segoe UI"/>
-              </a:rPr>
-              <a:t>·  Cold start de ~60 s en el free tier. Mitigado con keep-alive y datos sembrados; no resuelto.</a:t>
+              <a:rPr sz="1200" b="0" dirty="0">
+                <a:solidFill>
+                  <a:srgbClr val="46565C"/>
+                </a:solidFill>
+                <a:latin typeface="Segoe UI"/>
+              </a:rPr>
+              <a:t>·  Cold start de ~60 s </a:t>
+            </a:r>
+            <a:r>
+              <a:rPr sz="1200" b="0" dirty="0" err="1">
+                <a:solidFill>
+                  <a:srgbClr val="46565C"/>
+                </a:solidFill>
+                <a:latin typeface="Segoe UI"/>
+              </a:rPr>
+              <a:t>en</a:t>
+            </a:r>
+            <a:r>
+              <a:rPr sz="1200" b="0" dirty="0">
+                <a:solidFill>
+                  <a:srgbClr val="46565C"/>
+                </a:solidFill>
+                <a:latin typeface="Segoe UI"/>
+              </a:rPr>
+              <a:t> el free tier. </a:t>
+            </a:r>
+            <a:r>
+              <a:rPr sz="1200" b="0" dirty="0" err="1">
+                <a:solidFill>
+                  <a:srgbClr val="46565C"/>
+                </a:solidFill>
+                <a:latin typeface="Segoe UI"/>
+              </a:rPr>
+              <a:t>Mitigado</a:t>
+            </a:r>
+            <a:r>
+              <a:rPr sz="1200" b="0" dirty="0">
+                <a:solidFill>
+                  <a:srgbClr val="46565C"/>
+                </a:solidFill>
+                <a:latin typeface="Segoe UI"/>
+              </a:rPr>
+              <a:t> con keep-alive y </a:t>
+            </a:r>
+            <a:r>
+              <a:rPr sz="1200" b="0" dirty="0" err="1">
+                <a:solidFill>
+                  <a:srgbClr val="46565C"/>
+                </a:solidFill>
+                <a:latin typeface="Segoe UI"/>
+              </a:rPr>
+              <a:t>datos</a:t>
+            </a:r>
+            <a:r>
+              <a:rPr sz="1200" b="0" dirty="0">
+                <a:solidFill>
+                  <a:srgbClr val="46565C"/>
+                </a:solidFill>
+                <a:latin typeface="Segoe UI"/>
+              </a:rPr>
+              <a:t> </a:t>
+            </a:r>
+            <a:r>
+              <a:rPr sz="1200" b="0" dirty="0" err="1">
+                <a:solidFill>
+                  <a:srgbClr val="46565C"/>
+                </a:solidFill>
+                <a:latin typeface="Segoe UI"/>
+              </a:rPr>
+              <a:t>sembrados</a:t>
+            </a:r>
+            <a:r>
+              <a:rPr sz="1200" b="0" dirty="0">
+                <a:solidFill>
+                  <a:srgbClr val="46565C"/>
+                </a:solidFill>
+                <a:latin typeface="Segoe UI"/>
+              </a:rPr>
+              <a:t>; no </a:t>
+            </a:r>
+            <a:r>
+              <a:rPr sz="1200" b="0" dirty="0" err="1">
+                <a:solidFill>
+                  <a:srgbClr val="46565C"/>
+                </a:solidFill>
+                <a:latin typeface="Segoe UI"/>
+              </a:rPr>
+              <a:t>resuelto</a:t>
+            </a:r>
+            <a:r>
+              <a:rPr sz="1200" b="0" dirty="0">
+                <a:solidFill>
+                  <a:srgbClr val="46565C"/>
+                </a:solidFill>
+                <a:latin typeface="Segoe UI"/>
+              </a:rPr>
+              <a:t>.</a:t>
             </a:r>
           </a:p>
           <a:p>
@@ -14848,13 +18133,121 @@
               </a:spcAft>
             </a:pPr>
             <a:r>
-              <a:rPr sz="1200" b="0">
-                <a:solidFill>
-                  <a:srgbClr val="46565C"/>
-                </a:solidFill>
-                <a:latin typeface="Segoe UI"/>
-              </a:rPr>
-              <a:t>·  Sin evaluación sistemática de calidad todavía: no hay golden set ni evals de regresión.</a:t>
+              <a:rPr sz="1200" b="0" dirty="0">
+                <a:solidFill>
+                  <a:srgbClr val="46565C"/>
+                </a:solidFill>
+                <a:latin typeface="Segoe UI"/>
+              </a:rPr>
+              <a:t>·  Sin </a:t>
+            </a:r>
+            <a:r>
+              <a:rPr sz="1200" b="0" dirty="0" err="1">
+                <a:solidFill>
+                  <a:srgbClr val="46565C"/>
+                </a:solidFill>
+                <a:latin typeface="Segoe UI"/>
+              </a:rPr>
+              <a:t>evaluación</a:t>
+            </a:r>
+            <a:r>
+              <a:rPr sz="1200" b="0" dirty="0">
+                <a:solidFill>
+                  <a:srgbClr val="46565C"/>
+                </a:solidFill>
+                <a:latin typeface="Segoe UI"/>
+              </a:rPr>
+              <a:t> </a:t>
+            </a:r>
+            <a:r>
+              <a:rPr sz="1200" b="0" dirty="0" err="1">
+                <a:solidFill>
+                  <a:srgbClr val="46565C"/>
+                </a:solidFill>
+                <a:latin typeface="Segoe UI"/>
+              </a:rPr>
+              <a:t>sistemática</a:t>
+            </a:r>
+            <a:r>
+              <a:rPr sz="1200" b="0" dirty="0">
+                <a:solidFill>
+                  <a:srgbClr val="46565C"/>
+                </a:solidFill>
+                <a:latin typeface="Segoe UI"/>
+              </a:rPr>
+              <a:t> de </a:t>
+            </a:r>
+            <a:r>
+              <a:rPr sz="1200" b="0" dirty="0" err="1">
+                <a:solidFill>
+                  <a:srgbClr val="46565C"/>
+                </a:solidFill>
+                <a:latin typeface="Segoe UI"/>
+              </a:rPr>
+              <a:t>calidad</a:t>
+            </a:r>
+            <a:r>
+              <a:rPr sz="1200" b="0" dirty="0">
+                <a:solidFill>
+                  <a:srgbClr val="46565C"/>
+                </a:solidFill>
+                <a:latin typeface="Segoe UI"/>
+              </a:rPr>
+              <a:t> </a:t>
+            </a:r>
+            <a:r>
+              <a:rPr sz="1200" b="0" dirty="0" err="1">
+                <a:solidFill>
+                  <a:srgbClr val="46565C"/>
+                </a:solidFill>
+                <a:latin typeface="Segoe UI"/>
+              </a:rPr>
+              <a:t>todavía</a:t>
+            </a:r>
+            <a:r>
+              <a:rPr sz="1200" b="0" dirty="0">
+                <a:solidFill>
+                  <a:srgbClr val="46565C"/>
+                </a:solidFill>
+                <a:latin typeface="Segoe UI"/>
+              </a:rPr>
+              <a:t>: no hay golden set </a:t>
+            </a:r>
+            <a:r>
+              <a:rPr sz="1200" b="0" dirty="0" err="1">
+                <a:solidFill>
+                  <a:srgbClr val="46565C"/>
+                </a:solidFill>
+                <a:latin typeface="Segoe UI"/>
+              </a:rPr>
+              <a:t>ni</a:t>
+            </a:r>
+            <a:r>
+              <a:rPr sz="1200" b="0" dirty="0">
+                <a:solidFill>
+                  <a:srgbClr val="46565C"/>
+                </a:solidFill>
+                <a:latin typeface="Segoe UI"/>
+              </a:rPr>
+              <a:t> evals de </a:t>
+            </a:r>
+            <a:r>
+              <a:rPr sz="1200" b="0" dirty="0" err="1">
+                <a:solidFill>
+                  <a:srgbClr val="46565C"/>
+                </a:solidFill>
+                <a:latin typeface="Segoe UI"/>
+              </a:rPr>
+              <a:t>regresión</a:t>
+            </a:r>
+            <a:r>
+              <a:rPr sz="1200" b="0" dirty="0">
+                <a:solidFill>
+                  <a:srgbClr val="46565C"/>
+                </a:solidFill>
+                <a:latin typeface="Segoe UI"/>
+              </a:rPr>
+              <a:t>.</a:t>
             </a:r>
           </a:p>
           <a:p>
@@ -14864,13 +18257,157 @@
               </a:spcAft>
             </a:pPr>
             <a:r>
-              <a:rPr sz="1200" b="0">
-                <a:solidFill>
-                  <a:srgbClr val="46565C"/>
-                </a:solidFill>
-                <a:latin typeface="Segoe UI"/>
-              </a:rPr>
-              <a:t>·  El contenido generado requiere validación legal y nutricional. El sistema reduce el riesgo; no lo elimina.</a:t>
+              <a:rPr sz="1200" b="0" dirty="0">
+                <a:solidFill>
+                  <a:srgbClr val="46565C"/>
+                </a:solidFill>
+                <a:latin typeface="Segoe UI"/>
+              </a:rPr>
+              <a:t>·  El </a:t>
+            </a:r>
+            <a:r>
+              <a:rPr sz="1200" b="0" dirty="0" err="1">
+                <a:solidFill>
+                  <a:srgbClr val="46565C"/>
+                </a:solidFill>
+                <a:latin typeface="Segoe UI"/>
+              </a:rPr>
+              <a:t>contenido</a:t>
+            </a:r>
+            <a:r>
+              <a:rPr sz="1200" b="0" dirty="0">
+                <a:solidFill>
+                  <a:srgbClr val="46565C"/>
+                </a:solidFill>
+                <a:latin typeface="Segoe UI"/>
+              </a:rPr>
+              <a:t> </a:t>
+            </a:r>
+            <a:r>
+              <a:rPr sz="1200" b="0" dirty="0" err="1">
+                <a:solidFill>
+                  <a:srgbClr val="46565C"/>
+                </a:solidFill>
+                <a:latin typeface="Segoe UI"/>
+              </a:rPr>
+              <a:t>generado</a:t>
+            </a:r>
+            <a:r>
+              <a:rPr sz="1200" b="0" dirty="0">
+                <a:solidFill>
+                  <a:srgbClr val="46565C"/>
+                </a:solidFill>
+                <a:latin typeface="Segoe UI"/>
+              </a:rPr>
+              <a:t> </a:t>
+            </a:r>
+            <a:r>
+              <a:rPr sz="1200" b="0" dirty="0" err="1">
+                <a:solidFill>
+                  <a:srgbClr val="46565C"/>
+                </a:solidFill>
+                <a:latin typeface="Segoe UI"/>
+              </a:rPr>
+              <a:t>requiere</a:t>
+            </a:r>
+            <a:r>
+              <a:rPr sz="1200" b="0" dirty="0">
+                <a:solidFill>
+                  <a:srgbClr val="46565C"/>
+                </a:solidFill>
+                <a:latin typeface="Segoe UI"/>
+              </a:rPr>
+              <a:t> </a:t>
+            </a:r>
+            <a:r>
+              <a:rPr sz="1200" b="0" dirty="0" err="1">
+                <a:solidFill>
+                  <a:srgbClr val="46565C"/>
+                </a:solidFill>
+                <a:latin typeface="Segoe UI"/>
+              </a:rPr>
+              <a:t>validación</a:t>
+            </a:r>
+            <a:r>
+              <a:rPr sz="1200" b="0" dirty="0">
+                <a:solidFill>
+                  <a:srgbClr val="46565C"/>
+                </a:solidFill>
+                <a:latin typeface="Segoe UI"/>
+              </a:rPr>
+              <a:t> legal y </a:t>
+            </a:r>
+            <a:r>
+              <a:rPr sz="1200" b="0" dirty="0" err="1">
+                <a:solidFill>
+                  <a:srgbClr val="46565C"/>
+                </a:solidFill>
+                <a:latin typeface="Segoe UI"/>
+              </a:rPr>
+              <a:t>nutricional</a:t>
+            </a:r>
+            <a:r>
+              <a:rPr sz="1200" b="0" dirty="0">
+                <a:solidFill>
+                  <a:srgbClr val="46565C"/>
+                </a:solidFill>
+                <a:latin typeface="Segoe UI"/>
+              </a:rPr>
+              <a:t>. El </a:t>
+            </a:r>
+            <a:r>
+              <a:rPr sz="1200" b="0" dirty="0" err="1">
+                <a:solidFill>
+                  <a:srgbClr val="46565C"/>
+                </a:solidFill>
+                <a:latin typeface="Segoe UI"/>
+              </a:rPr>
+              <a:t>sistema</a:t>
+            </a:r>
+            <a:r>
+              <a:rPr sz="1200" b="0" dirty="0">
+                <a:solidFill>
+                  <a:srgbClr val="46565C"/>
+                </a:solidFill>
+                <a:latin typeface="Segoe UI"/>
+              </a:rPr>
+              <a:t> reduce el </a:t>
+            </a:r>
+            <a:r>
+              <a:rPr sz="1200" b="0" dirty="0" err="1">
+                <a:solidFill>
+                  <a:srgbClr val="46565C"/>
+                </a:solidFill>
+                <a:latin typeface="Segoe UI"/>
+              </a:rPr>
+              <a:t>riesgo</a:t>
+            </a:r>
+            <a:r>
+              <a:rPr sz="1200" b="0" dirty="0">
+                <a:solidFill>
+                  <a:srgbClr val="46565C"/>
+                </a:solidFill>
+                <a:latin typeface="Segoe UI"/>
+              </a:rPr>
+              <a:t>; no lo </a:t>
+            </a:r>
+            <a:r>
+              <a:rPr sz="1200" b="0" dirty="0" err="1">
+                <a:solidFill>
+                  <a:srgbClr val="46565C"/>
+                </a:solidFill>
+                <a:latin typeface="Segoe UI"/>
+              </a:rPr>
+              <a:t>elimina</a:t>
+            </a:r>
+            <a:r>
+              <a:rPr sz="1200" b="0" dirty="0">
+                <a:solidFill>
+                  <a:srgbClr val="46565C"/>
+                </a:solidFill>
+                <a:latin typeface="Segoe UI"/>
+              </a:rPr>
+              <a:t>.</a:t>
             </a:r>
           </a:p>
         </p:txBody>
@@ -14918,6 +18455,7 @@
           <a:lstStyle/>
           <a:p>
             <a:pPr algn="ctr"/>
+            <a:endParaRPr/>
           </a:p>
         </p:txBody>
       </p:sp>
@@ -14930,7 +18468,7 @@
         <p:spPr>
           <a:xfrm>
             <a:off x="1188720" y="5175504"/>
-            <a:ext cx="10058400" cy="1005840"/>
+            <a:ext cx="10058400" cy="805349"/>
           </a:xfrm>
           <a:prstGeom prst="rect">
             <a:avLst/>
@@ -14938,7 +18476,7 @@
           <a:noFill/>
         </p:spPr>
         <p:txBody>
-          <a:bodyPr wrap="square" anchor="t" lIns="0" rIns="0" tIns="0" bIns="0">
+          <a:bodyPr wrap="square" lIns="0" tIns="0" rIns="0" bIns="0" anchor="t">
             <a:spAutoFit/>
           </a:bodyPr>
           <a:lstStyle/>
@@ -14949,14 +18487,101 @@
               </a:spcAft>
             </a:pPr>
             <a:r>
-              <a:rPr sz="1200" b="1">
+              <a:rPr sz="1200" b="1" dirty="0">
                 <a:solidFill>
                   <a:srgbClr val="101619"/>
                 </a:solidFill>
                 <a:latin typeface="Segoe UI"/>
               </a:rPr>
-              <a:t>Lo que haría a continuación, en orden</a:t>
-            </a:r>
+              <a:t>Lo </a:t>
+            </a:r>
+            <a:r>
+              <a:rPr sz="1200" b="1" dirty="0" err="1">
+                <a:solidFill>
+                  <a:srgbClr val="101619"/>
+                </a:solidFill>
+                <a:latin typeface="Segoe UI"/>
+              </a:rPr>
+              <a:t>que</a:t>
+            </a:r>
+            <a:r>
+              <a:rPr sz="1200" b="1" dirty="0">
+                <a:solidFill>
+                  <a:srgbClr val="101619"/>
+                </a:solidFill>
+                <a:latin typeface="Segoe UI"/>
+              </a:rPr>
+              <a:t> </a:t>
+            </a:r>
+            <a:r>
+              <a:rPr sz="1200" b="1" dirty="0" err="1">
+                <a:solidFill>
+                  <a:srgbClr val="101619"/>
+                </a:solidFill>
+                <a:latin typeface="Segoe UI"/>
+              </a:rPr>
+              <a:t>haría</a:t>
+            </a:r>
+            <a:r>
+              <a:rPr sz="1200" b="1" dirty="0">
+                <a:solidFill>
+                  <a:srgbClr val="101619"/>
+                </a:solidFill>
+                <a:latin typeface="Segoe UI"/>
+              </a:rPr>
+              <a:t> a </a:t>
+            </a:r>
+            <a:r>
+              <a:rPr sz="1200" b="1" dirty="0" err="1">
+                <a:solidFill>
+                  <a:srgbClr val="101619"/>
+                </a:solidFill>
+                <a:latin typeface="Segoe UI"/>
+              </a:rPr>
+              <a:t>continuación</a:t>
+            </a:r>
+            <a:r>
+              <a:rPr sz="1200" b="1" dirty="0">
+                <a:solidFill>
+                  <a:srgbClr val="101619"/>
+                </a:solidFill>
+                <a:latin typeface="Segoe UI"/>
+              </a:rPr>
+              <a:t>, </a:t>
+            </a:r>
+            <a:r>
+              <a:rPr sz="1200" b="1" dirty="0" err="1">
+                <a:solidFill>
+                  <a:srgbClr val="101619"/>
+                </a:solidFill>
+                <a:latin typeface="Segoe UI"/>
+              </a:rPr>
+              <a:t>en</a:t>
+            </a:r>
+            <a:r>
+              <a:rPr sz="1200" b="1" dirty="0">
+                <a:solidFill>
+                  <a:srgbClr val="101619"/>
+                </a:solidFill>
+                <a:latin typeface="Segoe UI"/>
+              </a:rPr>
+              <a:t> </a:t>
+            </a:r>
+            <a:r>
+              <a:rPr sz="1200" b="1" dirty="0" err="1">
+                <a:solidFill>
+                  <a:srgbClr val="101619"/>
+                </a:solidFill>
+                <a:latin typeface="Segoe UI"/>
+              </a:rPr>
+              <a:t>orden</a:t>
+            </a:r>
+            <a:endParaRPr sz="1200" b="1" dirty="0">
+              <a:solidFill>
+                <a:srgbClr val="101619"/>
+              </a:solidFill>
+              <a:latin typeface="Segoe UI"/>
+            </a:endParaRPr>
           </a:p>
           <a:p>
             <a:pPr>
@@ -14965,13 +18590,319 @@
               </a:spcAft>
             </a:pPr>
             <a:r>
-              <a:rPr sz="1150" b="0">
-                <a:solidFill>
-                  <a:srgbClr val="46565C"/>
-                </a:solidFill>
-                <a:latin typeface="Segoe UI"/>
-              </a:rPr>
-              <a:t>1 · Evals en Langfuse con manuales de referencia, para detectar regresión al tocar prompts.    2 · Medición geométrica real (OpenCV) para las reglas de logo y área, dejando al modelo de visión lo que sí es juicio.</a:t>
+              <a:rPr sz="1150" b="0" dirty="0">
+                <a:solidFill>
+                  <a:srgbClr val="46565C"/>
+                </a:solidFill>
+                <a:latin typeface="Segoe UI"/>
+              </a:rPr>
+              <a:t>1 · Evals </a:t>
+            </a:r>
+            <a:r>
+              <a:rPr sz="1150" b="0" dirty="0" err="1">
+                <a:solidFill>
+                  <a:srgbClr val="46565C"/>
+                </a:solidFill>
+                <a:latin typeface="Segoe UI"/>
+              </a:rPr>
+              <a:t>en</a:t>
+            </a:r>
+            <a:r>
+              <a:rPr sz="1150" b="0" dirty="0">
+                <a:solidFill>
+                  <a:srgbClr val="46565C"/>
+                </a:solidFill>
+                <a:latin typeface="Segoe UI"/>
+              </a:rPr>
+              <a:t> </a:t>
+            </a:r>
+            <a:r>
+              <a:rPr sz="1150" b="0" dirty="0" err="1">
+                <a:solidFill>
+                  <a:srgbClr val="46565C"/>
+                </a:solidFill>
+                <a:latin typeface="Segoe UI"/>
+              </a:rPr>
+              <a:t>Langfuse</a:t>
+            </a:r>
+            <a:r>
+              <a:rPr sz="1150" b="0" dirty="0">
+                <a:solidFill>
+                  <a:srgbClr val="46565C"/>
+                </a:solidFill>
+                <a:latin typeface="Segoe UI"/>
+              </a:rPr>
+              <a:t> con </a:t>
+            </a:r>
+            <a:r>
+              <a:rPr sz="1150" b="0" dirty="0" err="1">
+                <a:solidFill>
+                  <a:srgbClr val="46565C"/>
+                </a:solidFill>
+                <a:latin typeface="Segoe UI"/>
+              </a:rPr>
+              <a:t>manuales</a:t>
+            </a:r>
+            <a:r>
+              <a:rPr sz="1150" b="0" dirty="0">
+                <a:solidFill>
+                  <a:srgbClr val="46565C"/>
+                </a:solidFill>
+                <a:latin typeface="Segoe UI"/>
+              </a:rPr>
+              <a:t> de </a:t>
+            </a:r>
+            <a:r>
+              <a:rPr sz="1150" b="0" dirty="0" err="1">
+                <a:solidFill>
+                  <a:srgbClr val="46565C"/>
+                </a:solidFill>
+                <a:latin typeface="Segoe UI"/>
+              </a:rPr>
+              <a:t>referencia</a:t>
+            </a:r>
+            <a:r>
+              <a:rPr sz="1150" b="0" dirty="0">
+                <a:solidFill>
+                  <a:srgbClr val="46565C"/>
+                </a:solidFill>
+                <a:latin typeface="Segoe UI"/>
+              </a:rPr>
+              <a:t>, para </a:t>
+            </a:r>
+            <a:r>
+              <a:rPr sz="1150" b="0" dirty="0" err="1">
+                <a:solidFill>
+                  <a:srgbClr val="46565C"/>
+                </a:solidFill>
+                <a:latin typeface="Segoe UI"/>
+              </a:rPr>
+              <a:t>detectar</a:t>
+            </a:r>
+            <a:r>
+              <a:rPr sz="1150" b="0" dirty="0">
+                <a:solidFill>
+                  <a:srgbClr val="46565C"/>
+                </a:solidFill>
+                <a:latin typeface="Segoe UI"/>
+              </a:rPr>
+              <a:t> </a:t>
+            </a:r>
+            <a:r>
+              <a:rPr sz="1150" b="0" dirty="0" err="1">
+                <a:solidFill>
+                  <a:srgbClr val="46565C"/>
+                </a:solidFill>
+                <a:latin typeface="Segoe UI"/>
+              </a:rPr>
+              <a:t>regresión</a:t>
+            </a:r>
+            <a:r>
+              <a:rPr sz="1150" b="0" dirty="0">
+                <a:solidFill>
+                  <a:srgbClr val="46565C"/>
+                </a:solidFill>
+                <a:latin typeface="Segoe UI"/>
+              </a:rPr>
+              <a:t> al </a:t>
+            </a:r>
+            <a:r>
+              <a:rPr sz="1150" b="0" dirty="0" err="1">
+                <a:solidFill>
+                  <a:srgbClr val="46565C"/>
+                </a:solidFill>
+                <a:latin typeface="Segoe UI"/>
+              </a:rPr>
+              <a:t>tocar</a:t>
+            </a:r>
+            <a:r>
+              <a:rPr sz="1150" b="0" dirty="0">
+                <a:solidFill>
+                  <a:srgbClr val="46565C"/>
+                </a:solidFill>
+                <a:latin typeface="Segoe UI"/>
+              </a:rPr>
+              <a:t> prompts.    2 · </a:t>
+            </a:r>
+            <a:r>
+              <a:rPr sz="1150" b="0" dirty="0" err="1">
+                <a:solidFill>
+                  <a:srgbClr val="46565C"/>
+                </a:solidFill>
+                <a:latin typeface="Segoe UI"/>
+              </a:rPr>
+              <a:t>Medición</a:t>
+            </a:r>
+            <a:r>
+              <a:rPr sz="1150" b="0" dirty="0">
+                <a:solidFill>
+                  <a:srgbClr val="46565C"/>
+                </a:solidFill>
+                <a:latin typeface="Segoe UI"/>
+              </a:rPr>
+              <a:t> </a:t>
+            </a:r>
+            <a:r>
+              <a:rPr sz="1150" b="0" dirty="0" err="1">
+                <a:solidFill>
+                  <a:srgbClr val="46565C"/>
+                </a:solidFill>
+                <a:latin typeface="Segoe UI"/>
+              </a:rPr>
+              <a:t>geométrica</a:t>
+            </a:r>
+            <a:r>
+              <a:rPr sz="1150" b="0" dirty="0">
+                <a:solidFill>
+                  <a:srgbClr val="46565C"/>
+                </a:solidFill>
+                <a:latin typeface="Segoe UI"/>
+              </a:rPr>
+              <a:t> real (OpenCV) para las </a:t>
+            </a:r>
+            <a:r>
+              <a:rPr sz="1150" b="0" dirty="0" err="1">
+                <a:solidFill>
+                  <a:srgbClr val="46565C"/>
+                </a:solidFill>
+                <a:latin typeface="Segoe UI"/>
+              </a:rPr>
+              <a:t>reglas</a:t>
+            </a:r>
+            <a:r>
+              <a:rPr sz="1150" b="0" dirty="0">
+                <a:solidFill>
+                  <a:srgbClr val="46565C"/>
+                </a:solidFill>
+                <a:latin typeface="Segoe UI"/>
+              </a:rPr>
+              <a:t> de logo y </a:t>
+            </a:r>
+            <a:r>
+              <a:rPr sz="1150" b="0" dirty="0" err="1">
+                <a:solidFill>
+                  <a:srgbClr val="46565C"/>
+                </a:solidFill>
+                <a:latin typeface="Segoe UI"/>
+              </a:rPr>
+              <a:t>área</a:t>
+            </a:r>
+            <a:r>
+              <a:rPr sz="1150" b="0" dirty="0">
+                <a:solidFill>
+                  <a:srgbClr val="46565C"/>
+                </a:solidFill>
+                <a:latin typeface="Segoe UI"/>
+              </a:rPr>
+              <a:t>, </a:t>
+            </a:r>
+            <a:r>
+              <a:rPr sz="1150" b="0" dirty="0" err="1">
+                <a:solidFill>
+                  <a:srgbClr val="46565C"/>
+                </a:solidFill>
+                <a:latin typeface="Segoe UI"/>
+              </a:rPr>
+              <a:t>dejando</a:t>
+            </a:r>
+            <a:r>
+              <a:rPr sz="1150" b="0" dirty="0">
+                <a:solidFill>
+                  <a:srgbClr val="46565C"/>
+                </a:solidFill>
+                <a:latin typeface="Segoe UI"/>
+              </a:rPr>
+              <a:t> al </a:t>
+            </a:r>
+            <a:r>
+              <a:rPr sz="1150" b="0" dirty="0" err="1">
+                <a:solidFill>
+                  <a:srgbClr val="46565C"/>
+                </a:solidFill>
+                <a:latin typeface="Segoe UI"/>
+              </a:rPr>
+              <a:t>modelo</a:t>
+            </a:r>
+            <a:r>
+              <a:rPr sz="1150" b="0" dirty="0">
+                <a:solidFill>
+                  <a:srgbClr val="46565C"/>
+                </a:solidFill>
+                <a:latin typeface="Segoe UI"/>
+              </a:rPr>
+              <a:t> de </a:t>
+            </a:r>
+            <a:r>
+              <a:rPr sz="1150" b="0" dirty="0" err="1">
+                <a:solidFill>
+                  <a:srgbClr val="46565C"/>
+                </a:solidFill>
+                <a:latin typeface="Segoe UI"/>
+              </a:rPr>
+              <a:t>visión</a:t>
+            </a:r>
+            <a:r>
+              <a:rPr sz="1150" b="0" dirty="0">
+                <a:solidFill>
+                  <a:srgbClr val="46565C"/>
+                </a:solidFill>
+                <a:latin typeface="Segoe UI"/>
+              </a:rPr>
+              <a:t> lo </a:t>
+            </a:r>
+            <a:r>
+              <a:rPr sz="1150" b="0" dirty="0" err="1">
+                <a:solidFill>
+                  <a:srgbClr val="46565C"/>
+                </a:solidFill>
+                <a:latin typeface="Segoe UI"/>
+              </a:rPr>
+              <a:t>que</a:t>
+            </a:r>
+            <a:r>
+              <a:rPr sz="1150" b="0" dirty="0">
+                <a:solidFill>
+                  <a:srgbClr val="46565C"/>
+                </a:solidFill>
+                <a:latin typeface="Segoe UI"/>
+              </a:rPr>
+              <a:t> </a:t>
+            </a:r>
+            <a:r>
+              <a:rPr sz="1150" b="0" dirty="0" err="1">
+                <a:solidFill>
+                  <a:srgbClr val="46565C"/>
+                </a:solidFill>
+                <a:latin typeface="Segoe UI"/>
+              </a:rPr>
+              <a:t>sí</a:t>
+            </a:r>
+            <a:r>
+              <a:rPr sz="1150" b="0" dirty="0">
+                <a:solidFill>
+                  <a:srgbClr val="46565C"/>
+                </a:solidFill>
+                <a:latin typeface="Segoe UI"/>
+              </a:rPr>
+              <a:t> es </a:t>
+            </a:r>
+            <a:r>
+              <a:rPr sz="1150" b="0" dirty="0" err="1">
+                <a:solidFill>
+                  <a:srgbClr val="46565C"/>
+                </a:solidFill>
+                <a:latin typeface="Segoe UI"/>
+              </a:rPr>
+              <a:t>juicio</a:t>
+            </a:r>
+            <a:r>
+              <a:rPr sz="1150" b="0" dirty="0">
+                <a:solidFill>
+                  <a:srgbClr val="46565C"/>
+                </a:solidFill>
+                <a:latin typeface="Segoe UI"/>
+              </a:rPr>
+              <a:t>.</a:t>
             </a:r>
           </a:p>
           <a:p>
@@ -14981,13 +18912,85 @@
               </a:spcAft>
             </a:pPr>
             <a:r>
-              <a:rPr sz="1150" b="0">
-                <a:solidFill>
-                  <a:srgbClr val="46565C"/>
-                </a:solidFill>
-                <a:latin typeface="Segoe UI"/>
-              </a:rPr>
-              <a:t>3 · Versionado de prompts en Langfuse para iterar sin redeploy.    4 · Cookie httpOnly + CSRF una vez validado el proxy de rewrite.</a:t>
+              <a:rPr sz="1150" b="0" dirty="0">
+                <a:solidFill>
+                  <a:srgbClr val="46565C"/>
+                </a:solidFill>
+                <a:latin typeface="Segoe UI"/>
+              </a:rPr>
+              <a:t>3 · </a:t>
+            </a:r>
+            <a:r>
+              <a:rPr sz="1150" b="0" dirty="0" err="1">
+                <a:solidFill>
+                  <a:srgbClr val="46565C"/>
+                </a:solidFill>
+                <a:latin typeface="Segoe UI"/>
+              </a:rPr>
+              <a:t>Versionado</a:t>
+            </a:r>
+            <a:r>
+              <a:rPr sz="1150" b="0" dirty="0">
+                <a:solidFill>
+                  <a:srgbClr val="46565C"/>
+                </a:solidFill>
+                <a:latin typeface="Segoe UI"/>
+              </a:rPr>
+              <a:t> de prompts </a:t>
+            </a:r>
+            <a:r>
+              <a:rPr sz="1150" b="0" dirty="0" err="1">
+                <a:solidFill>
+                  <a:srgbClr val="46565C"/>
+                </a:solidFill>
+                <a:latin typeface="Segoe UI"/>
+              </a:rPr>
+              <a:t>en</a:t>
+            </a:r>
+            <a:r>
+              <a:rPr sz="1150" b="0" dirty="0">
+                <a:solidFill>
+                  <a:srgbClr val="46565C"/>
+                </a:solidFill>
+                <a:latin typeface="Segoe UI"/>
+              </a:rPr>
+              <a:t> </a:t>
+            </a:r>
+            <a:r>
+              <a:rPr sz="1150" b="0" dirty="0" err="1">
+                <a:solidFill>
+                  <a:srgbClr val="46565C"/>
+                </a:solidFill>
+                <a:latin typeface="Segoe UI"/>
+              </a:rPr>
+              <a:t>Langfuse</a:t>
+            </a:r>
+            <a:r>
+              <a:rPr sz="1150" b="0" dirty="0">
+                <a:solidFill>
+                  <a:srgbClr val="46565C"/>
+                </a:solidFill>
+                <a:latin typeface="Segoe UI"/>
+              </a:rPr>
+              <a:t> para </a:t>
+            </a:r>
+            <a:r>
+              <a:rPr sz="1150" b="0" dirty="0" err="1">
+                <a:solidFill>
+                  <a:srgbClr val="46565C"/>
+                </a:solidFill>
+                <a:latin typeface="Segoe UI"/>
+              </a:rPr>
+              <a:t>iterar</a:t>
+            </a:r>
+            <a:r>
+              <a:rPr sz="1150" b="0" dirty="0">
+                <a:solidFill>
+                  <a:srgbClr val="46565C"/>
+                </a:solidFill>
+                <a:latin typeface="Segoe UI"/>
+              </a:rPr>
+              <a:t> sin redeploy.   </a:t>
             </a:r>
           </a:p>
         </p:txBody>
